--- a/W3/3. W3S3 final/W3S3.pptx
+++ b/W3/3. W3S3 final/W3S3.pptx
@@ -269,2676 +269,26 @@
 <file path=ppt/changesInfos/changesInfo1.xml><?xml version="1.0" encoding="utf-8"?>
 <pc:chgInfo xmlns:a="http://schemas.openxmlformats.org/drawingml/2006/main" xmlns:r="http://schemas.openxmlformats.org/officeDocument/2006/relationships" xmlns:ac="http://schemas.microsoft.com/office/drawing/2013/main/command" xmlns:pc="http://schemas.microsoft.com/office/powerpoint/2013/main/command">
   <pc:docChgLst>
-    <pc:chgData name="Matthieu De Mari" userId="dfb708c9-d8dc-439f-9a3b-c772bf4a311c" providerId="ADAL" clId="{AC0CA790-EDC2-4116-8838-0C3C4AEF80E1}"/>
-    <pc:docChg chg="undo redo custSel modSld">
-      <pc:chgData name="Matthieu De Mari" userId="dfb708c9-d8dc-439f-9a3b-c772bf4a311c" providerId="ADAL" clId="{AC0CA790-EDC2-4116-8838-0C3C4AEF80E1}" dt="2023-07-06T04:13:36.987" v="2482" actId="1076"/>
+    <pc:chgData name="Matthieu De Mari" userId="dfb708c9-d8dc-439f-9a3b-c772bf4a311c" providerId="ADAL" clId="{81E9B007-0C2C-493E-9B93-55A62C9C1F12}"/>
+    <pc:docChg chg="modSld">
+      <pc:chgData name="Matthieu De Mari" userId="dfb708c9-d8dc-439f-9a3b-c772bf4a311c" providerId="ADAL" clId="{81E9B007-0C2C-493E-9B93-55A62C9C1F12}" dt="2026-01-12T06:33:40.610" v="0" actId="14100"/>
       <pc:docMkLst>
         <pc:docMk/>
       </pc:docMkLst>
       <pc:sldChg chg="modSp mod">
-        <pc:chgData name="Matthieu De Mari" userId="dfb708c9-d8dc-439f-9a3b-c772bf4a311c" providerId="ADAL" clId="{AC0CA790-EDC2-4116-8838-0C3C4AEF80E1}" dt="2023-07-06T03:19:06.826" v="28" actId="20577"/>
-        <pc:sldMkLst>
-          <pc:docMk/>
-          <pc:sldMk cId="1458730680" sldId="396"/>
-        </pc:sldMkLst>
-      </pc:sldChg>
-      <pc:sldChg chg="modSp mod">
-        <pc:chgData name="Matthieu De Mari" userId="dfb708c9-d8dc-439f-9a3b-c772bf4a311c" providerId="ADAL" clId="{AC0CA790-EDC2-4116-8838-0C3C4AEF80E1}" dt="2023-07-06T03:20:27.525" v="59" actId="20577"/>
-        <pc:sldMkLst>
-          <pc:docMk/>
-          <pc:sldMk cId="1451434589" sldId="397"/>
-        </pc:sldMkLst>
-      </pc:sldChg>
-      <pc:sldChg chg="modSp mod">
-        <pc:chgData name="Matthieu De Mari" userId="dfb708c9-d8dc-439f-9a3b-c772bf4a311c" providerId="ADAL" clId="{AC0CA790-EDC2-4116-8838-0C3C4AEF80E1}" dt="2023-07-06T03:27:44.584" v="555" actId="5793"/>
-        <pc:sldMkLst>
-          <pc:docMk/>
-          <pc:sldMk cId="2867637474" sldId="398"/>
-        </pc:sldMkLst>
-      </pc:sldChg>
-      <pc:sldChg chg="modSp mod">
-        <pc:chgData name="Matthieu De Mari" userId="dfb708c9-d8dc-439f-9a3b-c772bf4a311c" providerId="ADAL" clId="{AC0CA790-EDC2-4116-8838-0C3C4AEF80E1}" dt="2023-07-06T03:30:44.250" v="672" actId="1076"/>
-        <pc:sldMkLst>
-          <pc:docMk/>
-          <pc:sldMk cId="122423608" sldId="399"/>
-        </pc:sldMkLst>
-      </pc:sldChg>
-      <pc:sldChg chg="modSp mod">
-        <pc:chgData name="Matthieu De Mari" userId="dfb708c9-d8dc-439f-9a3b-c772bf4a311c" providerId="ADAL" clId="{AC0CA790-EDC2-4116-8838-0C3C4AEF80E1}" dt="2023-07-06T04:07:53.877" v="2170" actId="115"/>
-        <pc:sldMkLst>
-          <pc:docMk/>
-          <pc:sldMk cId="4039171501" sldId="401"/>
-        </pc:sldMkLst>
-      </pc:sldChg>
-      <pc:sldChg chg="modSp">
-        <pc:chgData name="Matthieu De Mari" userId="dfb708c9-d8dc-439f-9a3b-c772bf4a311c" providerId="ADAL" clId="{AC0CA790-EDC2-4116-8838-0C3C4AEF80E1}" dt="2023-07-06T03:46:48.742" v="1604" actId="20577"/>
-        <pc:sldMkLst>
-          <pc:docMk/>
-          <pc:sldMk cId="3163596145" sldId="402"/>
-        </pc:sldMkLst>
-      </pc:sldChg>
-      <pc:sldChg chg="modSp mod">
-        <pc:chgData name="Matthieu De Mari" userId="dfb708c9-d8dc-439f-9a3b-c772bf4a311c" providerId="ADAL" clId="{AC0CA790-EDC2-4116-8838-0C3C4AEF80E1}" dt="2023-07-06T04:11:14.886" v="2327" actId="20577"/>
-        <pc:sldMkLst>
-          <pc:docMk/>
-          <pc:sldMk cId="101927766" sldId="403"/>
-        </pc:sldMkLst>
-      </pc:sldChg>
-      <pc:sldChg chg="modSp mod">
-        <pc:chgData name="Matthieu De Mari" userId="dfb708c9-d8dc-439f-9a3b-c772bf4a311c" providerId="ADAL" clId="{AC0CA790-EDC2-4116-8838-0C3C4AEF80E1}" dt="2023-07-06T03:19:33.937" v="38" actId="20577"/>
-        <pc:sldMkLst>
-          <pc:docMk/>
-          <pc:sldMk cId="2278534749" sldId="786"/>
-        </pc:sldMkLst>
-      </pc:sldChg>
-      <pc:sldChg chg="addSp delSp modSp mod">
-        <pc:chgData name="Matthieu De Mari" userId="dfb708c9-d8dc-439f-9a3b-c772bf4a311c" providerId="ADAL" clId="{AC0CA790-EDC2-4116-8838-0C3C4AEF80E1}" dt="2023-07-06T03:19:55.609" v="41"/>
-        <pc:sldMkLst>
-          <pc:docMk/>
-          <pc:sldMk cId="3381120192" sldId="788"/>
-        </pc:sldMkLst>
-      </pc:sldChg>
-      <pc:sldChg chg="addSp delSp modSp mod chgLayout">
-        <pc:chgData name="Matthieu De Mari" userId="dfb708c9-d8dc-439f-9a3b-c772bf4a311c" providerId="ADAL" clId="{AC0CA790-EDC2-4116-8838-0C3C4AEF80E1}" dt="2023-07-06T03:21:36.731" v="100" actId="20577"/>
-        <pc:sldMkLst>
-          <pc:docMk/>
-          <pc:sldMk cId="592329134" sldId="790"/>
-        </pc:sldMkLst>
-      </pc:sldChg>
-      <pc:sldChg chg="modSp mod">
-        <pc:chgData name="Matthieu De Mari" userId="dfb708c9-d8dc-439f-9a3b-c772bf4a311c" providerId="ADAL" clId="{AC0CA790-EDC2-4116-8838-0C3C4AEF80E1}" dt="2023-07-06T03:22:42.989" v="116" actId="20577"/>
+        <pc:chgData name="Matthieu De Mari" userId="dfb708c9-d8dc-439f-9a3b-c772bf4a311c" providerId="ADAL" clId="{81E9B007-0C2C-493E-9B93-55A62C9C1F12}" dt="2026-01-12T06:33:40.610" v="0" actId="14100"/>
         <pc:sldMkLst>
           <pc:docMk/>
           <pc:sldMk cId="2330822039" sldId="792"/>
         </pc:sldMkLst>
-      </pc:sldChg>
-      <pc:sldChg chg="modSp mod">
-        <pc:chgData name="Matthieu De Mari" userId="dfb708c9-d8dc-439f-9a3b-c772bf4a311c" providerId="ADAL" clId="{AC0CA790-EDC2-4116-8838-0C3C4AEF80E1}" dt="2023-07-06T03:23:03.043" v="143" actId="27636"/>
-        <pc:sldMkLst>
-          <pc:docMk/>
-          <pc:sldMk cId="260742946" sldId="793"/>
-        </pc:sldMkLst>
-      </pc:sldChg>
-      <pc:sldChg chg="addSp delSp modSp mod">
-        <pc:chgData name="Matthieu De Mari" userId="dfb708c9-d8dc-439f-9a3b-c772bf4a311c" providerId="ADAL" clId="{AC0CA790-EDC2-4116-8838-0C3C4AEF80E1}" dt="2023-07-06T03:27:32.885" v="554" actId="208"/>
-        <pc:sldMkLst>
-          <pc:docMk/>
-          <pc:sldMk cId="1577144882" sldId="794"/>
-        </pc:sldMkLst>
-      </pc:sldChg>
-      <pc:sldChg chg="modSp mod">
-        <pc:chgData name="Matthieu De Mari" userId="dfb708c9-d8dc-439f-9a3b-c772bf4a311c" providerId="ADAL" clId="{AC0CA790-EDC2-4116-8838-0C3C4AEF80E1}" dt="2023-07-06T03:28:56.389" v="626" actId="20577"/>
-        <pc:sldMkLst>
-          <pc:docMk/>
-          <pc:sldMk cId="2353942002" sldId="795"/>
-        </pc:sldMkLst>
-      </pc:sldChg>
-      <pc:sldChg chg="modSp mod">
-        <pc:chgData name="Matthieu De Mari" userId="dfb708c9-d8dc-439f-9a3b-c772bf4a311c" providerId="ADAL" clId="{AC0CA790-EDC2-4116-8838-0C3C4AEF80E1}" dt="2023-07-06T03:29:43.820" v="641" actId="20577"/>
-        <pc:sldMkLst>
-          <pc:docMk/>
-          <pc:sldMk cId="1414932605" sldId="796"/>
-        </pc:sldMkLst>
-      </pc:sldChg>
-      <pc:sldChg chg="modSp mod">
-        <pc:chgData name="Matthieu De Mari" userId="dfb708c9-d8dc-439f-9a3b-c772bf4a311c" providerId="ADAL" clId="{AC0CA790-EDC2-4116-8838-0C3C4AEF80E1}" dt="2023-07-06T03:31:48.636" v="735" actId="20577"/>
-        <pc:sldMkLst>
-          <pc:docMk/>
-          <pc:sldMk cId="567883404" sldId="798"/>
-        </pc:sldMkLst>
-      </pc:sldChg>
-      <pc:sldChg chg="modSp mod">
-        <pc:chgData name="Matthieu De Mari" userId="dfb708c9-d8dc-439f-9a3b-c772bf4a311c" providerId="ADAL" clId="{AC0CA790-EDC2-4116-8838-0C3C4AEF80E1}" dt="2023-07-06T03:31:18.111" v="707" actId="20577"/>
-        <pc:sldMkLst>
-          <pc:docMk/>
-          <pc:sldMk cId="703353227" sldId="799"/>
-        </pc:sldMkLst>
-      </pc:sldChg>
-      <pc:sldChg chg="modSp mod">
-        <pc:chgData name="Matthieu De Mari" userId="dfb708c9-d8dc-439f-9a3b-c772bf4a311c" providerId="ADAL" clId="{AC0CA790-EDC2-4116-8838-0C3C4AEF80E1}" dt="2023-07-06T03:32:13.833" v="748" actId="20577"/>
-        <pc:sldMkLst>
-          <pc:docMk/>
-          <pc:sldMk cId="253262496" sldId="802"/>
-        </pc:sldMkLst>
-      </pc:sldChg>
-      <pc:sldChg chg="modSp">
-        <pc:chgData name="Matthieu De Mari" userId="dfb708c9-d8dc-439f-9a3b-c772bf4a311c" providerId="ADAL" clId="{AC0CA790-EDC2-4116-8838-0C3C4AEF80E1}" dt="2023-07-06T03:38:38.419" v="1083" actId="20577"/>
-        <pc:sldMkLst>
-          <pc:docMk/>
-          <pc:sldMk cId="232544569" sldId="803"/>
-        </pc:sldMkLst>
-      </pc:sldChg>
-      <pc:sldChg chg="modSp mod">
-        <pc:chgData name="Matthieu De Mari" userId="dfb708c9-d8dc-439f-9a3b-c772bf4a311c" providerId="ADAL" clId="{AC0CA790-EDC2-4116-8838-0C3C4AEF80E1}" dt="2023-07-06T03:33:27.882" v="807" actId="207"/>
-        <pc:sldMkLst>
-          <pc:docMk/>
-          <pc:sldMk cId="165715628" sldId="804"/>
-        </pc:sldMkLst>
-      </pc:sldChg>
-      <pc:sldChg chg="modSp mod">
-        <pc:chgData name="Matthieu De Mari" userId="dfb708c9-d8dc-439f-9a3b-c772bf4a311c" providerId="ADAL" clId="{AC0CA790-EDC2-4116-8838-0C3C4AEF80E1}" dt="2023-07-06T03:37:21.434" v="1042" actId="27636"/>
-        <pc:sldMkLst>
-          <pc:docMk/>
-          <pc:sldMk cId="1145967515" sldId="805"/>
-        </pc:sldMkLst>
-      </pc:sldChg>
-      <pc:sldChg chg="modSp mod">
-        <pc:chgData name="Matthieu De Mari" userId="dfb708c9-d8dc-439f-9a3b-c772bf4a311c" providerId="ADAL" clId="{AC0CA790-EDC2-4116-8838-0C3C4AEF80E1}" dt="2023-07-06T03:39:37.608" v="1161" actId="113"/>
-        <pc:sldMkLst>
-          <pc:docMk/>
-          <pc:sldMk cId="3590245027" sldId="806"/>
-        </pc:sldMkLst>
-      </pc:sldChg>
-      <pc:sldChg chg="modSp mod">
-        <pc:chgData name="Matthieu De Mari" userId="dfb708c9-d8dc-439f-9a3b-c772bf4a311c" providerId="ADAL" clId="{AC0CA790-EDC2-4116-8838-0C3C4AEF80E1}" dt="2023-07-06T03:41:59.624" v="1317" actId="20577"/>
-        <pc:sldMkLst>
-          <pc:docMk/>
-          <pc:sldMk cId="609329699" sldId="807"/>
-        </pc:sldMkLst>
-      </pc:sldChg>
-      <pc:sldChg chg="modSp mod">
-        <pc:chgData name="Matthieu De Mari" userId="dfb708c9-d8dc-439f-9a3b-c772bf4a311c" providerId="ADAL" clId="{AC0CA790-EDC2-4116-8838-0C3C4AEF80E1}" dt="2023-07-06T03:42:10.598" v="1326" actId="20577"/>
-        <pc:sldMkLst>
-          <pc:docMk/>
-          <pc:sldMk cId="741808374" sldId="808"/>
-        </pc:sldMkLst>
-      </pc:sldChg>
-      <pc:sldChg chg="modSp mod">
-        <pc:chgData name="Matthieu De Mari" userId="dfb708c9-d8dc-439f-9a3b-c772bf4a311c" providerId="ADAL" clId="{AC0CA790-EDC2-4116-8838-0C3C4AEF80E1}" dt="2023-07-06T03:42:35.589" v="1340" actId="20577"/>
-        <pc:sldMkLst>
-          <pc:docMk/>
-          <pc:sldMk cId="4127253414" sldId="809"/>
-        </pc:sldMkLst>
-      </pc:sldChg>
-      <pc:sldChg chg="modSp mod">
-        <pc:chgData name="Matthieu De Mari" userId="dfb708c9-d8dc-439f-9a3b-c772bf4a311c" providerId="ADAL" clId="{AC0CA790-EDC2-4116-8838-0C3C4AEF80E1}" dt="2023-07-06T03:43:01.506" v="1352" actId="20577"/>
-        <pc:sldMkLst>
-          <pc:docMk/>
-          <pc:sldMk cId="3415879044" sldId="810"/>
-        </pc:sldMkLst>
-      </pc:sldChg>
-      <pc:sldChg chg="modSp mod">
-        <pc:chgData name="Matthieu De Mari" userId="dfb708c9-d8dc-439f-9a3b-c772bf4a311c" providerId="ADAL" clId="{AC0CA790-EDC2-4116-8838-0C3C4AEF80E1}" dt="2023-07-06T03:45:05.478" v="1533" actId="20577"/>
-        <pc:sldMkLst>
-          <pc:docMk/>
-          <pc:sldMk cId="2804082923" sldId="811"/>
-        </pc:sldMkLst>
-      </pc:sldChg>
-      <pc:sldChg chg="modSp mod">
-        <pc:chgData name="Matthieu De Mari" userId="dfb708c9-d8dc-439f-9a3b-c772bf4a311c" providerId="ADAL" clId="{AC0CA790-EDC2-4116-8838-0C3C4AEF80E1}" dt="2023-07-06T03:45:28.808" v="1537"/>
-        <pc:sldMkLst>
-          <pc:docMk/>
-          <pc:sldMk cId="3931571633" sldId="812"/>
-        </pc:sldMkLst>
-      </pc:sldChg>
-      <pc:sldChg chg="modSp mod">
-        <pc:chgData name="Matthieu De Mari" userId="dfb708c9-d8dc-439f-9a3b-c772bf4a311c" providerId="ADAL" clId="{AC0CA790-EDC2-4116-8838-0C3C4AEF80E1}" dt="2023-07-06T03:48:14.983" v="1680" actId="20577"/>
-        <pc:sldMkLst>
-          <pc:docMk/>
-          <pc:sldMk cId="2163984957" sldId="814"/>
-        </pc:sldMkLst>
-      </pc:sldChg>
-      <pc:sldChg chg="modSp mod">
-        <pc:chgData name="Matthieu De Mari" userId="dfb708c9-d8dc-439f-9a3b-c772bf4a311c" providerId="ADAL" clId="{AC0CA790-EDC2-4116-8838-0C3C4AEF80E1}" dt="2023-07-06T03:48:45.953" v="1698" actId="20577"/>
-        <pc:sldMkLst>
-          <pc:docMk/>
-          <pc:sldMk cId="507741553" sldId="815"/>
-        </pc:sldMkLst>
-      </pc:sldChg>
-      <pc:sldChg chg="modSp mod">
-        <pc:chgData name="Matthieu De Mari" userId="dfb708c9-d8dc-439f-9a3b-c772bf4a311c" providerId="ADAL" clId="{AC0CA790-EDC2-4116-8838-0C3C4AEF80E1}" dt="2023-07-06T04:06:40.769" v="2067" actId="20577"/>
-        <pc:sldMkLst>
-          <pc:docMk/>
-          <pc:sldMk cId="1946753280" sldId="816"/>
-        </pc:sldMkLst>
-      </pc:sldChg>
-      <pc:sldChg chg="addSp delSp modSp mod">
-        <pc:chgData name="Matthieu De Mari" userId="dfb708c9-d8dc-439f-9a3b-c772bf4a311c" providerId="ADAL" clId="{AC0CA790-EDC2-4116-8838-0C3C4AEF80E1}" dt="2023-07-06T04:08:39.519" v="2190"/>
-        <pc:sldMkLst>
-          <pc:docMk/>
-          <pc:sldMk cId="4233116706" sldId="817"/>
-        </pc:sldMkLst>
-      </pc:sldChg>
-      <pc:sldChg chg="addSp delSp modSp mod">
-        <pc:chgData name="Matthieu De Mari" userId="dfb708c9-d8dc-439f-9a3b-c772bf4a311c" providerId="ADAL" clId="{AC0CA790-EDC2-4116-8838-0C3C4AEF80E1}" dt="2023-07-06T04:09:59.482" v="2278" actId="20577"/>
-        <pc:sldMkLst>
-          <pc:docMk/>
-          <pc:sldMk cId="182983479" sldId="818"/>
-        </pc:sldMkLst>
-      </pc:sldChg>
-      <pc:sldChg chg="modSp mod">
-        <pc:chgData name="Matthieu De Mari" userId="dfb708c9-d8dc-439f-9a3b-c772bf4a311c" providerId="ADAL" clId="{AC0CA790-EDC2-4116-8838-0C3C4AEF80E1}" dt="2023-07-06T04:11:59.573" v="2357" actId="207"/>
-        <pc:sldMkLst>
-          <pc:docMk/>
-          <pc:sldMk cId="336555302" sldId="819"/>
-        </pc:sldMkLst>
-      </pc:sldChg>
-      <pc:sldChg chg="addSp modSp mod">
-        <pc:chgData name="Matthieu De Mari" userId="dfb708c9-d8dc-439f-9a3b-c772bf4a311c" providerId="ADAL" clId="{AC0CA790-EDC2-4116-8838-0C3C4AEF80E1}" dt="2023-07-06T04:13:36.987" v="2482" actId="1076"/>
-        <pc:sldMkLst>
-          <pc:docMk/>
-          <pc:sldMk cId="4216078664" sldId="822"/>
-        </pc:sldMkLst>
-      </pc:sldChg>
-      <pc:sldChg chg="modSp mod">
-        <pc:chgData name="Matthieu De Mari" userId="dfb708c9-d8dc-439f-9a3b-c772bf4a311c" providerId="ADAL" clId="{AC0CA790-EDC2-4116-8838-0C3C4AEF80E1}" dt="2023-07-06T03:34:40.055" v="890" actId="14100"/>
-        <pc:sldMkLst>
-          <pc:docMk/>
-          <pc:sldMk cId="386474252" sldId="827"/>
-        </pc:sldMkLst>
-      </pc:sldChg>
-      <pc:sldChg chg="modSp">
-        <pc:chgData name="Matthieu De Mari" userId="dfb708c9-d8dc-439f-9a3b-c772bf4a311c" providerId="ADAL" clId="{AC0CA790-EDC2-4116-8838-0C3C4AEF80E1}" dt="2023-07-06T03:47:47.920" v="1674"/>
-        <pc:sldMkLst>
-          <pc:docMk/>
-          <pc:sldMk cId="2986862345" sldId="828"/>
-        </pc:sldMkLst>
-      </pc:sldChg>
-      <pc:sldChg chg="addSp delSp modSp mod">
-        <pc:chgData name="Matthieu De Mari" userId="dfb708c9-d8dc-439f-9a3b-c772bf4a311c" providerId="ADAL" clId="{AC0CA790-EDC2-4116-8838-0C3C4AEF80E1}" dt="2023-07-06T04:06:03.302" v="2047" actId="1076"/>
-        <pc:sldMkLst>
-          <pc:docMk/>
-          <pc:sldMk cId="2441798468" sldId="829"/>
-        </pc:sldMkLst>
-      </pc:sldChg>
-      <pc:sldChg chg="addSp delSp modSp mod">
-        <pc:chgData name="Matthieu De Mari" userId="dfb708c9-d8dc-439f-9a3b-c772bf4a311c" providerId="ADAL" clId="{AC0CA790-EDC2-4116-8838-0C3C4AEF80E1}" dt="2023-07-06T04:10:29.356" v="2299" actId="20577"/>
-        <pc:sldMkLst>
-          <pc:docMk/>
-          <pc:sldMk cId="491711875" sldId="830"/>
-        </pc:sldMkLst>
-      </pc:sldChg>
-    </pc:docChg>
-  </pc:docChgLst>
-  <pc:docChgLst>
-    <pc:chgData name="Matthieu De Mari" userId="dfb708c9-d8dc-439f-9a3b-c772bf4a311c" providerId="ADAL" clId="{12676B47-3953-494C-8D29-E7F530CCAE09}"/>
-    <pc:docChg chg="modSld">
-      <pc:chgData name="Matthieu De Mari" userId="dfb708c9-d8dc-439f-9a3b-c772bf4a311c" providerId="ADAL" clId="{12676B47-3953-494C-8D29-E7F530CCAE09}" dt="2025-02-13T03:31:58.416" v="13"/>
-      <pc:docMkLst>
-        <pc:docMk/>
-      </pc:docMkLst>
-      <pc:sldChg chg="modSp mod">
-        <pc:chgData name="Matthieu De Mari" userId="dfb708c9-d8dc-439f-9a3b-c772bf4a311c" providerId="ADAL" clId="{12676B47-3953-494C-8D29-E7F530CCAE09}" dt="2025-02-13T03:31:58.416" v="13"/>
-        <pc:sldMkLst>
-          <pc:docMk/>
-          <pc:sldMk cId="122423608" sldId="399"/>
-        </pc:sldMkLst>
         <pc:spChg chg="mod">
-          <ac:chgData name="Matthieu De Mari" userId="dfb708c9-d8dc-439f-9a3b-c772bf4a311c" providerId="ADAL" clId="{12676B47-3953-494C-8D29-E7F530CCAE09}" dt="2025-02-13T03:31:58.416" v="13"/>
+          <ac:chgData name="Matthieu De Mari" userId="dfb708c9-d8dc-439f-9a3b-c772bf4a311c" providerId="ADAL" clId="{81E9B007-0C2C-493E-9B93-55A62C9C1F12}" dt="2026-01-12T06:33:40.610" v="0" actId="14100"/>
           <ac:spMkLst>
             <pc:docMk/>
-            <pc:sldMk cId="122423608" sldId="399"/>
-            <ac:spMk id="3" creationId="{F0814AA9-339A-72D8-E8A9-C066A3ED5800}"/>
-          </ac:spMkLst>
-        </pc:spChg>
-      </pc:sldChg>
-      <pc:sldChg chg="modSp mod">
-        <pc:chgData name="Matthieu De Mari" userId="dfb708c9-d8dc-439f-9a3b-c772bf4a311c" providerId="ADAL" clId="{12676B47-3953-494C-8D29-E7F530CCAE09}" dt="2025-02-13T03:28:02.712" v="12" actId="20577"/>
-        <pc:sldMkLst>
-          <pc:docMk/>
-          <pc:sldMk cId="473408429" sldId="789"/>
-        </pc:sldMkLst>
-        <pc:spChg chg="mod">
-          <ac:chgData name="Matthieu De Mari" userId="dfb708c9-d8dc-439f-9a3b-c772bf4a311c" providerId="ADAL" clId="{12676B47-3953-494C-8D29-E7F530CCAE09}" dt="2025-02-13T03:28:02.712" v="12" actId="20577"/>
-          <ac:spMkLst>
-            <pc:docMk/>
-            <pc:sldMk cId="473408429" sldId="789"/>
+            <pc:sldMk cId="2330822039" sldId="792"/>
             <ac:spMk id="3" creationId="{BA2A0416-0B18-CDD3-9A37-B441AE8FAEC0}"/>
           </ac:spMkLst>
         </pc:spChg>
-      </pc:sldChg>
-    </pc:docChg>
-  </pc:docChgLst>
-  <pc:docChgLst>
-    <pc:chgData name="Matthieu De Mari" userId="dfb708c9-d8dc-439f-9a3b-c772bf4a311c" providerId="ADAL" clId="{D2FDBEB2-E663-41FC-8A3C-AC79657DF6AB}"/>
-    <pc:docChg chg="undo custSel addSld delSld modSld sldOrd addSection delSection modSection">
-      <pc:chgData name="Matthieu De Mari" userId="dfb708c9-d8dc-439f-9a3b-c772bf4a311c" providerId="ADAL" clId="{D2FDBEB2-E663-41FC-8A3C-AC79657DF6AB}" dt="2023-02-07T06:56:13.154" v="16712" actId="20577"/>
-      <pc:docMkLst>
-        <pc:docMk/>
-      </pc:docMkLst>
-      <pc:sldChg chg="modSp del mod">
-        <pc:chgData name="Matthieu De Mari" userId="dfb708c9-d8dc-439f-9a3b-c772bf4a311c" providerId="ADAL" clId="{D2FDBEB2-E663-41FC-8A3C-AC79657DF6AB}" dt="2023-02-07T04:59:33.507" v="10526" actId="47"/>
-        <pc:sldMkLst>
-          <pc:docMk/>
-          <pc:sldMk cId="3442501962" sldId="257"/>
-        </pc:sldMkLst>
-      </pc:sldChg>
-      <pc:sldChg chg="del">
-        <pc:chgData name="Matthieu De Mari" userId="dfb708c9-d8dc-439f-9a3b-c772bf4a311c" providerId="ADAL" clId="{D2FDBEB2-E663-41FC-8A3C-AC79657DF6AB}" dt="2023-02-07T06:52:05.212" v="16012" actId="47"/>
-        <pc:sldMkLst>
-          <pc:docMk/>
-          <pc:sldMk cId="1893873068" sldId="266"/>
-        </pc:sldMkLst>
-      </pc:sldChg>
-      <pc:sldChg chg="del">
-        <pc:chgData name="Matthieu De Mari" userId="dfb708c9-d8dc-439f-9a3b-c772bf4a311c" providerId="ADAL" clId="{D2FDBEB2-E663-41FC-8A3C-AC79657DF6AB}" dt="2023-02-07T06:52:05.212" v="16012" actId="47"/>
-        <pc:sldMkLst>
-          <pc:docMk/>
-          <pc:sldMk cId="3880949074" sldId="267"/>
-        </pc:sldMkLst>
-      </pc:sldChg>
-      <pc:sldChg chg="modSp mod">
-        <pc:chgData name="Matthieu De Mari" userId="dfb708c9-d8dc-439f-9a3b-c772bf4a311c" providerId="ADAL" clId="{D2FDBEB2-E663-41FC-8A3C-AC79657DF6AB}" dt="2023-02-07T06:55:26.623" v="16650" actId="20577"/>
-        <pc:sldMkLst>
-          <pc:docMk/>
-          <pc:sldMk cId="1036081419" sldId="346"/>
-        </pc:sldMkLst>
-      </pc:sldChg>
-      <pc:sldChg chg="modSp mod">
-        <pc:chgData name="Matthieu De Mari" userId="dfb708c9-d8dc-439f-9a3b-c772bf4a311c" providerId="ADAL" clId="{D2FDBEB2-E663-41FC-8A3C-AC79657DF6AB}" dt="2023-02-07T01:27:23.451" v="8353" actId="20577"/>
-        <pc:sldMkLst>
-          <pc:docMk/>
-          <pc:sldMk cId="1040156172" sldId="377"/>
-        </pc:sldMkLst>
-      </pc:sldChg>
-      <pc:sldChg chg="addSp delSp modSp new del mod modClrScheme chgLayout">
-        <pc:chgData name="Matthieu De Mari" userId="dfb708c9-d8dc-439f-9a3b-c772bf4a311c" providerId="ADAL" clId="{D2FDBEB2-E663-41FC-8A3C-AC79657DF6AB}" dt="2023-02-07T04:59:34.735" v="10527" actId="47"/>
-        <pc:sldMkLst>
-          <pc:docMk/>
-          <pc:sldMk cId="380766058" sldId="378"/>
-        </pc:sldMkLst>
-      </pc:sldChg>
-      <pc:sldChg chg="addSp delSp modSp new del mod modClrScheme chgLayout">
-        <pc:chgData name="Matthieu De Mari" userId="dfb708c9-d8dc-439f-9a3b-c772bf4a311c" providerId="ADAL" clId="{D2FDBEB2-E663-41FC-8A3C-AC79657DF6AB}" dt="2023-02-07T04:59:37.360" v="10528" actId="47"/>
-        <pc:sldMkLst>
-          <pc:docMk/>
-          <pc:sldMk cId="1970187575" sldId="379"/>
-        </pc:sldMkLst>
-      </pc:sldChg>
-      <pc:sldChg chg="addSp delSp modSp new del mod modClrScheme chgLayout">
-        <pc:chgData name="Matthieu De Mari" userId="dfb708c9-d8dc-439f-9a3b-c772bf4a311c" providerId="ADAL" clId="{D2FDBEB2-E663-41FC-8A3C-AC79657DF6AB}" dt="2023-02-07T04:59:38.213" v="10529" actId="47"/>
-        <pc:sldMkLst>
-          <pc:docMk/>
-          <pc:sldMk cId="2100436947" sldId="380"/>
-        </pc:sldMkLst>
-      </pc:sldChg>
-      <pc:sldChg chg="addSp modSp new del mod modClrScheme chgLayout">
-        <pc:chgData name="Matthieu De Mari" userId="dfb708c9-d8dc-439f-9a3b-c772bf4a311c" providerId="ADAL" clId="{D2FDBEB2-E663-41FC-8A3C-AC79657DF6AB}" dt="2023-02-07T04:59:38.925" v="10530" actId="47"/>
-        <pc:sldMkLst>
-          <pc:docMk/>
-          <pc:sldMk cId="3251402422" sldId="381"/>
-        </pc:sldMkLst>
-      </pc:sldChg>
-      <pc:sldChg chg="addSp delSp modSp new del mod modClrScheme chgLayout">
-        <pc:chgData name="Matthieu De Mari" userId="dfb708c9-d8dc-439f-9a3b-c772bf4a311c" providerId="ADAL" clId="{D2FDBEB2-E663-41FC-8A3C-AC79657DF6AB}" dt="2023-02-07T04:59:39.758" v="10531" actId="47"/>
-        <pc:sldMkLst>
-          <pc:docMk/>
-          <pc:sldMk cId="1017635827" sldId="382"/>
-        </pc:sldMkLst>
-      </pc:sldChg>
-      <pc:sldChg chg="modSp new del mod">
-        <pc:chgData name="Matthieu De Mari" userId="dfb708c9-d8dc-439f-9a3b-c772bf4a311c" providerId="ADAL" clId="{D2FDBEB2-E663-41FC-8A3C-AC79657DF6AB}" dt="2023-02-07T04:59:41.215" v="10533" actId="47"/>
-        <pc:sldMkLst>
-          <pc:docMk/>
-          <pc:sldMk cId="1921397945" sldId="383"/>
-        </pc:sldMkLst>
-      </pc:sldChg>
-      <pc:sldChg chg="addSp delSp modSp new del mod modClrScheme chgLayout">
-        <pc:chgData name="Matthieu De Mari" userId="dfb708c9-d8dc-439f-9a3b-c772bf4a311c" providerId="ADAL" clId="{D2FDBEB2-E663-41FC-8A3C-AC79657DF6AB}" dt="2023-02-07T04:59:41.977" v="10534" actId="47"/>
-        <pc:sldMkLst>
-          <pc:docMk/>
-          <pc:sldMk cId="1420298135" sldId="384"/>
-        </pc:sldMkLst>
-      </pc:sldChg>
-      <pc:sldChg chg="addSp modSp new del mod">
-        <pc:chgData name="Matthieu De Mari" userId="dfb708c9-d8dc-439f-9a3b-c772bf4a311c" providerId="ADAL" clId="{D2FDBEB2-E663-41FC-8A3C-AC79657DF6AB}" dt="2023-02-07T04:59:42.948" v="10535" actId="47"/>
-        <pc:sldMkLst>
-          <pc:docMk/>
-          <pc:sldMk cId="2560511070" sldId="385"/>
-        </pc:sldMkLst>
-      </pc:sldChg>
-      <pc:sldChg chg="addSp delSp modSp new del mod modClrScheme chgLayout">
-        <pc:chgData name="Matthieu De Mari" userId="dfb708c9-d8dc-439f-9a3b-c772bf4a311c" providerId="ADAL" clId="{D2FDBEB2-E663-41FC-8A3C-AC79657DF6AB}" dt="2023-02-07T04:59:44.161" v="10536" actId="47"/>
-        <pc:sldMkLst>
-          <pc:docMk/>
-          <pc:sldMk cId="1116470923" sldId="386"/>
-        </pc:sldMkLst>
-      </pc:sldChg>
-      <pc:sldChg chg="modSp new del mod">
-        <pc:chgData name="Matthieu De Mari" userId="dfb708c9-d8dc-439f-9a3b-c772bf4a311c" providerId="ADAL" clId="{D2FDBEB2-E663-41FC-8A3C-AC79657DF6AB}" dt="2023-02-07T04:59:45.573" v="10537" actId="47"/>
-        <pc:sldMkLst>
-          <pc:docMk/>
-          <pc:sldMk cId="2474697269" sldId="387"/>
-        </pc:sldMkLst>
-      </pc:sldChg>
-      <pc:sldChg chg="modSp new del mod">
-        <pc:chgData name="Matthieu De Mari" userId="dfb708c9-d8dc-439f-9a3b-c772bf4a311c" providerId="ADAL" clId="{D2FDBEB2-E663-41FC-8A3C-AC79657DF6AB}" dt="2023-02-07T04:59:46.969" v="10538" actId="47"/>
-        <pc:sldMkLst>
-          <pc:docMk/>
-          <pc:sldMk cId="4198773114" sldId="388"/>
-        </pc:sldMkLst>
-      </pc:sldChg>
-      <pc:sldChg chg="modSp new del mod">
-        <pc:chgData name="Matthieu De Mari" userId="dfb708c9-d8dc-439f-9a3b-c772bf4a311c" providerId="ADAL" clId="{D2FDBEB2-E663-41FC-8A3C-AC79657DF6AB}" dt="2023-02-07T04:59:48.349" v="10539" actId="47"/>
-        <pc:sldMkLst>
-          <pc:docMk/>
-          <pc:sldMk cId="481628505" sldId="389"/>
-        </pc:sldMkLst>
-      </pc:sldChg>
-      <pc:sldChg chg="addSp delSp modSp new del mod">
-        <pc:chgData name="Matthieu De Mari" userId="dfb708c9-d8dc-439f-9a3b-c772bf4a311c" providerId="ADAL" clId="{D2FDBEB2-E663-41FC-8A3C-AC79657DF6AB}" dt="2023-02-07T04:59:52.952" v="10540" actId="47"/>
-        <pc:sldMkLst>
-          <pc:docMk/>
-          <pc:sldMk cId="2128707751" sldId="390"/>
-        </pc:sldMkLst>
-      </pc:sldChg>
-      <pc:sldChg chg="addSp delSp modSp new del mod modClrScheme chgLayout">
-        <pc:chgData name="Matthieu De Mari" userId="dfb708c9-d8dc-439f-9a3b-c772bf4a311c" providerId="ADAL" clId="{D2FDBEB2-E663-41FC-8A3C-AC79657DF6AB}" dt="2023-02-07T04:59:55.043" v="10541" actId="47"/>
-        <pc:sldMkLst>
-          <pc:docMk/>
-          <pc:sldMk cId="1283478655" sldId="391"/>
-        </pc:sldMkLst>
-      </pc:sldChg>
-      <pc:sldChg chg="addSp delSp new del mod ord">
-        <pc:chgData name="Matthieu De Mari" userId="dfb708c9-d8dc-439f-9a3b-c772bf4a311c" providerId="ADAL" clId="{D2FDBEB2-E663-41FC-8A3C-AC79657DF6AB}" dt="2023-02-07T04:59:58.428" v="10542" actId="47"/>
-        <pc:sldMkLst>
-          <pc:docMk/>
-          <pc:sldMk cId="1341638402" sldId="392"/>
-        </pc:sldMkLst>
-      </pc:sldChg>
-      <pc:sldChg chg="new del">
-        <pc:chgData name="Matthieu De Mari" userId="dfb708c9-d8dc-439f-9a3b-c772bf4a311c" providerId="ADAL" clId="{D2FDBEB2-E663-41FC-8A3C-AC79657DF6AB}" dt="2023-02-03T08:51:09.735" v="7383" actId="47"/>
-        <pc:sldMkLst>
-          <pc:docMk/>
-          <pc:sldMk cId="949620911" sldId="393"/>
-        </pc:sldMkLst>
-      </pc:sldChg>
-      <pc:sldChg chg="addSp delSp modSp new del mod modClrScheme chgLayout">
-        <pc:chgData name="Matthieu De Mari" userId="dfb708c9-d8dc-439f-9a3b-c772bf4a311c" providerId="ADAL" clId="{D2FDBEB2-E663-41FC-8A3C-AC79657DF6AB}" dt="2023-02-07T05:00:00.747" v="10543" actId="47"/>
-        <pc:sldMkLst>
-          <pc:docMk/>
-          <pc:sldMk cId="164097668" sldId="394"/>
-        </pc:sldMkLst>
-      </pc:sldChg>
-      <pc:sldChg chg="addSp delSp modSp new del mod modClrScheme chgLayout">
-        <pc:chgData name="Matthieu De Mari" userId="dfb708c9-d8dc-439f-9a3b-c772bf4a311c" providerId="ADAL" clId="{D2FDBEB2-E663-41FC-8A3C-AC79657DF6AB}" dt="2023-02-07T05:00:12.629" v="10550" actId="47"/>
-        <pc:sldMkLst>
-          <pc:docMk/>
-          <pc:sldMk cId="3048177291" sldId="395"/>
-        </pc:sldMkLst>
-      </pc:sldChg>
-      <pc:sldChg chg="addSp delSp modSp new mod modClrScheme chgLayout">
-        <pc:chgData name="Matthieu De Mari" userId="dfb708c9-d8dc-439f-9a3b-c772bf4a311c" providerId="ADAL" clId="{D2FDBEB2-E663-41FC-8A3C-AC79657DF6AB}" dt="2023-02-07T05:01:25.761" v="10608" actId="113"/>
-        <pc:sldMkLst>
-          <pc:docMk/>
-          <pc:sldMk cId="1458730680" sldId="396"/>
-        </pc:sldMkLst>
-      </pc:sldChg>
-      <pc:sldChg chg="modSp new mod">
-        <pc:chgData name="Matthieu De Mari" userId="dfb708c9-d8dc-439f-9a3b-c772bf4a311c" providerId="ADAL" clId="{D2FDBEB2-E663-41FC-8A3C-AC79657DF6AB}" dt="2023-02-07T01:51:56.913" v="9258" actId="20577"/>
-        <pc:sldMkLst>
-          <pc:docMk/>
-          <pc:sldMk cId="1451434589" sldId="397"/>
-        </pc:sldMkLst>
-      </pc:sldChg>
-      <pc:sldChg chg="addSp delSp modSp new mod modClrScheme chgLayout">
-        <pc:chgData name="Matthieu De Mari" userId="dfb708c9-d8dc-439f-9a3b-c772bf4a311c" providerId="ADAL" clId="{D2FDBEB2-E663-41FC-8A3C-AC79657DF6AB}" dt="2023-02-07T01:54:47.237" v="9359" actId="1076"/>
-        <pc:sldMkLst>
-          <pc:docMk/>
-          <pc:sldMk cId="2867637474" sldId="398"/>
-        </pc:sldMkLst>
-      </pc:sldChg>
-      <pc:sldChg chg="addSp delSp modSp new mod modClrScheme chgLayout">
-        <pc:chgData name="Matthieu De Mari" userId="dfb708c9-d8dc-439f-9a3b-c772bf4a311c" providerId="ADAL" clId="{D2FDBEB2-E663-41FC-8A3C-AC79657DF6AB}" dt="2023-02-07T02:09:25.670" v="10072" actId="1076"/>
-        <pc:sldMkLst>
-          <pc:docMk/>
-          <pc:sldMk cId="122423608" sldId="399"/>
-        </pc:sldMkLst>
-      </pc:sldChg>
-      <pc:sldChg chg="new del">
-        <pc:chgData name="Matthieu De Mari" userId="dfb708c9-d8dc-439f-9a3b-c772bf4a311c" providerId="ADAL" clId="{D2FDBEB2-E663-41FC-8A3C-AC79657DF6AB}" dt="2023-02-07T05:55:34.968" v="12912" actId="47"/>
-        <pc:sldMkLst>
-          <pc:docMk/>
-          <pc:sldMk cId="2642959288" sldId="400"/>
-        </pc:sldMkLst>
-      </pc:sldChg>
-      <pc:sldChg chg="addSp modSp new mod modClrScheme chgLayout">
-        <pc:chgData name="Matthieu De Mari" userId="dfb708c9-d8dc-439f-9a3b-c772bf4a311c" providerId="ADAL" clId="{D2FDBEB2-E663-41FC-8A3C-AC79657DF6AB}" dt="2023-02-07T06:20:43.284" v="14427" actId="27636"/>
-        <pc:sldMkLst>
-          <pc:docMk/>
-          <pc:sldMk cId="4039171501" sldId="401"/>
-        </pc:sldMkLst>
-      </pc:sldChg>
-      <pc:sldChg chg="modSp new mod ord">
-        <pc:chgData name="Matthieu De Mari" userId="dfb708c9-d8dc-439f-9a3b-c772bf4a311c" providerId="ADAL" clId="{D2FDBEB2-E663-41FC-8A3C-AC79657DF6AB}" dt="2023-02-07T05:59:15.562" v="13137" actId="20577"/>
-        <pc:sldMkLst>
-          <pc:docMk/>
-          <pc:sldMk cId="3163596145" sldId="402"/>
-        </pc:sldMkLst>
-      </pc:sldChg>
-      <pc:sldChg chg="modSp new mod">
-        <pc:chgData name="Matthieu De Mari" userId="dfb708c9-d8dc-439f-9a3b-c772bf4a311c" providerId="ADAL" clId="{D2FDBEB2-E663-41FC-8A3C-AC79657DF6AB}" dt="2023-02-07T06:43:50.414" v="15436" actId="27636"/>
-        <pc:sldMkLst>
-          <pc:docMk/>
-          <pc:sldMk cId="101927766" sldId="403"/>
-        </pc:sldMkLst>
-      </pc:sldChg>
-      <pc:sldChg chg="modSp new del mod">
-        <pc:chgData name="Matthieu De Mari" userId="dfb708c9-d8dc-439f-9a3b-c772bf4a311c" providerId="ADAL" clId="{D2FDBEB2-E663-41FC-8A3C-AC79657DF6AB}" dt="2023-02-07T04:59:40.513" v="10532" actId="47"/>
-        <pc:sldMkLst>
-          <pc:docMk/>
-          <pc:sldMk cId="3140288791" sldId="404"/>
-        </pc:sldMkLst>
-      </pc:sldChg>
-      <pc:sldChg chg="add del">
-        <pc:chgData name="Matthieu De Mari" userId="dfb708c9-d8dc-439f-9a3b-c772bf4a311c" providerId="ADAL" clId="{D2FDBEB2-E663-41FC-8A3C-AC79657DF6AB}" dt="2023-02-07T04:59:34.735" v="10527" actId="47"/>
-        <pc:sldMkLst>
-          <pc:docMk/>
-          <pc:sldMk cId="3843402283" sldId="405"/>
-        </pc:sldMkLst>
-      </pc:sldChg>
-      <pc:sldChg chg="addSp delSp modSp add del mod ord modClrScheme chgLayout">
-        <pc:chgData name="Matthieu De Mari" userId="dfb708c9-d8dc-439f-9a3b-c772bf4a311c" providerId="ADAL" clId="{D2FDBEB2-E663-41FC-8A3C-AC79657DF6AB}" dt="2023-02-07T04:59:34.735" v="10527" actId="47"/>
-        <pc:sldMkLst>
-          <pc:docMk/>
-          <pc:sldMk cId="3358927626" sldId="406"/>
-        </pc:sldMkLst>
-      </pc:sldChg>
-      <pc:sldChg chg="addSp delSp modSp new del mod">
-        <pc:chgData name="Matthieu De Mari" userId="dfb708c9-d8dc-439f-9a3b-c772bf4a311c" providerId="ADAL" clId="{D2FDBEB2-E663-41FC-8A3C-AC79657DF6AB}" dt="2023-02-07T04:59:37.360" v="10528" actId="47"/>
-        <pc:sldMkLst>
-          <pc:docMk/>
-          <pc:sldMk cId="1925028509" sldId="407"/>
-        </pc:sldMkLst>
-      </pc:sldChg>
-      <pc:sldChg chg="addSp delSp modSp new del mod">
-        <pc:chgData name="Matthieu De Mari" userId="dfb708c9-d8dc-439f-9a3b-c772bf4a311c" providerId="ADAL" clId="{D2FDBEB2-E663-41FC-8A3C-AC79657DF6AB}" dt="2023-02-07T04:59:37.360" v="10528" actId="47"/>
-        <pc:sldMkLst>
-          <pc:docMk/>
-          <pc:sldMk cId="3458396453" sldId="408"/>
-        </pc:sldMkLst>
-      </pc:sldChg>
-      <pc:sldChg chg="modSp add del mod">
-        <pc:chgData name="Matthieu De Mari" userId="dfb708c9-d8dc-439f-9a3b-c772bf4a311c" providerId="ADAL" clId="{D2FDBEB2-E663-41FC-8A3C-AC79657DF6AB}" dt="2023-02-07T04:59:37.360" v="10528" actId="47"/>
-        <pc:sldMkLst>
-          <pc:docMk/>
-          <pc:sldMk cId="1339110510" sldId="409"/>
-        </pc:sldMkLst>
-      </pc:sldChg>
-      <pc:sldChg chg="addSp delSp modSp add del mod chgLayout">
-        <pc:chgData name="Matthieu De Mari" userId="dfb708c9-d8dc-439f-9a3b-c772bf4a311c" providerId="ADAL" clId="{D2FDBEB2-E663-41FC-8A3C-AC79657DF6AB}" dt="2023-02-07T04:59:37.360" v="10528" actId="47"/>
-        <pc:sldMkLst>
-          <pc:docMk/>
-          <pc:sldMk cId="1178350440" sldId="410"/>
-        </pc:sldMkLst>
-      </pc:sldChg>
-      <pc:sldChg chg="addSp delSp modSp add del mod">
-        <pc:chgData name="Matthieu De Mari" userId="dfb708c9-d8dc-439f-9a3b-c772bf4a311c" providerId="ADAL" clId="{D2FDBEB2-E663-41FC-8A3C-AC79657DF6AB}" dt="2023-02-07T04:59:37.360" v="10528" actId="47"/>
-        <pc:sldMkLst>
-          <pc:docMk/>
-          <pc:sldMk cId="2149409242" sldId="411"/>
-        </pc:sldMkLst>
-      </pc:sldChg>
-      <pc:sldChg chg="addSp delSp modSp new del mod modClrScheme chgLayout">
-        <pc:chgData name="Matthieu De Mari" userId="dfb708c9-d8dc-439f-9a3b-c772bf4a311c" providerId="ADAL" clId="{D2FDBEB2-E663-41FC-8A3C-AC79657DF6AB}" dt="2023-02-07T04:59:37.360" v="10528" actId="47"/>
-        <pc:sldMkLst>
-          <pc:docMk/>
-          <pc:sldMk cId="1857929555" sldId="412"/>
-        </pc:sldMkLst>
-      </pc:sldChg>
-      <pc:sldChg chg="delSp modSp add del mod">
-        <pc:chgData name="Matthieu De Mari" userId="dfb708c9-d8dc-439f-9a3b-c772bf4a311c" providerId="ADAL" clId="{D2FDBEB2-E663-41FC-8A3C-AC79657DF6AB}" dt="2023-02-07T04:59:37.360" v="10528" actId="47"/>
-        <pc:sldMkLst>
-          <pc:docMk/>
-          <pc:sldMk cId="3179138343" sldId="413"/>
-        </pc:sldMkLst>
-      </pc:sldChg>
-      <pc:sldChg chg="addSp delSp modSp new del mod ord modClrScheme chgLayout">
-        <pc:chgData name="Matthieu De Mari" userId="dfb708c9-d8dc-439f-9a3b-c772bf4a311c" providerId="ADAL" clId="{D2FDBEB2-E663-41FC-8A3C-AC79657DF6AB}" dt="2023-02-07T04:59:38.213" v="10529" actId="47"/>
-        <pc:sldMkLst>
-          <pc:docMk/>
-          <pc:sldMk cId="1324969895" sldId="414"/>
-        </pc:sldMkLst>
-      </pc:sldChg>
-      <pc:sldChg chg="addSp delSp modSp add del mod">
-        <pc:chgData name="Matthieu De Mari" userId="dfb708c9-d8dc-439f-9a3b-c772bf4a311c" providerId="ADAL" clId="{D2FDBEB2-E663-41FC-8A3C-AC79657DF6AB}" dt="2023-02-07T04:59:38.213" v="10529" actId="47"/>
-        <pc:sldMkLst>
-          <pc:docMk/>
-          <pc:sldMk cId="481166971" sldId="415"/>
-        </pc:sldMkLst>
-      </pc:sldChg>
-      <pc:sldChg chg="addSp delSp modSp add del mod">
-        <pc:chgData name="Matthieu De Mari" userId="dfb708c9-d8dc-439f-9a3b-c772bf4a311c" providerId="ADAL" clId="{D2FDBEB2-E663-41FC-8A3C-AC79657DF6AB}" dt="2023-02-07T04:59:38.213" v="10529" actId="47"/>
-        <pc:sldMkLst>
-          <pc:docMk/>
-          <pc:sldMk cId="4050702309" sldId="416"/>
-        </pc:sldMkLst>
-      </pc:sldChg>
-      <pc:sldChg chg="addSp delSp modSp add del mod">
-        <pc:chgData name="Matthieu De Mari" userId="dfb708c9-d8dc-439f-9a3b-c772bf4a311c" providerId="ADAL" clId="{D2FDBEB2-E663-41FC-8A3C-AC79657DF6AB}" dt="2023-02-07T04:59:38.213" v="10529" actId="47"/>
-        <pc:sldMkLst>
-          <pc:docMk/>
-          <pc:sldMk cId="4249457938" sldId="417"/>
-        </pc:sldMkLst>
-      </pc:sldChg>
-      <pc:sldChg chg="addSp delSp modSp add del mod">
-        <pc:chgData name="Matthieu De Mari" userId="dfb708c9-d8dc-439f-9a3b-c772bf4a311c" providerId="ADAL" clId="{D2FDBEB2-E663-41FC-8A3C-AC79657DF6AB}" dt="2023-02-07T04:59:38.213" v="10529" actId="47"/>
-        <pc:sldMkLst>
-          <pc:docMk/>
-          <pc:sldMk cId="3310153579" sldId="418"/>
-        </pc:sldMkLst>
-      </pc:sldChg>
-      <pc:sldChg chg="addSp delSp modSp add del mod">
-        <pc:chgData name="Matthieu De Mari" userId="dfb708c9-d8dc-439f-9a3b-c772bf4a311c" providerId="ADAL" clId="{D2FDBEB2-E663-41FC-8A3C-AC79657DF6AB}" dt="2023-02-07T04:59:38.213" v="10529" actId="47"/>
-        <pc:sldMkLst>
-          <pc:docMk/>
-          <pc:sldMk cId="1163891923" sldId="419"/>
-        </pc:sldMkLst>
-      </pc:sldChg>
-      <pc:sldChg chg="addSp delSp modSp add del mod">
-        <pc:chgData name="Matthieu De Mari" userId="dfb708c9-d8dc-439f-9a3b-c772bf4a311c" providerId="ADAL" clId="{D2FDBEB2-E663-41FC-8A3C-AC79657DF6AB}" dt="2023-02-07T04:59:38.213" v="10529" actId="47"/>
-        <pc:sldMkLst>
-          <pc:docMk/>
-          <pc:sldMk cId="1773283043" sldId="420"/>
-        </pc:sldMkLst>
-      </pc:sldChg>
-      <pc:sldChg chg="addSp delSp modSp add del mod">
-        <pc:chgData name="Matthieu De Mari" userId="dfb708c9-d8dc-439f-9a3b-c772bf4a311c" providerId="ADAL" clId="{D2FDBEB2-E663-41FC-8A3C-AC79657DF6AB}" dt="2023-02-07T04:59:38.925" v="10530" actId="47"/>
-        <pc:sldMkLst>
-          <pc:docMk/>
-          <pc:sldMk cId="346749718" sldId="421"/>
-        </pc:sldMkLst>
-      </pc:sldChg>
-      <pc:sldChg chg="addSp delSp modSp add del mod">
-        <pc:chgData name="Matthieu De Mari" userId="dfb708c9-d8dc-439f-9a3b-c772bf4a311c" providerId="ADAL" clId="{D2FDBEB2-E663-41FC-8A3C-AC79657DF6AB}" dt="2023-02-07T04:59:38.925" v="10530" actId="47"/>
-        <pc:sldMkLst>
-          <pc:docMk/>
-          <pc:sldMk cId="2747530419" sldId="422"/>
-        </pc:sldMkLst>
-      </pc:sldChg>
-      <pc:sldChg chg="addSp delSp modSp add del mod chgLayout">
-        <pc:chgData name="Matthieu De Mari" userId="dfb708c9-d8dc-439f-9a3b-c772bf4a311c" providerId="ADAL" clId="{D2FDBEB2-E663-41FC-8A3C-AC79657DF6AB}" dt="2023-02-07T04:59:39.758" v="10531" actId="47"/>
-        <pc:sldMkLst>
-          <pc:docMk/>
-          <pc:sldMk cId="4145254973" sldId="423"/>
-        </pc:sldMkLst>
-      </pc:sldChg>
-      <pc:sldChg chg="addSp delSp modSp add del mod">
-        <pc:chgData name="Matthieu De Mari" userId="dfb708c9-d8dc-439f-9a3b-c772bf4a311c" providerId="ADAL" clId="{D2FDBEB2-E663-41FC-8A3C-AC79657DF6AB}" dt="2023-02-07T04:59:39.758" v="10531" actId="47"/>
-        <pc:sldMkLst>
-          <pc:docMk/>
-          <pc:sldMk cId="1513778887" sldId="424"/>
-        </pc:sldMkLst>
-      </pc:sldChg>
-      <pc:sldChg chg="addSp delSp modSp add del mod">
-        <pc:chgData name="Matthieu De Mari" userId="dfb708c9-d8dc-439f-9a3b-c772bf4a311c" providerId="ADAL" clId="{D2FDBEB2-E663-41FC-8A3C-AC79657DF6AB}" dt="2023-02-07T04:59:39.758" v="10531" actId="47"/>
-        <pc:sldMkLst>
-          <pc:docMk/>
-          <pc:sldMk cId="548772636" sldId="425"/>
-        </pc:sldMkLst>
-      </pc:sldChg>
-      <pc:sldChg chg="addSp delSp modSp add del mod modClrScheme chgLayout">
-        <pc:chgData name="Matthieu De Mari" userId="dfb708c9-d8dc-439f-9a3b-c772bf4a311c" providerId="ADAL" clId="{D2FDBEB2-E663-41FC-8A3C-AC79657DF6AB}" dt="2023-02-07T04:59:39.758" v="10531" actId="47"/>
-        <pc:sldMkLst>
-          <pc:docMk/>
-          <pc:sldMk cId="995336806" sldId="426"/>
-        </pc:sldMkLst>
-      </pc:sldChg>
-      <pc:sldChg chg="add del">
-        <pc:chgData name="Matthieu De Mari" userId="dfb708c9-d8dc-439f-9a3b-c772bf4a311c" providerId="ADAL" clId="{D2FDBEB2-E663-41FC-8A3C-AC79657DF6AB}" dt="2023-02-07T04:59:33.507" v="10526" actId="47"/>
-        <pc:sldMkLst>
-          <pc:docMk/>
-          <pc:sldMk cId="1567954153" sldId="608"/>
-        </pc:sldMkLst>
-      </pc:sldChg>
-      <pc:sldChg chg="modSp add del mod">
-        <pc:chgData name="Matthieu De Mari" userId="dfb708c9-d8dc-439f-9a3b-c772bf4a311c" providerId="ADAL" clId="{D2FDBEB2-E663-41FC-8A3C-AC79657DF6AB}" dt="2023-02-07T04:59:41.215" v="10533" actId="47"/>
-        <pc:sldMkLst>
-          <pc:docMk/>
-          <pc:sldMk cId="1098360026" sldId="646"/>
-        </pc:sldMkLst>
-      </pc:sldChg>
-      <pc:sldChg chg="modSp new del mod">
-        <pc:chgData name="Matthieu De Mari" userId="dfb708c9-d8dc-439f-9a3b-c772bf4a311c" providerId="ADAL" clId="{D2FDBEB2-E663-41FC-8A3C-AC79657DF6AB}" dt="2023-02-07T04:59:41.215" v="10533" actId="47"/>
-        <pc:sldMkLst>
-          <pc:docMk/>
-          <pc:sldMk cId="3471904534" sldId="647"/>
-        </pc:sldMkLst>
-      </pc:sldChg>
-      <pc:sldChg chg="addSp delSp modSp add del mod">
-        <pc:chgData name="Matthieu De Mari" userId="dfb708c9-d8dc-439f-9a3b-c772bf4a311c" providerId="ADAL" clId="{D2FDBEB2-E663-41FC-8A3C-AC79657DF6AB}" dt="2023-02-07T04:59:41.215" v="10533" actId="47"/>
-        <pc:sldMkLst>
-          <pc:docMk/>
-          <pc:sldMk cId="1172112343" sldId="648"/>
-        </pc:sldMkLst>
-      </pc:sldChg>
-      <pc:sldChg chg="addSp delSp modSp add del mod ord">
-        <pc:chgData name="Matthieu De Mari" userId="dfb708c9-d8dc-439f-9a3b-c772bf4a311c" providerId="ADAL" clId="{D2FDBEB2-E663-41FC-8A3C-AC79657DF6AB}" dt="2023-02-07T04:59:41.215" v="10533" actId="47"/>
-        <pc:sldMkLst>
-          <pc:docMk/>
-          <pc:sldMk cId="1146881653" sldId="649"/>
-        </pc:sldMkLst>
-      </pc:sldChg>
-      <pc:sldChg chg="addSp delSp modSp add del mod">
-        <pc:chgData name="Matthieu De Mari" userId="dfb708c9-d8dc-439f-9a3b-c772bf4a311c" providerId="ADAL" clId="{D2FDBEB2-E663-41FC-8A3C-AC79657DF6AB}" dt="2023-02-07T04:59:42.948" v="10535" actId="47"/>
-        <pc:sldMkLst>
-          <pc:docMk/>
-          <pc:sldMk cId="2437975891" sldId="650"/>
-        </pc:sldMkLst>
-      </pc:sldChg>
-      <pc:sldChg chg="addSp delSp modSp add del mod chgLayout">
-        <pc:chgData name="Matthieu De Mari" userId="dfb708c9-d8dc-439f-9a3b-c772bf4a311c" providerId="ADAL" clId="{D2FDBEB2-E663-41FC-8A3C-AC79657DF6AB}" dt="2023-02-07T04:59:42.948" v="10535" actId="47"/>
-        <pc:sldMkLst>
-          <pc:docMk/>
-          <pc:sldMk cId="2710721176" sldId="651"/>
-        </pc:sldMkLst>
-      </pc:sldChg>
-      <pc:sldChg chg="addSp delSp modSp add del mod">
-        <pc:chgData name="Matthieu De Mari" userId="dfb708c9-d8dc-439f-9a3b-c772bf4a311c" providerId="ADAL" clId="{D2FDBEB2-E663-41FC-8A3C-AC79657DF6AB}" dt="2023-02-07T04:59:44.161" v="10536" actId="47"/>
-        <pc:sldMkLst>
-          <pc:docMk/>
-          <pc:sldMk cId="2596538432" sldId="652"/>
-        </pc:sldMkLst>
-      </pc:sldChg>
-      <pc:sldChg chg="add del">
-        <pc:chgData name="Matthieu De Mari" userId="dfb708c9-d8dc-439f-9a3b-c772bf4a311c" providerId="ADAL" clId="{D2FDBEB2-E663-41FC-8A3C-AC79657DF6AB}" dt="2023-02-03T07:20:41.487" v="3632" actId="47"/>
-        <pc:sldMkLst>
-          <pc:docMk/>
-          <pc:sldMk cId="4100639751" sldId="652"/>
-        </pc:sldMkLst>
-      </pc:sldChg>
-      <pc:sldChg chg="add del">
-        <pc:chgData name="Matthieu De Mari" userId="dfb708c9-d8dc-439f-9a3b-c772bf4a311c" providerId="ADAL" clId="{D2FDBEB2-E663-41FC-8A3C-AC79657DF6AB}" dt="2023-02-07T04:59:33.507" v="10526" actId="47"/>
-        <pc:sldMkLst>
-          <pc:docMk/>
-          <pc:sldMk cId="2525469962" sldId="757"/>
-        </pc:sldMkLst>
-      </pc:sldChg>
-      <pc:sldChg chg="add del">
-        <pc:chgData name="Matthieu De Mari" userId="dfb708c9-d8dc-439f-9a3b-c772bf4a311c" providerId="ADAL" clId="{D2FDBEB2-E663-41FC-8A3C-AC79657DF6AB}" dt="2023-02-07T04:59:33.507" v="10526" actId="47"/>
-        <pc:sldMkLst>
-          <pc:docMk/>
-          <pc:sldMk cId="571242276" sldId="758"/>
-        </pc:sldMkLst>
-      </pc:sldChg>
-      <pc:sldChg chg="add del">
-        <pc:chgData name="Matthieu De Mari" userId="dfb708c9-d8dc-439f-9a3b-c772bf4a311c" providerId="ADAL" clId="{D2FDBEB2-E663-41FC-8A3C-AC79657DF6AB}" dt="2023-02-07T04:59:33.507" v="10526" actId="47"/>
-        <pc:sldMkLst>
-          <pc:docMk/>
-          <pc:sldMk cId="1598131875" sldId="759"/>
-        </pc:sldMkLst>
-      </pc:sldChg>
-      <pc:sldChg chg="new del">
-        <pc:chgData name="Matthieu De Mari" userId="dfb708c9-d8dc-439f-9a3b-c772bf4a311c" providerId="ADAL" clId="{D2FDBEB2-E663-41FC-8A3C-AC79657DF6AB}" dt="2023-02-07T01:27:15.744" v="8351" actId="47"/>
-        <pc:sldMkLst>
-          <pc:docMk/>
-          <pc:sldMk cId="2917324732" sldId="760"/>
-        </pc:sldMkLst>
-      </pc:sldChg>
-      <pc:sldChg chg="addSp delSp modSp add del mod modClrScheme chgLayout">
-        <pc:chgData name="Matthieu De Mari" userId="dfb708c9-d8dc-439f-9a3b-c772bf4a311c" providerId="ADAL" clId="{D2FDBEB2-E663-41FC-8A3C-AC79657DF6AB}" dt="2023-02-07T04:59:45.573" v="10537" actId="47"/>
-        <pc:sldMkLst>
-          <pc:docMk/>
-          <pc:sldMk cId="3339699406" sldId="761"/>
-        </pc:sldMkLst>
-      </pc:sldChg>
-      <pc:sldChg chg="addSp delSp modSp add del mod">
-        <pc:chgData name="Matthieu De Mari" userId="dfb708c9-d8dc-439f-9a3b-c772bf4a311c" providerId="ADAL" clId="{D2FDBEB2-E663-41FC-8A3C-AC79657DF6AB}" dt="2023-02-07T04:59:45.573" v="10537" actId="47"/>
-        <pc:sldMkLst>
-          <pc:docMk/>
-          <pc:sldMk cId="1546007078" sldId="762"/>
-        </pc:sldMkLst>
-      </pc:sldChg>
-      <pc:sldChg chg="addSp delSp modSp new del mod modClrScheme chgLayout">
-        <pc:chgData name="Matthieu De Mari" userId="dfb708c9-d8dc-439f-9a3b-c772bf4a311c" providerId="ADAL" clId="{D2FDBEB2-E663-41FC-8A3C-AC79657DF6AB}" dt="2023-02-07T04:59:45.573" v="10537" actId="47"/>
-        <pc:sldMkLst>
-          <pc:docMk/>
-          <pc:sldMk cId="2580175991" sldId="763"/>
-        </pc:sldMkLst>
-      </pc:sldChg>
-      <pc:sldChg chg="addSp modSp add del mod">
-        <pc:chgData name="Matthieu De Mari" userId="dfb708c9-d8dc-439f-9a3b-c772bf4a311c" providerId="ADAL" clId="{D2FDBEB2-E663-41FC-8A3C-AC79657DF6AB}" dt="2023-02-07T04:59:45.573" v="10537" actId="47"/>
-        <pc:sldMkLst>
-          <pc:docMk/>
-          <pc:sldMk cId="1879463264" sldId="764"/>
-        </pc:sldMkLst>
-      </pc:sldChg>
-      <pc:sldChg chg="addSp delSp modSp add del mod modClrScheme chgLayout">
-        <pc:chgData name="Matthieu De Mari" userId="dfb708c9-d8dc-439f-9a3b-c772bf4a311c" providerId="ADAL" clId="{D2FDBEB2-E663-41FC-8A3C-AC79657DF6AB}" dt="2023-02-07T04:59:46.969" v="10538" actId="47"/>
-        <pc:sldMkLst>
-          <pc:docMk/>
-          <pc:sldMk cId="1996337912" sldId="765"/>
-        </pc:sldMkLst>
-      </pc:sldChg>
-      <pc:sldChg chg="addSp delSp modSp add del mod modClrScheme chgLayout">
-        <pc:chgData name="Matthieu De Mari" userId="dfb708c9-d8dc-439f-9a3b-c772bf4a311c" providerId="ADAL" clId="{D2FDBEB2-E663-41FC-8A3C-AC79657DF6AB}" dt="2023-02-07T04:59:48.349" v="10539" actId="47"/>
-        <pc:sldMkLst>
-          <pc:docMk/>
-          <pc:sldMk cId="1554669076" sldId="766"/>
-        </pc:sldMkLst>
-      </pc:sldChg>
-      <pc:sldChg chg="modSp add del mod">
-        <pc:chgData name="Matthieu De Mari" userId="dfb708c9-d8dc-439f-9a3b-c772bf4a311c" providerId="ADAL" clId="{D2FDBEB2-E663-41FC-8A3C-AC79657DF6AB}" dt="2023-02-07T04:59:48.349" v="10539" actId="47"/>
-        <pc:sldMkLst>
-          <pc:docMk/>
-          <pc:sldMk cId="887698529" sldId="767"/>
-        </pc:sldMkLst>
-      </pc:sldChg>
-      <pc:sldChg chg="modSp add del mod">
-        <pc:chgData name="Matthieu De Mari" userId="dfb708c9-d8dc-439f-9a3b-c772bf4a311c" providerId="ADAL" clId="{D2FDBEB2-E663-41FC-8A3C-AC79657DF6AB}" dt="2023-02-07T04:59:48.349" v="10539" actId="47"/>
-        <pc:sldMkLst>
-          <pc:docMk/>
-          <pc:sldMk cId="3101493777" sldId="768"/>
-        </pc:sldMkLst>
-      </pc:sldChg>
-      <pc:sldChg chg="modSp new del mod">
-        <pc:chgData name="Matthieu De Mari" userId="dfb708c9-d8dc-439f-9a3b-c772bf4a311c" providerId="ADAL" clId="{D2FDBEB2-E663-41FC-8A3C-AC79657DF6AB}" dt="2023-02-07T04:59:52.952" v="10540" actId="47"/>
-        <pc:sldMkLst>
-          <pc:docMk/>
-          <pc:sldMk cId="2909899754" sldId="769"/>
-        </pc:sldMkLst>
-      </pc:sldChg>
-      <pc:sldChg chg="add del">
-        <pc:chgData name="Matthieu De Mari" userId="dfb708c9-d8dc-439f-9a3b-c772bf4a311c" providerId="ADAL" clId="{D2FDBEB2-E663-41FC-8A3C-AC79657DF6AB}" dt="2023-02-03T08:14:32.531" v="5657" actId="47"/>
-        <pc:sldMkLst>
-          <pc:docMk/>
-          <pc:sldMk cId="2993869992" sldId="769"/>
-        </pc:sldMkLst>
-      </pc:sldChg>
-      <pc:sldChg chg="addSp delSp modSp add del mod">
-        <pc:chgData name="Matthieu De Mari" userId="dfb708c9-d8dc-439f-9a3b-c772bf4a311c" providerId="ADAL" clId="{D2FDBEB2-E663-41FC-8A3C-AC79657DF6AB}" dt="2023-02-07T04:59:52.952" v="10540" actId="47"/>
-        <pc:sldMkLst>
-          <pc:docMk/>
-          <pc:sldMk cId="581091786" sldId="770"/>
-        </pc:sldMkLst>
-      </pc:sldChg>
-      <pc:sldChg chg="addSp delSp modSp add del mod">
-        <pc:chgData name="Matthieu De Mari" userId="dfb708c9-d8dc-439f-9a3b-c772bf4a311c" providerId="ADAL" clId="{D2FDBEB2-E663-41FC-8A3C-AC79657DF6AB}" dt="2023-02-07T04:59:52.952" v="10540" actId="47"/>
-        <pc:sldMkLst>
-          <pc:docMk/>
-          <pc:sldMk cId="2768410648" sldId="771"/>
-        </pc:sldMkLst>
-      </pc:sldChg>
-      <pc:sldChg chg="addSp delSp modSp add del mod">
-        <pc:chgData name="Matthieu De Mari" userId="dfb708c9-d8dc-439f-9a3b-c772bf4a311c" providerId="ADAL" clId="{D2FDBEB2-E663-41FC-8A3C-AC79657DF6AB}" dt="2023-02-07T04:59:52.952" v="10540" actId="47"/>
-        <pc:sldMkLst>
-          <pc:docMk/>
-          <pc:sldMk cId="2791462929" sldId="772"/>
-        </pc:sldMkLst>
-      </pc:sldChg>
-      <pc:sldChg chg="addSp delSp modSp add del mod">
-        <pc:chgData name="Matthieu De Mari" userId="dfb708c9-d8dc-439f-9a3b-c772bf4a311c" providerId="ADAL" clId="{D2FDBEB2-E663-41FC-8A3C-AC79657DF6AB}" dt="2023-02-07T04:59:52.952" v="10540" actId="47"/>
-        <pc:sldMkLst>
-          <pc:docMk/>
-          <pc:sldMk cId="3544439591" sldId="773"/>
-        </pc:sldMkLst>
-      </pc:sldChg>
-      <pc:sldChg chg="addSp delSp modSp add del mod">
-        <pc:chgData name="Matthieu De Mari" userId="dfb708c9-d8dc-439f-9a3b-c772bf4a311c" providerId="ADAL" clId="{D2FDBEB2-E663-41FC-8A3C-AC79657DF6AB}" dt="2023-02-07T04:59:52.952" v="10540" actId="47"/>
-        <pc:sldMkLst>
-          <pc:docMk/>
-          <pc:sldMk cId="2831341972" sldId="774"/>
-        </pc:sldMkLst>
-      </pc:sldChg>
-      <pc:sldChg chg="addSp delSp modSp add del mod">
-        <pc:chgData name="Matthieu De Mari" userId="dfb708c9-d8dc-439f-9a3b-c772bf4a311c" providerId="ADAL" clId="{D2FDBEB2-E663-41FC-8A3C-AC79657DF6AB}" dt="2023-02-07T04:59:55.043" v="10541" actId="47"/>
-        <pc:sldMkLst>
-          <pc:docMk/>
-          <pc:sldMk cId="743119883" sldId="775"/>
-        </pc:sldMkLst>
-      </pc:sldChg>
-      <pc:sldChg chg="addSp delSp modSp add del mod modClrScheme chgLayout">
-        <pc:chgData name="Matthieu De Mari" userId="dfb708c9-d8dc-439f-9a3b-c772bf4a311c" providerId="ADAL" clId="{D2FDBEB2-E663-41FC-8A3C-AC79657DF6AB}" dt="2023-02-07T04:59:55.043" v="10541" actId="47"/>
-        <pc:sldMkLst>
-          <pc:docMk/>
-          <pc:sldMk cId="1966383991" sldId="776"/>
-        </pc:sldMkLst>
-      </pc:sldChg>
-      <pc:sldChg chg="modSp add del mod">
-        <pc:chgData name="Matthieu De Mari" userId="dfb708c9-d8dc-439f-9a3b-c772bf4a311c" providerId="ADAL" clId="{D2FDBEB2-E663-41FC-8A3C-AC79657DF6AB}" dt="2023-02-07T04:59:55.043" v="10541" actId="47"/>
-        <pc:sldMkLst>
-          <pc:docMk/>
-          <pc:sldMk cId="3349972987" sldId="777"/>
-        </pc:sldMkLst>
-      </pc:sldChg>
-      <pc:sldChg chg="modSp new del mod ord">
-        <pc:chgData name="Matthieu De Mari" userId="dfb708c9-d8dc-439f-9a3b-c772bf4a311c" providerId="ADAL" clId="{D2FDBEB2-E663-41FC-8A3C-AC79657DF6AB}" dt="2023-02-07T04:59:58.428" v="10542" actId="47"/>
-        <pc:sldMkLst>
-          <pc:docMk/>
-          <pc:sldMk cId="4008937125" sldId="778"/>
-        </pc:sldMkLst>
-      </pc:sldChg>
-      <pc:sldChg chg="addSp delSp modSp add del mod ord modClrScheme chgLayout">
-        <pc:chgData name="Matthieu De Mari" userId="dfb708c9-d8dc-439f-9a3b-c772bf4a311c" providerId="ADAL" clId="{D2FDBEB2-E663-41FC-8A3C-AC79657DF6AB}" dt="2023-02-07T04:59:58.428" v="10542" actId="47"/>
-        <pc:sldMkLst>
-          <pc:docMk/>
-          <pc:sldMk cId="1689794110" sldId="779"/>
-        </pc:sldMkLst>
-      </pc:sldChg>
-      <pc:sldChg chg="addSp delSp modSp add del mod">
-        <pc:chgData name="Matthieu De Mari" userId="dfb708c9-d8dc-439f-9a3b-c772bf4a311c" providerId="ADAL" clId="{D2FDBEB2-E663-41FC-8A3C-AC79657DF6AB}" dt="2023-02-07T05:00:00.747" v="10543" actId="47"/>
-        <pc:sldMkLst>
-          <pc:docMk/>
-          <pc:sldMk cId="2678238830" sldId="780"/>
-        </pc:sldMkLst>
-      </pc:sldChg>
-      <pc:sldChg chg="addSp delSp new mod ord">
-        <pc:chgData name="Matthieu De Mari" userId="dfb708c9-d8dc-439f-9a3b-c772bf4a311c" providerId="ADAL" clId="{D2FDBEB2-E663-41FC-8A3C-AC79657DF6AB}" dt="2023-02-07T05:00:11.539" v="10549"/>
-        <pc:sldMkLst>
-          <pc:docMk/>
-          <pc:sldMk cId="3029045816" sldId="781"/>
-        </pc:sldMkLst>
-      </pc:sldChg>
-      <pc:sldChg chg="addSp delSp modSp new mod ord modClrScheme chgLayout">
-        <pc:chgData name="Matthieu De Mari" userId="dfb708c9-d8dc-439f-9a3b-c772bf4a311c" providerId="ADAL" clId="{D2FDBEB2-E663-41FC-8A3C-AC79657DF6AB}" dt="2023-02-07T05:00:19.295" v="10572" actId="20577"/>
-        <pc:sldMkLst>
-          <pc:docMk/>
-          <pc:sldMk cId="278531271" sldId="782"/>
-        </pc:sldMkLst>
-      </pc:sldChg>
-      <pc:sldChg chg="add">
-        <pc:chgData name="Matthieu De Mari" userId="dfb708c9-d8dc-439f-9a3b-c772bf4a311c" providerId="ADAL" clId="{D2FDBEB2-E663-41FC-8A3C-AC79657DF6AB}" dt="2023-02-07T01:27:14.215" v="8350"/>
-        <pc:sldMkLst>
-          <pc:docMk/>
-          <pc:sldMk cId="1783907351" sldId="783"/>
-        </pc:sldMkLst>
-      </pc:sldChg>
-      <pc:sldChg chg="add">
-        <pc:chgData name="Matthieu De Mari" userId="dfb708c9-d8dc-439f-9a3b-c772bf4a311c" providerId="ADAL" clId="{D2FDBEB2-E663-41FC-8A3C-AC79657DF6AB}" dt="2023-02-07T01:27:14.215" v="8350"/>
-        <pc:sldMkLst>
-          <pc:docMk/>
-          <pc:sldMk cId="2670805330" sldId="784"/>
-        </pc:sldMkLst>
-      </pc:sldChg>
-      <pc:sldChg chg="add">
-        <pc:chgData name="Matthieu De Mari" userId="dfb708c9-d8dc-439f-9a3b-c772bf4a311c" providerId="ADAL" clId="{D2FDBEB2-E663-41FC-8A3C-AC79657DF6AB}" dt="2023-02-07T01:27:14.215" v="8350"/>
-        <pc:sldMkLst>
-          <pc:docMk/>
-          <pc:sldMk cId="636279122" sldId="785"/>
-        </pc:sldMkLst>
-      </pc:sldChg>
-      <pc:sldChg chg="addSp delSp modSp new mod modClrScheme chgLayout">
-        <pc:chgData name="Matthieu De Mari" userId="dfb708c9-d8dc-439f-9a3b-c772bf4a311c" providerId="ADAL" clId="{D2FDBEB2-E663-41FC-8A3C-AC79657DF6AB}" dt="2023-02-07T05:01:36.515" v="10614" actId="20577"/>
-        <pc:sldMkLst>
-          <pc:docMk/>
-          <pc:sldMk cId="2278534749" sldId="786"/>
-        </pc:sldMkLst>
-      </pc:sldChg>
-      <pc:sldChg chg="new del">
-        <pc:chgData name="Matthieu De Mari" userId="dfb708c9-d8dc-439f-9a3b-c772bf4a311c" providerId="ADAL" clId="{D2FDBEB2-E663-41FC-8A3C-AC79657DF6AB}" dt="2023-02-07T01:35:22.692" v="8485" actId="47"/>
-        <pc:sldMkLst>
-          <pc:docMk/>
-          <pc:sldMk cId="1824397358" sldId="787"/>
-        </pc:sldMkLst>
-      </pc:sldChg>
-      <pc:sldChg chg="addSp delSp modSp add mod">
-        <pc:chgData name="Matthieu De Mari" userId="dfb708c9-d8dc-439f-9a3b-c772bf4a311c" providerId="ADAL" clId="{D2FDBEB2-E663-41FC-8A3C-AC79657DF6AB}" dt="2023-02-07T01:36:14.320" v="8489" actId="1076"/>
-        <pc:sldMkLst>
-          <pc:docMk/>
-          <pc:sldMk cId="3381120192" sldId="788"/>
-        </pc:sldMkLst>
-      </pc:sldChg>
-      <pc:sldChg chg="modSp add mod">
-        <pc:chgData name="Matthieu De Mari" userId="dfb708c9-d8dc-439f-9a3b-c772bf4a311c" providerId="ADAL" clId="{D2FDBEB2-E663-41FC-8A3C-AC79657DF6AB}" dt="2023-02-07T01:52:07.397" v="9260"/>
-        <pc:sldMkLst>
-          <pc:docMk/>
-          <pc:sldMk cId="473408429" sldId="789"/>
-        </pc:sldMkLst>
-      </pc:sldChg>
-      <pc:sldChg chg="addSp delSp modSp new mod">
-        <pc:chgData name="Matthieu De Mari" userId="dfb708c9-d8dc-439f-9a3b-c772bf4a311c" providerId="ADAL" clId="{D2FDBEB2-E663-41FC-8A3C-AC79657DF6AB}" dt="2023-02-07T01:39:29.738" v="8572" actId="1076"/>
-        <pc:sldMkLst>
-          <pc:docMk/>
-          <pc:sldMk cId="592329134" sldId="790"/>
-        </pc:sldMkLst>
-      </pc:sldChg>
-      <pc:sldChg chg="addSp modSp add mod modClrScheme chgLayout">
-        <pc:chgData name="Matthieu De Mari" userId="dfb708c9-d8dc-439f-9a3b-c772bf4a311c" providerId="ADAL" clId="{D2FDBEB2-E663-41FC-8A3C-AC79657DF6AB}" dt="2023-02-07T01:52:11.876" v="9261"/>
-        <pc:sldMkLst>
-          <pc:docMk/>
-          <pc:sldMk cId="2530178653" sldId="791"/>
-        </pc:sldMkLst>
-      </pc:sldChg>
-      <pc:sldChg chg="addSp delSp modSp add mod">
-        <pc:chgData name="Matthieu De Mari" userId="dfb708c9-d8dc-439f-9a3b-c772bf4a311c" providerId="ADAL" clId="{D2FDBEB2-E663-41FC-8A3C-AC79657DF6AB}" dt="2023-02-07T05:02:15.014" v="10617" actId="113"/>
-        <pc:sldMkLst>
-          <pc:docMk/>
-          <pc:sldMk cId="2330822039" sldId="792"/>
-        </pc:sldMkLst>
-      </pc:sldChg>
-      <pc:sldChg chg="addSp delSp modSp add mod modClrScheme chgLayout">
-        <pc:chgData name="Matthieu De Mari" userId="dfb708c9-d8dc-439f-9a3b-c772bf4a311c" providerId="ADAL" clId="{D2FDBEB2-E663-41FC-8A3C-AC79657DF6AB}" dt="2023-02-07T05:02:19.492" v="10619" actId="113"/>
-        <pc:sldMkLst>
-          <pc:docMk/>
-          <pc:sldMk cId="260742946" sldId="793"/>
-        </pc:sldMkLst>
-      </pc:sldChg>
-      <pc:sldChg chg="addSp delSp modSp add mod">
-        <pc:chgData name="Matthieu De Mari" userId="dfb708c9-d8dc-439f-9a3b-c772bf4a311c" providerId="ADAL" clId="{D2FDBEB2-E663-41FC-8A3C-AC79657DF6AB}" dt="2023-02-07T05:03:00.308" v="10622" actId="113"/>
-        <pc:sldMkLst>
-          <pc:docMk/>
-          <pc:sldMk cId="1577144882" sldId="794"/>
-        </pc:sldMkLst>
-      </pc:sldChg>
-      <pc:sldChg chg="addSp delSp modSp add mod">
-        <pc:chgData name="Matthieu De Mari" userId="dfb708c9-d8dc-439f-9a3b-c772bf4a311c" providerId="ADAL" clId="{D2FDBEB2-E663-41FC-8A3C-AC79657DF6AB}" dt="2023-02-07T01:58:29.608" v="9501" actId="20577"/>
-        <pc:sldMkLst>
-          <pc:docMk/>
-          <pc:sldMk cId="2353942002" sldId="795"/>
-        </pc:sldMkLst>
-      </pc:sldChg>
-      <pc:sldChg chg="modSp add mod">
-        <pc:chgData name="Matthieu De Mari" userId="dfb708c9-d8dc-439f-9a3b-c772bf4a311c" providerId="ADAL" clId="{D2FDBEB2-E663-41FC-8A3C-AC79657DF6AB}" dt="2023-02-07T05:03:56.737" v="10667" actId="113"/>
-        <pc:sldMkLst>
-          <pc:docMk/>
-          <pc:sldMk cId="1414932605" sldId="796"/>
-        </pc:sldMkLst>
-      </pc:sldChg>
-      <pc:sldChg chg="addSp delSp modSp add mod">
-        <pc:chgData name="Matthieu De Mari" userId="dfb708c9-d8dc-439f-9a3b-c772bf4a311c" providerId="ADAL" clId="{D2FDBEB2-E663-41FC-8A3C-AC79657DF6AB}" dt="2023-02-07T02:12:04.493" v="10148" actId="478"/>
-        <pc:sldMkLst>
-          <pc:docMk/>
-          <pc:sldMk cId="326589634" sldId="797"/>
-        </pc:sldMkLst>
-      </pc:sldChg>
-      <pc:sldChg chg="addSp delSp modSp add mod">
-        <pc:chgData name="Matthieu De Mari" userId="dfb708c9-d8dc-439f-9a3b-c772bf4a311c" providerId="ADAL" clId="{D2FDBEB2-E663-41FC-8A3C-AC79657DF6AB}" dt="2023-02-07T02:09:43.326" v="10079" actId="1076"/>
-        <pc:sldMkLst>
-          <pc:docMk/>
-          <pc:sldMk cId="567883404" sldId="798"/>
-        </pc:sldMkLst>
-      </pc:sldChg>
-      <pc:sldChg chg="modSp add mod">
-        <pc:chgData name="Matthieu De Mari" userId="dfb708c9-d8dc-439f-9a3b-c772bf4a311c" providerId="ADAL" clId="{D2FDBEB2-E663-41FC-8A3C-AC79657DF6AB}" dt="2023-02-07T02:08:59.725" v="10064" actId="113"/>
-        <pc:sldMkLst>
-          <pc:docMk/>
-          <pc:sldMk cId="703353227" sldId="799"/>
-        </pc:sldMkLst>
-      </pc:sldChg>
-      <pc:sldChg chg="addSp modSp add del mod modClrScheme chgLayout">
-        <pc:chgData name="Matthieu De Mari" userId="dfb708c9-d8dc-439f-9a3b-c772bf4a311c" providerId="ADAL" clId="{D2FDBEB2-E663-41FC-8A3C-AC79657DF6AB}" dt="2023-02-07T05:12:54.389" v="11078" actId="47"/>
-        <pc:sldMkLst>
-          <pc:docMk/>
-          <pc:sldMk cId="4239393154" sldId="800"/>
-        </pc:sldMkLst>
-      </pc:sldChg>
-      <pc:sldChg chg="add">
-        <pc:chgData name="Matthieu De Mari" userId="dfb708c9-d8dc-439f-9a3b-c772bf4a311c" providerId="ADAL" clId="{D2FDBEB2-E663-41FC-8A3C-AC79657DF6AB}" dt="2023-02-07T02:11:44.897" v="10144" actId="2890"/>
-        <pc:sldMkLst>
-          <pc:docMk/>
-          <pc:sldMk cId="51924387" sldId="801"/>
-        </pc:sldMkLst>
-      </pc:sldChg>
-      <pc:sldChg chg="addSp delSp modSp add mod ord">
-        <pc:chgData name="Matthieu De Mari" userId="dfb708c9-d8dc-439f-9a3b-c772bf4a311c" providerId="ADAL" clId="{D2FDBEB2-E663-41FC-8A3C-AC79657DF6AB}" dt="2023-02-07T02:13:55.223" v="10292" actId="1076"/>
-        <pc:sldMkLst>
-          <pc:docMk/>
-          <pc:sldMk cId="253262496" sldId="802"/>
-        </pc:sldMkLst>
-      </pc:sldChg>
-      <pc:sldChg chg="addSp delSp modSp add mod ord modClrScheme chgLayout">
-        <pc:chgData name="Matthieu De Mari" userId="dfb708c9-d8dc-439f-9a3b-c772bf4a311c" providerId="ADAL" clId="{D2FDBEB2-E663-41FC-8A3C-AC79657DF6AB}" dt="2023-02-07T06:01:28.677" v="13203"/>
-        <pc:sldMkLst>
-          <pc:docMk/>
-          <pc:sldMk cId="232544569" sldId="803"/>
-        </pc:sldMkLst>
-      </pc:sldChg>
-      <pc:sldChg chg="addSp modSp add mod ord modClrScheme chgLayout">
-        <pc:chgData name="Matthieu De Mari" userId="dfb708c9-d8dc-439f-9a3b-c772bf4a311c" providerId="ADAL" clId="{D2FDBEB2-E663-41FC-8A3C-AC79657DF6AB}" dt="2023-02-07T05:07:19.124" v="10781" actId="20577"/>
-        <pc:sldMkLst>
-          <pc:docMk/>
-          <pc:sldMk cId="165715628" sldId="804"/>
-        </pc:sldMkLst>
-      </pc:sldChg>
-      <pc:sldChg chg="modSp add mod ord">
-        <pc:chgData name="Matthieu De Mari" userId="dfb708c9-d8dc-439f-9a3b-c772bf4a311c" providerId="ADAL" clId="{D2FDBEB2-E663-41FC-8A3C-AC79657DF6AB}" dt="2023-02-07T05:08:06.757" v="10831" actId="20577"/>
-        <pc:sldMkLst>
-          <pc:docMk/>
-          <pc:sldMk cId="1145967515" sldId="805"/>
-        </pc:sldMkLst>
-      </pc:sldChg>
-      <pc:sldChg chg="addSp delSp modSp add mod ord">
-        <pc:chgData name="Matthieu De Mari" userId="dfb708c9-d8dc-439f-9a3b-c772bf4a311c" providerId="ADAL" clId="{D2FDBEB2-E663-41FC-8A3C-AC79657DF6AB}" dt="2023-02-07T06:01:28.677" v="13203"/>
-        <pc:sldMkLst>
-          <pc:docMk/>
-          <pc:sldMk cId="3590245027" sldId="806"/>
-        </pc:sldMkLst>
-      </pc:sldChg>
-      <pc:sldChg chg="addSp delSp modSp add mod ord modClrScheme chgLayout">
-        <pc:chgData name="Matthieu De Mari" userId="dfb708c9-d8dc-439f-9a3b-c772bf4a311c" providerId="ADAL" clId="{D2FDBEB2-E663-41FC-8A3C-AC79657DF6AB}" dt="2023-02-07T06:01:28.677" v="13203"/>
-        <pc:sldMkLst>
-          <pc:docMk/>
-          <pc:sldMk cId="609329699" sldId="807"/>
-        </pc:sldMkLst>
-      </pc:sldChg>
-      <pc:sldChg chg="addSp delSp modSp add mod ord modClrScheme chgLayout">
-        <pc:chgData name="Matthieu De Mari" userId="dfb708c9-d8dc-439f-9a3b-c772bf4a311c" providerId="ADAL" clId="{D2FDBEB2-E663-41FC-8A3C-AC79657DF6AB}" dt="2023-02-07T06:01:28.677" v="13203"/>
-        <pc:sldMkLst>
-          <pc:docMk/>
-          <pc:sldMk cId="741808374" sldId="808"/>
-        </pc:sldMkLst>
-      </pc:sldChg>
-      <pc:sldChg chg="addSp delSp modSp new mod ord modClrScheme chgLayout">
-        <pc:chgData name="Matthieu De Mari" userId="dfb708c9-d8dc-439f-9a3b-c772bf4a311c" providerId="ADAL" clId="{D2FDBEB2-E663-41FC-8A3C-AC79657DF6AB}" dt="2023-02-07T06:01:28.677" v="13203"/>
-        <pc:sldMkLst>
-          <pc:docMk/>
-          <pc:sldMk cId="4127253414" sldId="809"/>
-        </pc:sldMkLst>
-      </pc:sldChg>
-      <pc:sldChg chg="add del">
-        <pc:chgData name="Matthieu De Mari" userId="dfb708c9-d8dc-439f-9a3b-c772bf4a311c" providerId="ADAL" clId="{D2FDBEB2-E663-41FC-8A3C-AC79657DF6AB}" dt="2023-02-07T05:32:44.602" v="12353" actId="47"/>
-        <pc:sldMkLst>
-          <pc:docMk/>
-          <pc:sldMk cId="1531495493" sldId="810"/>
-        </pc:sldMkLst>
-      </pc:sldChg>
-      <pc:sldChg chg="addSp delSp modSp add mod ord">
-        <pc:chgData name="Matthieu De Mari" userId="dfb708c9-d8dc-439f-9a3b-c772bf4a311c" providerId="ADAL" clId="{D2FDBEB2-E663-41FC-8A3C-AC79657DF6AB}" dt="2023-02-07T06:01:28.677" v="13203"/>
-        <pc:sldMkLst>
-          <pc:docMk/>
-          <pc:sldMk cId="3415879044" sldId="810"/>
-        </pc:sldMkLst>
-      </pc:sldChg>
-      <pc:sldChg chg="addSp delSp modSp new mod modClrScheme chgLayout">
-        <pc:chgData name="Matthieu De Mari" userId="dfb708c9-d8dc-439f-9a3b-c772bf4a311c" providerId="ADAL" clId="{D2FDBEB2-E663-41FC-8A3C-AC79657DF6AB}" dt="2023-02-07T06:02:08.291" v="13210" actId="122"/>
-        <pc:sldMkLst>
-          <pc:docMk/>
-          <pc:sldMk cId="2804082923" sldId="811"/>
-        </pc:sldMkLst>
-      </pc:sldChg>
-      <pc:sldChg chg="addSp delSp modSp add mod ord modClrScheme chgLayout">
-        <pc:chgData name="Matthieu De Mari" userId="dfb708c9-d8dc-439f-9a3b-c772bf4a311c" providerId="ADAL" clId="{D2FDBEB2-E663-41FC-8A3C-AC79657DF6AB}" dt="2023-02-07T05:55:55.296" v="12954" actId="5793"/>
-        <pc:sldMkLst>
-          <pc:docMk/>
-          <pc:sldMk cId="3931571633" sldId="812"/>
-        </pc:sldMkLst>
-      </pc:sldChg>
-      <pc:sldChg chg="addSp delSp modSp new mod">
-        <pc:chgData name="Matthieu De Mari" userId="dfb708c9-d8dc-439f-9a3b-c772bf4a311c" providerId="ADAL" clId="{D2FDBEB2-E663-41FC-8A3C-AC79657DF6AB}" dt="2023-02-07T06:11:21.969" v="13790" actId="1076"/>
-        <pc:sldMkLst>
-          <pc:docMk/>
-          <pc:sldMk cId="1677488890" sldId="813"/>
-        </pc:sldMkLst>
-      </pc:sldChg>
-      <pc:sldChg chg="addSp modSp new mod">
-        <pc:chgData name="Matthieu De Mari" userId="dfb708c9-d8dc-439f-9a3b-c772bf4a311c" providerId="ADAL" clId="{D2FDBEB2-E663-41FC-8A3C-AC79657DF6AB}" dt="2023-02-07T06:10:35.915" v="13784" actId="1076"/>
-        <pc:sldMkLst>
-          <pc:docMk/>
-          <pc:sldMk cId="2163984957" sldId="814"/>
-        </pc:sldMkLst>
-      </pc:sldChg>
-      <pc:sldChg chg="addSp delSp modSp add mod modClrScheme chgLayout">
-        <pc:chgData name="Matthieu De Mari" userId="dfb708c9-d8dc-439f-9a3b-c772bf4a311c" providerId="ADAL" clId="{D2FDBEB2-E663-41FC-8A3C-AC79657DF6AB}" dt="2023-02-07T06:14:39.295" v="14155" actId="20577"/>
-        <pc:sldMkLst>
-          <pc:docMk/>
-          <pc:sldMk cId="507741553" sldId="815"/>
-        </pc:sldMkLst>
-      </pc:sldChg>
-      <pc:sldChg chg="addSp delSp modSp add mod">
-        <pc:chgData name="Matthieu De Mari" userId="dfb708c9-d8dc-439f-9a3b-c772bf4a311c" providerId="ADAL" clId="{D2FDBEB2-E663-41FC-8A3C-AC79657DF6AB}" dt="2023-02-07T06:28:15.529" v="14810" actId="20577"/>
-        <pc:sldMkLst>
-          <pc:docMk/>
-          <pc:sldMk cId="1946753280" sldId="816"/>
-        </pc:sldMkLst>
-      </pc:sldChg>
-      <pc:sldChg chg="addSp delSp modSp add mod">
-        <pc:chgData name="Matthieu De Mari" userId="dfb708c9-d8dc-439f-9a3b-c772bf4a311c" providerId="ADAL" clId="{D2FDBEB2-E663-41FC-8A3C-AC79657DF6AB}" dt="2023-02-07T06:28:48.006" v="14819" actId="1076"/>
-        <pc:sldMkLst>
-          <pc:docMk/>
-          <pc:sldMk cId="4233116706" sldId="817"/>
-        </pc:sldMkLst>
-      </pc:sldChg>
-      <pc:sldChg chg="addSp modSp add mod">
-        <pc:chgData name="Matthieu De Mari" userId="dfb708c9-d8dc-439f-9a3b-c772bf4a311c" providerId="ADAL" clId="{D2FDBEB2-E663-41FC-8A3C-AC79657DF6AB}" dt="2023-02-07T06:28:50.363" v="14820"/>
-        <pc:sldMkLst>
-          <pc:docMk/>
-          <pc:sldMk cId="182983479" sldId="818"/>
-        </pc:sldMkLst>
-      </pc:sldChg>
-      <pc:sldChg chg="modSp add mod">
-        <pc:chgData name="Matthieu De Mari" userId="dfb708c9-d8dc-439f-9a3b-c772bf4a311c" providerId="ADAL" clId="{D2FDBEB2-E663-41FC-8A3C-AC79657DF6AB}" dt="2023-02-07T06:44:38.599" v="15451" actId="20577"/>
-        <pc:sldMkLst>
-          <pc:docMk/>
-          <pc:sldMk cId="336555302" sldId="819"/>
-        </pc:sldMkLst>
-      </pc:sldChg>
-      <pc:sldChg chg="addSp delSp modSp new mod">
-        <pc:chgData name="Matthieu De Mari" userId="dfb708c9-d8dc-439f-9a3b-c772bf4a311c" providerId="ADAL" clId="{D2FDBEB2-E663-41FC-8A3C-AC79657DF6AB}" dt="2023-02-07T06:45:30.427" v="15485" actId="1076"/>
-        <pc:sldMkLst>
-          <pc:docMk/>
-          <pc:sldMk cId="651859086" sldId="820"/>
-        </pc:sldMkLst>
-      </pc:sldChg>
-      <pc:sldChg chg="addSp delSp modSp new mod modClrScheme chgLayout">
-        <pc:chgData name="Matthieu De Mari" userId="dfb708c9-d8dc-439f-9a3b-c772bf4a311c" providerId="ADAL" clId="{D2FDBEB2-E663-41FC-8A3C-AC79657DF6AB}" dt="2023-02-07T06:47:57.544" v="15723" actId="20577"/>
-        <pc:sldMkLst>
-          <pc:docMk/>
-          <pc:sldMk cId="986128993" sldId="821"/>
-        </pc:sldMkLst>
-      </pc:sldChg>
-      <pc:sldChg chg="addSp delSp modSp new mod modClrScheme chgLayout">
-        <pc:chgData name="Matthieu De Mari" userId="dfb708c9-d8dc-439f-9a3b-c772bf4a311c" providerId="ADAL" clId="{D2FDBEB2-E663-41FC-8A3C-AC79657DF6AB}" dt="2023-02-07T06:51:49.213" v="16011" actId="1076"/>
-        <pc:sldMkLst>
-          <pc:docMk/>
-          <pc:sldMk cId="4216078664" sldId="822"/>
-        </pc:sldMkLst>
-      </pc:sldChg>
-      <pc:sldChg chg="add">
-        <pc:chgData name="Matthieu De Mari" userId="dfb708c9-d8dc-439f-9a3b-c772bf4a311c" providerId="ADAL" clId="{D2FDBEB2-E663-41FC-8A3C-AC79657DF6AB}" dt="2023-02-07T06:52:15.897" v="16013"/>
-        <pc:sldMkLst>
-          <pc:docMk/>
-          <pc:sldMk cId="2532925431" sldId="823"/>
-        </pc:sldMkLst>
-      </pc:sldChg>
-      <pc:sldChg chg="add">
-        <pc:chgData name="Matthieu De Mari" userId="dfb708c9-d8dc-439f-9a3b-c772bf4a311c" providerId="ADAL" clId="{D2FDBEB2-E663-41FC-8A3C-AC79657DF6AB}" dt="2023-02-07T06:52:15.897" v="16013"/>
-        <pc:sldMkLst>
-          <pc:docMk/>
-          <pc:sldMk cId="1198396189" sldId="824"/>
-        </pc:sldMkLst>
-      </pc:sldChg>
-      <pc:sldChg chg="add">
-        <pc:chgData name="Matthieu De Mari" userId="dfb708c9-d8dc-439f-9a3b-c772bf4a311c" providerId="ADAL" clId="{D2FDBEB2-E663-41FC-8A3C-AC79657DF6AB}" dt="2023-02-07T06:52:15.897" v="16013"/>
-        <pc:sldMkLst>
-          <pc:docMk/>
-          <pc:sldMk cId="1581268848" sldId="825"/>
-        </pc:sldMkLst>
-      </pc:sldChg>
-      <pc:sldChg chg="addSp delSp modSp new mod modClrScheme chgLayout">
-        <pc:chgData name="Matthieu De Mari" userId="dfb708c9-d8dc-439f-9a3b-c772bf4a311c" providerId="ADAL" clId="{D2FDBEB2-E663-41FC-8A3C-AC79657DF6AB}" dt="2023-02-07T06:56:13.154" v="16712" actId="20577"/>
-        <pc:sldMkLst>
-          <pc:docMk/>
-          <pc:sldMk cId="3100375267" sldId="826"/>
-        </pc:sldMkLst>
-      </pc:sldChg>
-    </pc:docChg>
-  </pc:docChgLst>
-  <pc:docChgLst>
-    <pc:chgData name="Matthieu De Mari" userId="dfb708c9-d8dc-439f-9a3b-c772bf4a311c" providerId="ADAL" clId="{B8E5AABC-2D12-449A-8C5E-601386E7E081}"/>
-    <pc:docChg chg="custSel delSld modSld modSection">
-      <pc:chgData name="Matthieu De Mari" userId="dfb708c9-d8dc-439f-9a3b-c772bf4a311c" providerId="ADAL" clId="{B8E5AABC-2D12-449A-8C5E-601386E7E081}" dt="2024-12-04T08:11:37.073" v="14" actId="20577"/>
-      <pc:docMkLst>
-        <pc:docMk/>
-      </pc:docMkLst>
-      <pc:sldChg chg="modSp mod">
-        <pc:chgData name="Matthieu De Mari" userId="dfb708c9-d8dc-439f-9a3b-c772bf4a311c" providerId="ADAL" clId="{B8E5AABC-2D12-449A-8C5E-601386E7E081}" dt="2024-12-04T08:11:13.535" v="7" actId="20577"/>
-        <pc:sldMkLst>
-          <pc:docMk/>
-          <pc:sldMk cId="122423608" sldId="399"/>
-        </pc:sldMkLst>
-        <pc:spChg chg="mod">
-          <ac:chgData name="Matthieu De Mari" userId="dfb708c9-d8dc-439f-9a3b-c772bf4a311c" providerId="ADAL" clId="{B8E5AABC-2D12-449A-8C5E-601386E7E081}" dt="2024-12-04T08:11:13.535" v="7" actId="20577"/>
-          <ac:spMkLst>
-            <pc:docMk/>
-            <pc:sldMk cId="122423608" sldId="399"/>
-            <ac:spMk id="3" creationId="{F0814AA9-339A-72D8-E8A9-C066A3ED5800}"/>
-          </ac:spMkLst>
-        </pc:spChg>
-        <pc:spChg chg="mod">
-          <ac:chgData name="Matthieu De Mari" userId="dfb708c9-d8dc-439f-9a3b-c772bf4a311c" providerId="ADAL" clId="{B8E5AABC-2D12-449A-8C5E-601386E7E081}" dt="2024-12-04T08:11:13.045" v="5" actId="27636"/>
-          <ac:spMkLst>
-            <pc:docMk/>
-            <pc:sldMk cId="122423608" sldId="399"/>
-            <ac:spMk id="4" creationId="{3D8906E9-3F26-1680-6CF9-CC0314375949}"/>
-          </ac:spMkLst>
-        </pc:spChg>
-      </pc:sldChg>
-      <pc:sldChg chg="del">
-        <pc:chgData name="Matthieu De Mari" userId="dfb708c9-d8dc-439f-9a3b-c772bf4a311c" providerId="ADAL" clId="{B8E5AABC-2D12-449A-8C5E-601386E7E081}" dt="2024-12-04T08:10:59.667" v="1" actId="47"/>
-        <pc:sldMkLst>
-          <pc:docMk/>
-          <pc:sldMk cId="3070780217" sldId="786"/>
-        </pc:sldMkLst>
-      </pc:sldChg>
-      <pc:sldChg chg="del">
-        <pc:chgData name="Matthieu De Mari" userId="dfb708c9-d8dc-439f-9a3b-c772bf4a311c" providerId="ADAL" clId="{B8E5AABC-2D12-449A-8C5E-601386E7E081}" dt="2024-12-04T08:11:00.635" v="2" actId="47"/>
-        <pc:sldMkLst>
-          <pc:docMk/>
-          <pc:sldMk cId="4093678153" sldId="788"/>
-        </pc:sldMkLst>
-      </pc:sldChg>
-      <pc:sldChg chg="modSp mod">
-        <pc:chgData name="Matthieu De Mari" userId="dfb708c9-d8dc-439f-9a3b-c772bf4a311c" providerId="ADAL" clId="{B8E5AABC-2D12-449A-8C5E-601386E7E081}" dt="2024-12-04T08:11:37.073" v="14" actId="20577"/>
-        <pc:sldMkLst>
-          <pc:docMk/>
-          <pc:sldMk cId="567883404" sldId="798"/>
-        </pc:sldMkLst>
-        <pc:spChg chg="mod">
-          <ac:chgData name="Matthieu De Mari" userId="dfb708c9-d8dc-439f-9a3b-c772bf4a311c" providerId="ADAL" clId="{B8E5AABC-2D12-449A-8C5E-601386E7E081}" dt="2024-12-04T08:11:37.073" v="14" actId="20577"/>
-          <ac:spMkLst>
-            <pc:docMk/>
-            <pc:sldMk cId="567883404" sldId="798"/>
-            <ac:spMk id="3" creationId="{F0814AA9-339A-72D8-E8A9-C066A3ED5800}"/>
-          </ac:spMkLst>
-        </pc:spChg>
-      </pc:sldChg>
-      <pc:sldChg chg="modSp mod">
-        <pc:chgData name="Matthieu De Mari" userId="dfb708c9-d8dc-439f-9a3b-c772bf4a311c" providerId="ADAL" clId="{B8E5AABC-2D12-449A-8C5E-601386E7E081}" dt="2024-12-04T08:11:28.282" v="13" actId="1076"/>
-        <pc:sldMkLst>
-          <pc:docMk/>
-          <pc:sldMk cId="703353227" sldId="799"/>
-        </pc:sldMkLst>
-        <pc:spChg chg="mod">
-          <ac:chgData name="Matthieu De Mari" userId="dfb708c9-d8dc-439f-9a3b-c772bf4a311c" providerId="ADAL" clId="{B8E5AABC-2D12-449A-8C5E-601386E7E081}" dt="2024-12-04T08:11:19.498" v="11" actId="20577"/>
-          <ac:spMkLst>
-            <pc:docMk/>
-            <pc:sldMk cId="703353227" sldId="799"/>
-            <ac:spMk id="3" creationId="{F0814AA9-339A-72D8-E8A9-C066A3ED5800}"/>
-          </ac:spMkLst>
-        </pc:spChg>
-        <pc:spChg chg="mod">
-          <ac:chgData name="Matthieu De Mari" userId="dfb708c9-d8dc-439f-9a3b-c772bf4a311c" providerId="ADAL" clId="{B8E5AABC-2D12-449A-8C5E-601386E7E081}" dt="2024-12-04T08:11:18.938" v="9" actId="27636"/>
-          <ac:spMkLst>
-            <pc:docMk/>
-            <pc:sldMk cId="703353227" sldId="799"/>
-            <ac:spMk id="4" creationId="{3D8906E9-3F26-1680-6CF9-CC0314375949}"/>
-          </ac:spMkLst>
-        </pc:spChg>
-        <pc:picChg chg="mod">
-          <ac:chgData name="Matthieu De Mari" userId="dfb708c9-d8dc-439f-9a3b-c772bf4a311c" providerId="ADAL" clId="{B8E5AABC-2D12-449A-8C5E-601386E7E081}" dt="2024-12-04T08:11:28.282" v="13" actId="1076"/>
-          <ac:picMkLst>
-            <pc:docMk/>
-            <pc:sldMk cId="703353227" sldId="799"/>
-            <ac:picMk id="6" creationId="{5F1CA5DA-BBDC-B1F1-22A7-C8B1B6EB8884}"/>
-          </ac:picMkLst>
-        </pc:picChg>
-      </pc:sldChg>
-      <pc:sldChg chg="del">
-        <pc:chgData name="Matthieu De Mari" userId="dfb708c9-d8dc-439f-9a3b-c772bf4a311c" providerId="ADAL" clId="{B8E5AABC-2D12-449A-8C5E-601386E7E081}" dt="2024-12-04T08:10:58.972" v="0" actId="47"/>
-        <pc:sldMkLst>
-          <pc:docMk/>
-          <pc:sldMk cId="1364016482" sldId="834"/>
-        </pc:sldMkLst>
-      </pc:sldChg>
-    </pc:docChg>
-  </pc:docChgLst>
-  <pc:docChgLst>
-    <pc:chgData name="Matthieu De Mari" userId="dfb708c9-d8dc-439f-9a3b-c772bf4a311c" providerId="ADAL" clId="{C2A075CF-C4D9-45BF-A2F4-9F4744A685AF}"/>
-    <pc:docChg chg="undo custSel addSld delSld modSld sldOrd delSection modSection">
-      <pc:chgData name="Matthieu De Mari" userId="dfb708c9-d8dc-439f-9a3b-c772bf4a311c" providerId="ADAL" clId="{C2A075CF-C4D9-45BF-A2F4-9F4744A685AF}" dt="2024-02-08T05:36:40.966" v="1722" actId="27636"/>
-      <pc:docMkLst>
-        <pc:docMk/>
-      </pc:docMkLst>
-      <pc:sldChg chg="modSp del mod">
-        <pc:chgData name="Matthieu De Mari" userId="dfb708c9-d8dc-439f-9a3b-c772bf4a311c" providerId="ADAL" clId="{C2A075CF-C4D9-45BF-A2F4-9F4744A685AF}" dt="2024-02-07T03:05:43.615" v="788" actId="2696"/>
-        <pc:sldMkLst>
-          <pc:docMk/>
-          <pc:sldMk cId="1458730680" sldId="396"/>
-        </pc:sldMkLst>
-      </pc:sldChg>
-      <pc:sldChg chg="add">
-        <pc:chgData name="Matthieu De Mari" userId="dfb708c9-d8dc-439f-9a3b-c772bf4a311c" providerId="ADAL" clId="{C2A075CF-C4D9-45BF-A2F4-9F4744A685AF}" dt="2024-02-07T03:05:48.341" v="789"/>
-        <pc:sldMkLst>
-          <pc:docMk/>
-          <pc:sldMk cId="3620399431" sldId="396"/>
-        </pc:sldMkLst>
-      </pc:sldChg>
-      <pc:sldChg chg="modSp mod">
-        <pc:chgData name="Matthieu De Mari" userId="dfb708c9-d8dc-439f-9a3b-c772bf4a311c" providerId="ADAL" clId="{C2A075CF-C4D9-45BF-A2F4-9F4744A685AF}" dt="2024-02-07T03:01:09.227" v="637" actId="20577"/>
-        <pc:sldMkLst>
-          <pc:docMk/>
-          <pc:sldMk cId="1451434589" sldId="397"/>
-        </pc:sldMkLst>
-      </pc:sldChg>
-      <pc:sldChg chg="modSp mod modClrScheme chgLayout">
-        <pc:chgData name="Matthieu De Mari" userId="dfb708c9-d8dc-439f-9a3b-c772bf4a311c" providerId="ADAL" clId="{C2A075CF-C4D9-45BF-A2F4-9F4744A685AF}" dt="2024-02-07T03:04:40.221" v="787" actId="1076"/>
-        <pc:sldMkLst>
-          <pc:docMk/>
-          <pc:sldMk cId="2867637474" sldId="398"/>
-        </pc:sldMkLst>
-      </pc:sldChg>
-      <pc:sldChg chg="modSp mod">
-        <pc:chgData name="Matthieu De Mari" userId="dfb708c9-d8dc-439f-9a3b-c772bf4a311c" providerId="ADAL" clId="{C2A075CF-C4D9-45BF-A2F4-9F4744A685AF}" dt="2024-02-07T03:09:10.143" v="1097" actId="20577"/>
-        <pc:sldMkLst>
-          <pc:docMk/>
-          <pc:sldMk cId="122423608" sldId="399"/>
-        </pc:sldMkLst>
-      </pc:sldChg>
-      <pc:sldChg chg="modSp mod">
-        <pc:chgData name="Matthieu De Mari" userId="dfb708c9-d8dc-439f-9a3b-c772bf4a311c" providerId="ADAL" clId="{C2A075CF-C4D9-45BF-A2F4-9F4744A685AF}" dt="2024-02-07T03:16:53.761" v="1405" actId="20577"/>
-        <pc:sldMkLst>
-          <pc:docMk/>
-          <pc:sldMk cId="4039171501" sldId="401"/>
-        </pc:sldMkLst>
-      </pc:sldChg>
-      <pc:sldChg chg="modSp mod">
-        <pc:chgData name="Matthieu De Mari" userId="dfb708c9-d8dc-439f-9a3b-c772bf4a311c" providerId="ADAL" clId="{C2A075CF-C4D9-45BF-A2F4-9F4744A685AF}" dt="2024-02-07T03:14:14.160" v="1304" actId="20577"/>
-        <pc:sldMkLst>
-          <pc:docMk/>
-          <pc:sldMk cId="3163596145" sldId="402"/>
-        </pc:sldMkLst>
-      </pc:sldChg>
-      <pc:sldChg chg="del">
-        <pc:chgData name="Matthieu De Mari" userId="dfb708c9-d8dc-439f-9a3b-c772bf4a311c" providerId="ADAL" clId="{C2A075CF-C4D9-45BF-A2F4-9F4744A685AF}" dt="2024-02-07T03:17:52.609" v="1408" actId="47"/>
-        <pc:sldMkLst>
-          <pc:docMk/>
-          <pc:sldMk cId="101927766" sldId="403"/>
-        </pc:sldMkLst>
-      </pc:sldChg>
-      <pc:sldChg chg="addSp delSp modSp mod">
-        <pc:chgData name="Matthieu De Mari" userId="dfb708c9-d8dc-439f-9a3b-c772bf4a311c" providerId="ADAL" clId="{C2A075CF-C4D9-45BF-A2F4-9F4744A685AF}" dt="2024-02-07T03:00:13.184" v="594"/>
-        <pc:sldMkLst>
-          <pc:docMk/>
-          <pc:sldMk cId="3029045816" sldId="781"/>
-        </pc:sldMkLst>
-      </pc:sldChg>
-      <pc:sldChg chg="modSp mod">
-        <pc:chgData name="Matthieu De Mari" userId="dfb708c9-d8dc-439f-9a3b-c772bf4a311c" providerId="ADAL" clId="{C2A075CF-C4D9-45BF-A2F4-9F4744A685AF}" dt="2024-02-06T09:20:57.177" v="315" actId="207"/>
-        <pc:sldMkLst>
-          <pc:docMk/>
-          <pc:sldMk cId="1783907351" sldId="783"/>
-        </pc:sldMkLst>
-      </pc:sldChg>
-      <pc:sldChg chg="modSp mod">
-        <pc:chgData name="Matthieu De Mari" userId="dfb708c9-d8dc-439f-9a3b-c772bf4a311c" providerId="ADAL" clId="{C2A075CF-C4D9-45BF-A2F4-9F4744A685AF}" dt="2024-02-06T09:21:00.937" v="316" actId="207"/>
-        <pc:sldMkLst>
-          <pc:docMk/>
-          <pc:sldMk cId="2670805330" sldId="784"/>
-        </pc:sldMkLst>
-      </pc:sldChg>
-      <pc:sldChg chg="del">
-        <pc:chgData name="Matthieu De Mari" userId="dfb708c9-d8dc-439f-9a3b-c772bf4a311c" providerId="ADAL" clId="{C2A075CF-C4D9-45BF-A2F4-9F4744A685AF}" dt="2024-02-07T03:05:43.615" v="788" actId="2696"/>
-        <pc:sldMkLst>
-          <pc:docMk/>
-          <pc:sldMk cId="2278534749" sldId="786"/>
-        </pc:sldMkLst>
-      </pc:sldChg>
-      <pc:sldChg chg="modSp add mod ord">
-        <pc:chgData name="Matthieu De Mari" userId="dfb708c9-d8dc-439f-9a3b-c772bf4a311c" providerId="ADAL" clId="{C2A075CF-C4D9-45BF-A2F4-9F4744A685AF}" dt="2024-02-07T03:08:27.263" v="1081" actId="20577"/>
-        <pc:sldMkLst>
-          <pc:docMk/>
-          <pc:sldMk cId="3070780217" sldId="786"/>
-        </pc:sldMkLst>
-      </pc:sldChg>
-      <pc:sldChg chg="del">
-        <pc:chgData name="Matthieu De Mari" userId="dfb708c9-d8dc-439f-9a3b-c772bf4a311c" providerId="ADAL" clId="{C2A075CF-C4D9-45BF-A2F4-9F4744A685AF}" dt="2024-02-07T03:05:43.615" v="788" actId="2696"/>
-        <pc:sldMkLst>
-          <pc:docMk/>
-          <pc:sldMk cId="3381120192" sldId="788"/>
-        </pc:sldMkLst>
-      </pc:sldChg>
-      <pc:sldChg chg="modSp add mod">
-        <pc:chgData name="Matthieu De Mari" userId="dfb708c9-d8dc-439f-9a3b-c772bf4a311c" providerId="ADAL" clId="{C2A075CF-C4D9-45BF-A2F4-9F4744A685AF}" dt="2024-02-07T03:08:43.518" v="1083" actId="27636"/>
-        <pc:sldMkLst>
-          <pc:docMk/>
-          <pc:sldMk cId="4093678153" sldId="788"/>
-        </pc:sldMkLst>
-      </pc:sldChg>
-      <pc:sldChg chg="modSp mod">
-        <pc:chgData name="Matthieu De Mari" userId="dfb708c9-d8dc-439f-9a3b-c772bf4a311c" providerId="ADAL" clId="{C2A075CF-C4D9-45BF-A2F4-9F4744A685AF}" dt="2024-02-06T09:21:35.480" v="318" actId="5793"/>
-        <pc:sldMkLst>
-          <pc:docMk/>
-          <pc:sldMk cId="473408429" sldId="789"/>
-        </pc:sldMkLst>
-      </pc:sldChg>
-      <pc:sldChg chg="delSp modSp mod modClrScheme chgLayout">
-        <pc:chgData name="Matthieu De Mari" userId="dfb708c9-d8dc-439f-9a3b-c772bf4a311c" providerId="ADAL" clId="{C2A075CF-C4D9-45BF-A2F4-9F4744A685AF}" dt="2024-02-08T05:31:40.399" v="1610" actId="20577"/>
-        <pc:sldMkLst>
-          <pc:docMk/>
-          <pc:sldMk cId="2530178653" sldId="791"/>
-        </pc:sldMkLst>
-      </pc:sldChg>
-      <pc:sldChg chg="addSp modSp mod">
-        <pc:chgData name="Matthieu De Mari" userId="dfb708c9-d8dc-439f-9a3b-c772bf4a311c" providerId="ADAL" clId="{C2A075CF-C4D9-45BF-A2F4-9F4744A685AF}" dt="2024-02-07T03:02:38.188" v="653" actId="207"/>
-        <pc:sldMkLst>
-          <pc:docMk/>
-          <pc:sldMk cId="260742946" sldId="793"/>
-        </pc:sldMkLst>
-      </pc:sldChg>
-      <pc:sldChg chg="modSp mod">
-        <pc:chgData name="Matthieu De Mari" userId="dfb708c9-d8dc-439f-9a3b-c772bf4a311c" providerId="ADAL" clId="{C2A075CF-C4D9-45BF-A2F4-9F4744A685AF}" dt="2024-02-07T03:03:00.989" v="657" actId="207"/>
-        <pc:sldMkLst>
-          <pc:docMk/>
-          <pc:sldMk cId="1577144882" sldId="794"/>
-        </pc:sldMkLst>
-      </pc:sldChg>
-      <pc:sldChg chg="modSp mod">
-        <pc:chgData name="Matthieu De Mari" userId="dfb708c9-d8dc-439f-9a3b-c772bf4a311c" providerId="ADAL" clId="{C2A075CF-C4D9-45BF-A2F4-9F4744A685AF}" dt="2024-02-06T09:23:32.696" v="444" actId="113"/>
-        <pc:sldMkLst>
-          <pc:docMk/>
-          <pc:sldMk cId="2353942002" sldId="795"/>
-        </pc:sldMkLst>
-      </pc:sldChg>
-      <pc:sldChg chg="modSp mod">
-        <pc:chgData name="Matthieu De Mari" userId="dfb708c9-d8dc-439f-9a3b-c772bf4a311c" providerId="ADAL" clId="{C2A075CF-C4D9-45BF-A2F4-9F4744A685AF}" dt="2024-02-08T05:32:21.469" v="1611" actId="113"/>
-        <pc:sldMkLst>
-          <pc:docMk/>
-          <pc:sldMk cId="1414932605" sldId="796"/>
-        </pc:sldMkLst>
-      </pc:sldChg>
-      <pc:sldChg chg="modSp mod">
-        <pc:chgData name="Matthieu De Mari" userId="dfb708c9-d8dc-439f-9a3b-c772bf4a311c" providerId="ADAL" clId="{C2A075CF-C4D9-45BF-A2F4-9F4744A685AF}" dt="2024-02-07T03:09:21.279" v="1098"/>
-        <pc:sldMkLst>
-          <pc:docMk/>
-          <pc:sldMk cId="703353227" sldId="799"/>
-        </pc:sldMkLst>
-      </pc:sldChg>
-      <pc:sldChg chg="modSp mod">
-        <pc:chgData name="Matthieu De Mari" userId="dfb708c9-d8dc-439f-9a3b-c772bf4a311c" providerId="ADAL" clId="{C2A075CF-C4D9-45BF-A2F4-9F4744A685AF}" dt="2024-02-08T05:33:03.456" v="1666" actId="20577"/>
-        <pc:sldMkLst>
-          <pc:docMk/>
-          <pc:sldMk cId="253262496" sldId="802"/>
-        </pc:sldMkLst>
-      </pc:sldChg>
-      <pc:sldChg chg="delSp modSp mod ord modClrScheme chgLayout">
-        <pc:chgData name="Matthieu De Mari" userId="dfb708c9-d8dc-439f-9a3b-c772bf4a311c" providerId="ADAL" clId="{C2A075CF-C4D9-45BF-A2F4-9F4744A685AF}" dt="2024-01-21T10:21:14.297" v="155"/>
-        <pc:sldMkLst>
-          <pc:docMk/>
-          <pc:sldMk cId="232544569" sldId="803"/>
-        </pc:sldMkLst>
-      </pc:sldChg>
-      <pc:sldChg chg="delSp modSp mod modClrScheme chgLayout">
-        <pc:chgData name="Matthieu De Mari" userId="dfb708c9-d8dc-439f-9a3b-c772bf4a311c" providerId="ADAL" clId="{C2A075CF-C4D9-45BF-A2F4-9F4744A685AF}" dt="2024-02-06T09:25:26.491" v="511" actId="20577"/>
-        <pc:sldMkLst>
-          <pc:docMk/>
-          <pc:sldMk cId="1145967515" sldId="805"/>
-        </pc:sldMkLst>
-      </pc:sldChg>
-      <pc:sldChg chg="modSp mod">
-        <pc:chgData name="Matthieu De Mari" userId="dfb708c9-d8dc-439f-9a3b-c772bf4a311c" providerId="ADAL" clId="{C2A075CF-C4D9-45BF-A2F4-9F4744A685AF}" dt="2024-01-21T10:21:36.338" v="157" actId="207"/>
-        <pc:sldMkLst>
-          <pc:docMk/>
-          <pc:sldMk cId="3590245027" sldId="806"/>
-        </pc:sldMkLst>
-      </pc:sldChg>
-      <pc:sldChg chg="modSp mod">
-        <pc:chgData name="Matthieu De Mari" userId="dfb708c9-d8dc-439f-9a3b-c772bf4a311c" providerId="ADAL" clId="{C2A075CF-C4D9-45BF-A2F4-9F4744A685AF}" dt="2024-01-21T10:21:49.630" v="158" actId="207"/>
-        <pc:sldMkLst>
-          <pc:docMk/>
-          <pc:sldMk cId="609329699" sldId="807"/>
-        </pc:sldMkLst>
-      </pc:sldChg>
-      <pc:sldChg chg="modSp del mod">
-        <pc:chgData name="Matthieu De Mari" userId="dfb708c9-d8dc-439f-9a3b-c772bf4a311c" providerId="ADAL" clId="{C2A075CF-C4D9-45BF-A2F4-9F4744A685AF}" dt="2024-02-06T09:26:22.656" v="592" actId="47"/>
-        <pc:sldMkLst>
-          <pc:docMk/>
-          <pc:sldMk cId="741808374" sldId="808"/>
-        </pc:sldMkLst>
-      </pc:sldChg>
-      <pc:sldChg chg="modSp mod">
-        <pc:chgData name="Matthieu De Mari" userId="dfb708c9-d8dc-439f-9a3b-c772bf4a311c" providerId="ADAL" clId="{C2A075CF-C4D9-45BF-A2F4-9F4744A685AF}" dt="2024-02-07T03:12:12.879" v="1158" actId="14100"/>
-        <pc:sldMkLst>
-          <pc:docMk/>
-          <pc:sldMk cId="4127253414" sldId="809"/>
-        </pc:sldMkLst>
-      </pc:sldChg>
-      <pc:sldChg chg="modSp mod">
-        <pc:chgData name="Matthieu De Mari" userId="dfb708c9-d8dc-439f-9a3b-c772bf4a311c" providerId="ADAL" clId="{C2A075CF-C4D9-45BF-A2F4-9F4744A685AF}" dt="2024-01-21T10:22:29.702" v="174"/>
-        <pc:sldMkLst>
-          <pc:docMk/>
-          <pc:sldMk cId="3415879044" sldId="810"/>
-        </pc:sldMkLst>
-      </pc:sldChg>
-      <pc:sldChg chg="modSp mod">
-        <pc:chgData name="Matthieu De Mari" userId="dfb708c9-d8dc-439f-9a3b-c772bf4a311c" providerId="ADAL" clId="{C2A075CF-C4D9-45BF-A2F4-9F4744A685AF}" dt="2024-01-21T10:22:34.774" v="176" actId="20577"/>
-        <pc:sldMkLst>
-          <pc:docMk/>
-          <pc:sldMk cId="2804082923" sldId="811"/>
-        </pc:sldMkLst>
-      </pc:sldChg>
-      <pc:sldChg chg="modSp mod">
-        <pc:chgData name="Matthieu De Mari" userId="dfb708c9-d8dc-439f-9a3b-c772bf4a311c" providerId="ADAL" clId="{C2A075CF-C4D9-45BF-A2F4-9F4744A685AF}" dt="2024-02-07T03:13:29.376" v="1238" actId="20577"/>
-        <pc:sldMkLst>
-          <pc:docMk/>
-          <pc:sldMk cId="3931571633" sldId="812"/>
-        </pc:sldMkLst>
-      </pc:sldChg>
-      <pc:sldChg chg="modSp mod">
-        <pc:chgData name="Matthieu De Mari" userId="dfb708c9-d8dc-439f-9a3b-c772bf4a311c" providerId="ADAL" clId="{C2A075CF-C4D9-45BF-A2F4-9F4744A685AF}" dt="2024-02-07T03:16:01.971" v="1394" actId="6549"/>
-        <pc:sldMkLst>
-          <pc:docMk/>
-          <pc:sldMk cId="2163984957" sldId="814"/>
-        </pc:sldMkLst>
-      </pc:sldChg>
-      <pc:sldChg chg="modSp mod">
-        <pc:chgData name="Matthieu De Mari" userId="dfb708c9-d8dc-439f-9a3b-c772bf4a311c" providerId="ADAL" clId="{C2A075CF-C4D9-45BF-A2F4-9F4744A685AF}" dt="2024-02-07T03:16:24.672" v="1398" actId="20577"/>
-        <pc:sldMkLst>
-          <pc:docMk/>
-          <pc:sldMk cId="507741553" sldId="815"/>
-        </pc:sldMkLst>
-      </pc:sldChg>
-      <pc:sldChg chg="modSp mod">
-        <pc:chgData name="Matthieu De Mari" userId="dfb708c9-d8dc-439f-9a3b-c772bf4a311c" providerId="ADAL" clId="{C2A075CF-C4D9-45BF-A2F4-9F4744A685AF}" dt="2024-02-08T05:35:09.874" v="1671" actId="20577"/>
-        <pc:sldMkLst>
-          <pc:docMk/>
-          <pc:sldMk cId="1946753280" sldId="816"/>
-        </pc:sldMkLst>
-      </pc:sldChg>
-      <pc:sldChg chg="modSp mod">
-        <pc:chgData name="Matthieu De Mari" userId="dfb708c9-d8dc-439f-9a3b-c772bf4a311c" providerId="ADAL" clId="{C2A075CF-C4D9-45BF-A2F4-9F4744A685AF}" dt="2024-02-08T05:35:20.113" v="1683" actId="20577"/>
-        <pc:sldMkLst>
-          <pc:docMk/>
-          <pc:sldMk cId="4233116706" sldId="817"/>
-        </pc:sldMkLst>
-      </pc:sldChg>
-      <pc:sldChg chg="modSp mod">
-        <pc:chgData name="Matthieu De Mari" userId="dfb708c9-d8dc-439f-9a3b-c772bf4a311c" providerId="ADAL" clId="{C2A075CF-C4D9-45BF-A2F4-9F4744A685AF}" dt="2024-02-08T05:35:41.604" v="1687" actId="20577"/>
-        <pc:sldMkLst>
-          <pc:docMk/>
-          <pc:sldMk cId="182983479" sldId="818"/>
-        </pc:sldMkLst>
-      </pc:sldChg>
-      <pc:sldChg chg="modSp del mod">
-        <pc:chgData name="Matthieu De Mari" userId="dfb708c9-d8dc-439f-9a3b-c772bf4a311c" providerId="ADAL" clId="{C2A075CF-C4D9-45BF-A2F4-9F4744A685AF}" dt="2024-02-07T03:17:53.286" v="1409" actId="47"/>
-        <pc:sldMkLst>
-          <pc:docMk/>
-          <pc:sldMk cId="336555302" sldId="819"/>
-        </pc:sldMkLst>
-      </pc:sldChg>
-      <pc:sldChg chg="modSp mod">
-        <pc:chgData name="Matthieu De Mari" userId="dfb708c9-d8dc-439f-9a3b-c772bf4a311c" providerId="ADAL" clId="{C2A075CF-C4D9-45BF-A2F4-9F4744A685AF}" dt="2024-02-08T05:36:40.966" v="1722" actId="27636"/>
-        <pc:sldMkLst>
-          <pc:docMk/>
-          <pc:sldMk cId="986128993" sldId="821"/>
-        </pc:sldMkLst>
-      </pc:sldChg>
-      <pc:sldChg chg="modSp mod">
-        <pc:chgData name="Matthieu De Mari" userId="dfb708c9-d8dc-439f-9a3b-c772bf4a311c" providerId="ADAL" clId="{C2A075CF-C4D9-45BF-A2F4-9F4744A685AF}" dt="2024-02-07T03:19:00.774" v="1530" actId="1035"/>
-        <pc:sldMkLst>
-          <pc:docMk/>
-          <pc:sldMk cId="4216078664" sldId="822"/>
-        </pc:sldMkLst>
-      </pc:sldChg>
-      <pc:sldChg chg="del">
-        <pc:chgData name="Matthieu De Mari" userId="dfb708c9-d8dc-439f-9a3b-c772bf4a311c" providerId="ADAL" clId="{C2A075CF-C4D9-45BF-A2F4-9F4744A685AF}" dt="2024-02-07T03:19:05.672" v="1531" actId="47"/>
-        <pc:sldMkLst>
-          <pc:docMk/>
-          <pc:sldMk cId="2532925431" sldId="823"/>
-        </pc:sldMkLst>
-      </pc:sldChg>
-      <pc:sldChg chg="del">
-        <pc:chgData name="Matthieu De Mari" userId="dfb708c9-d8dc-439f-9a3b-c772bf4a311c" providerId="ADAL" clId="{C2A075CF-C4D9-45BF-A2F4-9F4744A685AF}" dt="2024-02-07T03:19:06.544" v="1532" actId="47"/>
-        <pc:sldMkLst>
-          <pc:docMk/>
-          <pc:sldMk cId="1198396189" sldId="824"/>
-        </pc:sldMkLst>
-      </pc:sldChg>
-      <pc:sldChg chg="del">
-        <pc:chgData name="Matthieu De Mari" userId="dfb708c9-d8dc-439f-9a3b-c772bf4a311c" providerId="ADAL" clId="{C2A075CF-C4D9-45BF-A2F4-9F4744A685AF}" dt="2024-02-07T03:19:07.180" v="1533" actId="47"/>
-        <pc:sldMkLst>
-          <pc:docMk/>
-          <pc:sldMk cId="1581268848" sldId="825"/>
-        </pc:sldMkLst>
-      </pc:sldChg>
-      <pc:sldChg chg="modSp mod">
-        <pc:chgData name="Matthieu De Mari" userId="dfb708c9-d8dc-439f-9a3b-c772bf4a311c" providerId="ADAL" clId="{C2A075CF-C4D9-45BF-A2F4-9F4744A685AF}" dt="2024-02-07T03:19:11.498" v="1540" actId="20577"/>
-        <pc:sldMkLst>
-          <pc:docMk/>
-          <pc:sldMk cId="3100375267" sldId="826"/>
-        </pc:sldMkLst>
-      </pc:sldChg>
-      <pc:sldChg chg="modSp">
-        <pc:chgData name="Matthieu De Mari" userId="dfb708c9-d8dc-439f-9a3b-c772bf4a311c" providerId="ADAL" clId="{C2A075CF-C4D9-45BF-A2F4-9F4744A685AF}" dt="2024-02-06T09:24:52.898" v="452" actId="20577"/>
-        <pc:sldMkLst>
-          <pc:docMk/>
-          <pc:sldMk cId="386474252" sldId="827"/>
-        </pc:sldMkLst>
-      </pc:sldChg>
-      <pc:sldChg chg="modSp mod">
-        <pc:chgData name="Matthieu De Mari" userId="dfb708c9-d8dc-439f-9a3b-c772bf4a311c" providerId="ADAL" clId="{C2A075CF-C4D9-45BF-A2F4-9F4744A685AF}" dt="2024-02-07T03:15:13.666" v="1382" actId="20577"/>
-        <pc:sldMkLst>
-          <pc:docMk/>
-          <pc:sldMk cId="2986862345" sldId="828"/>
-        </pc:sldMkLst>
-      </pc:sldChg>
-      <pc:sldChg chg="modSp mod">
-        <pc:chgData name="Matthieu De Mari" userId="dfb708c9-d8dc-439f-9a3b-c772bf4a311c" providerId="ADAL" clId="{C2A075CF-C4D9-45BF-A2F4-9F4744A685AF}" dt="2024-01-21T10:24:10.365" v="218" actId="113"/>
-        <pc:sldMkLst>
-          <pc:docMk/>
-          <pc:sldMk cId="2441798468" sldId="829"/>
-        </pc:sldMkLst>
-      </pc:sldChg>
-      <pc:sldChg chg="modSp mod">
-        <pc:chgData name="Matthieu De Mari" userId="dfb708c9-d8dc-439f-9a3b-c772bf4a311c" providerId="ADAL" clId="{C2A075CF-C4D9-45BF-A2F4-9F4744A685AF}" dt="2024-02-07T03:17:35.597" v="1407" actId="20577"/>
-        <pc:sldMkLst>
-          <pc:docMk/>
-          <pc:sldMk cId="491711875" sldId="830"/>
-        </pc:sldMkLst>
-      </pc:sldChg>
-      <pc:sldChg chg="delSp modSp add mod modClrScheme chgLayout">
-        <pc:chgData name="Matthieu De Mari" userId="dfb708c9-d8dc-439f-9a3b-c772bf4a311c" providerId="ADAL" clId="{C2A075CF-C4D9-45BF-A2F4-9F4744A685AF}" dt="2024-01-21T10:19:34.397" v="105" actId="27636"/>
-        <pc:sldMkLst>
-          <pc:docMk/>
-          <pc:sldMk cId="124198755" sldId="831"/>
-        </pc:sldMkLst>
-      </pc:sldChg>
-      <pc:sldChg chg="delSp modSp add mod modClrScheme chgLayout">
-        <pc:chgData name="Matthieu De Mari" userId="dfb708c9-d8dc-439f-9a3b-c772bf4a311c" providerId="ADAL" clId="{C2A075CF-C4D9-45BF-A2F4-9F4744A685AF}" dt="2024-02-07T03:10:57.601" v="1125" actId="27636"/>
-        <pc:sldMkLst>
-          <pc:docMk/>
-          <pc:sldMk cId="1710209134" sldId="832"/>
-        </pc:sldMkLst>
-      </pc:sldChg>
-      <pc:sldChg chg="add">
-        <pc:chgData name="Matthieu De Mari" userId="dfb708c9-d8dc-439f-9a3b-c772bf4a311c" providerId="ADAL" clId="{C2A075CF-C4D9-45BF-A2F4-9F4744A685AF}" dt="2024-02-06T09:25:45.070" v="512"/>
-        <pc:sldMkLst>
-          <pc:docMk/>
-          <pc:sldMk cId="3288933084" sldId="833"/>
-        </pc:sldMkLst>
-      </pc:sldChg>
-      <pc:sldChg chg="modSp add mod">
-        <pc:chgData name="Matthieu De Mari" userId="dfb708c9-d8dc-439f-9a3b-c772bf4a311c" providerId="ADAL" clId="{C2A075CF-C4D9-45BF-A2F4-9F4744A685AF}" dt="2024-02-07T03:08:09.241" v="1066" actId="20577"/>
-        <pc:sldMkLst>
-          <pc:docMk/>
-          <pc:sldMk cId="1364016482" sldId="834"/>
-        </pc:sldMkLst>
-      </pc:sldChg>
-    </pc:docChg>
-  </pc:docChgLst>
-  <pc:docChgLst>
-    <pc:chgData name="Matthieu De Mari" userId="dfb708c9-d8dc-439f-9a3b-c772bf4a311c" providerId="ADAL" clId="{8EE40018-26BD-4A7B-8D17-70AC8417C2D0}"/>
-    <pc:docChg chg="undo custSel addSld delSld modSld addSection delSection modSection">
-      <pc:chgData name="Matthieu De Mari" userId="dfb708c9-d8dc-439f-9a3b-c772bf4a311c" providerId="ADAL" clId="{8EE40018-26BD-4A7B-8D17-70AC8417C2D0}" dt="2022-11-16T06:55:05.435" v="67" actId="47"/>
-      <pc:docMkLst>
-        <pc:docMk/>
-      </pc:docMkLst>
-      <pc:sldChg chg="modSp mod">
-        <pc:chgData name="Matthieu De Mari" userId="dfb708c9-d8dc-439f-9a3b-c772bf4a311c" providerId="ADAL" clId="{8EE40018-26BD-4A7B-8D17-70AC8417C2D0}" dt="2022-11-16T06:55:04.205" v="66" actId="20577"/>
-        <pc:sldMkLst>
-          <pc:docMk/>
-          <pc:sldMk cId="3442501962" sldId="257"/>
-        </pc:sldMkLst>
-      </pc:sldChg>
-      <pc:sldChg chg="del">
-        <pc:chgData name="Matthieu De Mari" userId="dfb708c9-d8dc-439f-9a3b-c772bf4a311c" providerId="ADAL" clId="{8EE40018-26BD-4A7B-8D17-70AC8417C2D0}" dt="2022-11-16T06:54:01.441" v="17" actId="47"/>
-        <pc:sldMkLst>
-          <pc:docMk/>
-          <pc:sldMk cId="3556835968" sldId="261"/>
-        </pc:sldMkLst>
-      </pc:sldChg>
-      <pc:sldChg chg="modSp mod">
-        <pc:chgData name="Matthieu De Mari" userId="dfb708c9-d8dc-439f-9a3b-c772bf4a311c" providerId="ADAL" clId="{8EE40018-26BD-4A7B-8D17-70AC8417C2D0}" dt="2022-11-16T06:54:47.612" v="47" actId="20577"/>
-        <pc:sldMkLst>
-          <pc:docMk/>
-          <pc:sldMk cId="1893873068" sldId="266"/>
-        </pc:sldMkLst>
-      </pc:sldChg>
-      <pc:sldChg chg="modSp mod">
-        <pc:chgData name="Matthieu De Mari" userId="dfb708c9-d8dc-439f-9a3b-c772bf4a311c" providerId="ADAL" clId="{8EE40018-26BD-4A7B-8D17-70AC8417C2D0}" dt="2022-11-16T06:54:56.797" v="60" actId="20577"/>
-        <pc:sldMkLst>
-          <pc:docMk/>
-          <pc:sldMk cId="3880949074" sldId="267"/>
-        </pc:sldMkLst>
-      </pc:sldChg>
-      <pc:sldChg chg="del">
-        <pc:chgData name="Matthieu De Mari" userId="dfb708c9-d8dc-439f-9a3b-c772bf4a311c" providerId="ADAL" clId="{8EE40018-26BD-4A7B-8D17-70AC8417C2D0}" dt="2022-11-16T06:54:02.421" v="18" actId="47"/>
-        <pc:sldMkLst>
-          <pc:docMk/>
-          <pc:sldMk cId="969289828" sldId="271"/>
-        </pc:sldMkLst>
-      </pc:sldChg>
-      <pc:sldChg chg="del">
-        <pc:chgData name="Matthieu De Mari" userId="dfb708c9-d8dc-439f-9a3b-c772bf4a311c" providerId="ADAL" clId="{8EE40018-26BD-4A7B-8D17-70AC8417C2D0}" dt="2022-11-16T06:54:02.421" v="18" actId="47"/>
-        <pc:sldMkLst>
-          <pc:docMk/>
-          <pc:sldMk cId="543657650" sldId="273"/>
-        </pc:sldMkLst>
-      </pc:sldChg>
-      <pc:sldChg chg="del">
-        <pc:chgData name="Matthieu De Mari" userId="dfb708c9-d8dc-439f-9a3b-c772bf4a311c" providerId="ADAL" clId="{8EE40018-26BD-4A7B-8D17-70AC8417C2D0}" dt="2022-11-16T06:54:01.441" v="17" actId="47"/>
-        <pc:sldMkLst>
-          <pc:docMk/>
-          <pc:sldMk cId="3687792543" sldId="275"/>
-        </pc:sldMkLst>
-      </pc:sldChg>
-      <pc:sldChg chg="del">
-        <pc:chgData name="Matthieu De Mari" userId="dfb708c9-d8dc-439f-9a3b-c772bf4a311c" providerId="ADAL" clId="{8EE40018-26BD-4A7B-8D17-70AC8417C2D0}" dt="2022-11-16T06:54:03.510" v="19" actId="47"/>
-        <pc:sldMkLst>
-          <pc:docMk/>
-          <pc:sldMk cId="1852878019" sldId="276"/>
-        </pc:sldMkLst>
-      </pc:sldChg>
-      <pc:sldChg chg="del">
-        <pc:chgData name="Matthieu De Mari" userId="dfb708c9-d8dc-439f-9a3b-c772bf4a311c" providerId="ADAL" clId="{8EE40018-26BD-4A7B-8D17-70AC8417C2D0}" dt="2022-11-16T06:54:02.421" v="18" actId="47"/>
-        <pc:sldMkLst>
-          <pc:docMk/>
-          <pc:sldMk cId="355509003" sldId="278"/>
-        </pc:sldMkLst>
-      </pc:sldChg>
-      <pc:sldChg chg="del">
-        <pc:chgData name="Matthieu De Mari" userId="dfb708c9-d8dc-439f-9a3b-c772bf4a311c" providerId="ADAL" clId="{8EE40018-26BD-4A7B-8D17-70AC8417C2D0}" dt="2022-11-16T06:54:02.421" v="18" actId="47"/>
-        <pc:sldMkLst>
-          <pc:docMk/>
-          <pc:sldMk cId="3873470932" sldId="280"/>
-        </pc:sldMkLst>
-      </pc:sldChg>
-      <pc:sldChg chg="del">
-        <pc:chgData name="Matthieu De Mari" userId="dfb708c9-d8dc-439f-9a3b-c772bf4a311c" providerId="ADAL" clId="{8EE40018-26BD-4A7B-8D17-70AC8417C2D0}" dt="2022-11-16T06:54:02.421" v="18" actId="47"/>
-        <pc:sldMkLst>
-          <pc:docMk/>
-          <pc:sldMk cId="3477464442" sldId="281"/>
-        </pc:sldMkLst>
-      </pc:sldChg>
-      <pc:sldChg chg="del">
-        <pc:chgData name="Matthieu De Mari" userId="dfb708c9-d8dc-439f-9a3b-c772bf4a311c" providerId="ADAL" clId="{8EE40018-26BD-4A7B-8D17-70AC8417C2D0}" dt="2022-11-16T06:54:02.421" v="18" actId="47"/>
-        <pc:sldMkLst>
-          <pc:docMk/>
-          <pc:sldMk cId="4219540979" sldId="282"/>
-        </pc:sldMkLst>
-      </pc:sldChg>
-      <pc:sldChg chg="modSp del mod">
-        <pc:chgData name="Matthieu De Mari" userId="dfb708c9-d8dc-439f-9a3b-c772bf4a311c" providerId="ADAL" clId="{8EE40018-26BD-4A7B-8D17-70AC8417C2D0}" dt="2022-11-16T06:55:05.435" v="67" actId="47"/>
-        <pc:sldMkLst>
-          <pc:docMk/>
-          <pc:sldMk cId="2071167148" sldId="284"/>
-        </pc:sldMkLst>
-      </pc:sldChg>
-      <pc:sldChg chg="del">
-        <pc:chgData name="Matthieu De Mari" userId="dfb708c9-d8dc-439f-9a3b-c772bf4a311c" providerId="ADAL" clId="{8EE40018-26BD-4A7B-8D17-70AC8417C2D0}" dt="2022-11-16T06:54:14.637" v="28" actId="47"/>
-        <pc:sldMkLst>
-          <pc:docMk/>
-          <pc:sldMk cId="3743280645" sldId="285"/>
-        </pc:sldMkLst>
-      </pc:sldChg>
-      <pc:sldChg chg="del">
-        <pc:chgData name="Matthieu De Mari" userId="dfb708c9-d8dc-439f-9a3b-c772bf4a311c" providerId="ADAL" clId="{8EE40018-26BD-4A7B-8D17-70AC8417C2D0}" dt="2022-11-16T06:54:02.421" v="18" actId="47"/>
-        <pc:sldMkLst>
-          <pc:docMk/>
-          <pc:sldMk cId="2640130553" sldId="286"/>
-        </pc:sldMkLst>
-      </pc:sldChg>
-      <pc:sldChg chg="del">
-        <pc:chgData name="Matthieu De Mari" userId="dfb708c9-d8dc-439f-9a3b-c772bf4a311c" providerId="ADAL" clId="{8EE40018-26BD-4A7B-8D17-70AC8417C2D0}" dt="2022-11-16T06:54:03.510" v="19" actId="47"/>
-        <pc:sldMkLst>
-          <pc:docMk/>
-          <pc:sldMk cId="3356285317" sldId="289"/>
-        </pc:sldMkLst>
-      </pc:sldChg>
-      <pc:sldChg chg="del">
-        <pc:chgData name="Matthieu De Mari" userId="dfb708c9-d8dc-439f-9a3b-c772bf4a311c" providerId="ADAL" clId="{8EE40018-26BD-4A7B-8D17-70AC8417C2D0}" dt="2022-11-16T06:54:03.510" v="19" actId="47"/>
-        <pc:sldMkLst>
-          <pc:docMk/>
-          <pc:sldMk cId="473860244" sldId="290"/>
-        </pc:sldMkLst>
-      </pc:sldChg>
-      <pc:sldChg chg="del">
-        <pc:chgData name="Matthieu De Mari" userId="dfb708c9-d8dc-439f-9a3b-c772bf4a311c" providerId="ADAL" clId="{8EE40018-26BD-4A7B-8D17-70AC8417C2D0}" dt="2022-11-16T06:54:03.510" v="19" actId="47"/>
-        <pc:sldMkLst>
-          <pc:docMk/>
-          <pc:sldMk cId="290213158" sldId="291"/>
-        </pc:sldMkLst>
-      </pc:sldChg>
-      <pc:sldChg chg="del">
-        <pc:chgData name="Matthieu De Mari" userId="dfb708c9-d8dc-439f-9a3b-c772bf4a311c" providerId="ADAL" clId="{8EE40018-26BD-4A7B-8D17-70AC8417C2D0}" dt="2022-11-16T06:54:03.510" v="19" actId="47"/>
-        <pc:sldMkLst>
-          <pc:docMk/>
-          <pc:sldMk cId="3717810270" sldId="292"/>
-        </pc:sldMkLst>
-      </pc:sldChg>
-      <pc:sldChg chg="del">
-        <pc:chgData name="Matthieu De Mari" userId="dfb708c9-d8dc-439f-9a3b-c772bf4a311c" providerId="ADAL" clId="{8EE40018-26BD-4A7B-8D17-70AC8417C2D0}" dt="2022-11-16T06:54:03.510" v="19" actId="47"/>
-        <pc:sldMkLst>
-          <pc:docMk/>
-          <pc:sldMk cId="2783948156" sldId="293"/>
-        </pc:sldMkLst>
-      </pc:sldChg>
-      <pc:sldChg chg="del">
-        <pc:chgData name="Matthieu De Mari" userId="dfb708c9-d8dc-439f-9a3b-c772bf4a311c" providerId="ADAL" clId="{8EE40018-26BD-4A7B-8D17-70AC8417C2D0}" dt="2022-11-16T06:54:04.458" v="20" actId="47"/>
-        <pc:sldMkLst>
-          <pc:docMk/>
-          <pc:sldMk cId="4179829315" sldId="294"/>
-        </pc:sldMkLst>
-      </pc:sldChg>
-      <pc:sldChg chg="del">
-        <pc:chgData name="Matthieu De Mari" userId="dfb708c9-d8dc-439f-9a3b-c772bf4a311c" providerId="ADAL" clId="{8EE40018-26BD-4A7B-8D17-70AC8417C2D0}" dt="2022-11-16T06:54:12.971" v="26" actId="47"/>
-        <pc:sldMkLst>
-          <pc:docMk/>
-          <pc:sldMk cId="709624762" sldId="295"/>
-        </pc:sldMkLst>
-      </pc:sldChg>
-      <pc:sldChg chg="del">
-        <pc:chgData name="Matthieu De Mari" userId="dfb708c9-d8dc-439f-9a3b-c772bf4a311c" providerId="ADAL" clId="{8EE40018-26BD-4A7B-8D17-70AC8417C2D0}" dt="2022-11-16T06:54:11.293" v="25" actId="47"/>
-        <pc:sldMkLst>
-          <pc:docMk/>
-          <pc:sldMk cId="2576857052" sldId="297"/>
-        </pc:sldMkLst>
-      </pc:sldChg>
-      <pc:sldChg chg="del">
-        <pc:chgData name="Matthieu De Mari" userId="dfb708c9-d8dc-439f-9a3b-c772bf4a311c" providerId="ADAL" clId="{8EE40018-26BD-4A7B-8D17-70AC8417C2D0}" dt="2022-11-16T06:54:04.458" v="20" actId="47"/>
-        <pc:sldMkLst>
-          <pc:docMk/>
-          <pc:sldMk cId="1885656403" sldId="298"/>
-        </pc:sldMkLst>
-      </pc:sldChg>
-      <pc:sldChg chg="del">
-        <pc:chgData name="Matthieu De Mari" userId="dfb708c9-d8dc-439f-9a3b-c772bf4a311c" providerId="ADAL" clId="{8EE40018-26BD-4A7B-8D17-70AC8417C2D0}" dt="2022-11-16T06:54:04.458" v="20" actId="47"/>
-        <pc:sldMkLst>
-          <pc:docMk/>
-          <pc:sldMk cId="3768793426" sldId="299"/>
-        </pc:sldMkLst>
-      </pc:sldChg>
-      <pc:sldChg chg="del">
-        <pc:chgData name="Matthieu De Mari" userId="dfb708c9-d8dc-439f-9a3b-c772bf4a311c" providerId="ADAL" clId="{8EE40018-26BD-4A7B-8D17-70AC8417C2D0}" dt="2022-11-16T06:54:07.519" v="22" actId="47"/>
-        <pc:sldMkLst>
-          <pc:docMk/>
-          <pc:sldMk cId="902380433" sldId="300"/>
-        </pc:sldMkLst>
-      </pc:sldChg>
-      <pc:sldChg chg="del">
-        <pc:chgData name="Matthieu De Mari" userId="dfb708c9-d8dc-439f-9a3b-c772bf4a311c" providerId="ADAL" clId="{8EE40018-26BD-4A7B-8D17-70AC8417C2D0}" dt="2022-11-16T06:54:08.404" v="23" actId="47"/>
-        <pc:sldMkLst>
-          <pc:docMk/>
-          <pc:sldMk cId="2202284175" sldId="301"/>
-        </pc:sldMkLst>
-      </pc:sldChg>
-      <pc:sldChg chg="del">
-        <pc:chgData name="Matthieu De Mari" userId="dfb708c9-d8dc-439f-9a3b-c772bf4a311c" providerId="ADAL" clId="{8EE40018-26BD-4A7B-8D17-70AC8417C2D0}" dt="2022-11-16T06:54:09.190" v="24" actId="47"/>
-        <pc:sldMkLst>
-          <pc:docMk/>
-          <pc:sldMk cId="1547433389" sldId="302"/>
-        </pc:sldMkLst>
-      </pc:sldChg>
-      <pc:sldChg chg="del">
-        <pc:chgData name="Matthieu De Mari" userId="dfb708c9-d8dc-439f-9a3b-c772bf4a311c" providerId="ADAL" clId="{8EE40018-26BD-4A7B-8D17-70AC8417C2D0}" dt="2022-11-16T06:54:04.458" v="20" actId="47"/>
-        <pc:sldMkLst>
-          <pc:docMk/>
-          <pc:sldMk cId="3335250243" sldId="303"/>
-        </pc:sldMkLst>
-      </pc:sldChg>
-      <pc:sldChg chg="del">
-        <pc:chgData name="Matthieu De Mari" userId="dfb708c9-d8dc-439f-9a3b-c772bf4a311c" providerId="ADAL" clId="{8EE40018-26BD-4A7B-8D17-70AC8417C2D0}" dt="2022-11-16T06:54:03.510" v="19" actId="47"/>
-        <pc:sldMkLst>
-          <pc:docMk/>
-          <pc:sldMk cId="349456406" sldId="305"/>
-        </pc:sldMkLst>
-      </pc:sldChg>
-      <pc:sldChg chg="del">
-        <pc:chgData name="Matthieu De Mari" userId="dfb708c9-d8dc-439f-9a3b-c772bf4a311c" providerId="ADAL" clId="{8EE40018-26BD-4A7B-8D17-70AC8417C2D0}" dt="2022-11-16T06:54:06.554" v="21" actId="47"/>
-        <pc:sldMkLst>
-          <pc:docMk/>
-          <pc:sldMk cId="1917974936" sldId="307"/>
-        </pc:sldMkLst>
-      </pc:sldChg>
-      <pc:sldChg chg="del">
-        <pc:chgData name="Matthieu De Mari" userId="dfb708c9-d8dc-439f-9a3b-c772bf4a311c" providerId="ADAL" clId="{8EE40018-26BD-4A7B-8D17-70AC8417C2D0}" dt="2022-11-16T06:54:06.554" v="21" actId="47"/>
-        <pc:sldMkLst>
-          <pc:docMk/>
-          <pc:sldMk cId="2278752964" sldId="309"/>
-        </pc:sldMkLst>
-      </pc:sldChg>
-      <pc:sldChg chg="del">
-        <pc:chgData name="Matthieu De Mari" userId="dfb708c9-d8dc-439f-9a3b-c772bf4a311c" providerId="ADAL" clId="{8EE40018-26BD-4A7B-8D17-70AC8417C2D0}" dt="2022-11-16T06:54:06.554" v="21" actId="47"/>
-        <pc:sldMkLst>
-          <pc:docMk/>
-          <pc:sldMk cId="3317882412" sldId="310"/>
-        </pc:sldMkLst>
-      </pc:sldChg>
-      <pc:sldChg chg="del">
-        <pc:chgData name="Matthieu De Mari" userId="dfb708c9-d8dc-439f-9a3b-c772bf4a311c" providerId="ADAL" clId="{8EE40018-26BD-4A7B-8D17-70AC8417C2D0}" dt="2022-11-16T06:54:06.554" v="21" actId="47"/>
-        <pc:sldMkLst>
-          <pc:docMk/>
-          <pc:sldMk cId="3051144984" sldId="311"/>
-        </pc:sldMkLst>
-      </pc:sldChg>
-      <pc:sldChg chg="del">
-        <pc:chgData name="Matthieu De Mari" userId="dfb708c9-d8dc-439f-9a3b-c772bf4a311c" providerId="ADAL" clId="{8EE40018-26BD-4A7B-8D17-70AC8417C2D0}" dt="2022-11-16T06:54:06.554" v="21" actId="47"/>
-        <pc:sldMkLst>
-          <pc:docMk/>
-          <pc:sldMk cId="666448182" sldId="313"/>
-        </pc:sldMkLst>
-      </pc:sldChg>
-      <pc:sldChg chg="del">
-        <pc:chgData name="Matthieu De Mari" userId="dfb708c9-d8dc-439f-9a3b-c772bf4a311c" providerId="ADAL" clId="{8EE40018-26BD-4A7B-8D17-70AC8417C2D0}" dt="2022-11-16T06:54:06.554" v="21" actId="47"/>
-        <pc:sldMkLst>
-          <pc:docMk/>
-          <pc:sldMk cId="1701431758" sldId="314"/>
-        </pc:sldMkLst>
-      </pc:sldChg>
-      <pc:sldChg chg="del">
-        <pc:chgData name="Matthieu De Mari" userId="dfb708c9-d8dc-439f-9a3b-c772bf4a311c" providerId="ADAL" clId="{8EE40018-26BD-4A7B-8D17-70AC8417C2D0}" dt="2022-11-16T06:54:06.554" v="21" actId="47"/>
-        <pc:sldMkLst>
-          <pc:docMk/>
-          <pc:sldMk cId="1813469429" sldId="315"/>
-        </pc:sldMkLst>
-      </pc:sldChg>
-      <pc:sldChg chg="del">
-        <pc:chgData name="Matthieu De Mari" userId="dfb708c9-d8dc-439f-9a3b-c772bf4a311c" providerId="ADAL" clId="{8EE40018-26BD-4A7B-8D17-70AC8417C2D0}" dt="2022-11-16T06:54:07.519" v="22" actId="47"/>
-        <pc:sldMkLst>
-          <pc:docMk/>
-          <pc:sldMk cId="3619476332" sldId="316"/>
-        </pc:sldMkLst>
-      </pc:sldChg>
-      <pc:sldChg chg="del">
-        <pc:chgData name="Matthieu De Mari" userId="dfb708c9-d8dc-439f-9a3b-c772bf4a311c" providerId="ADAL" clId="{8EE40018-26BD-4A7B-8D17-70AC8417C2D0}" dt="2022-11-16T06:54:07.519" v="22" actId="47"/>
-        <pc:sldMkLst>
-          <pc:docMk/>
-          <pc:sldMk cId="3133188960" sldId="317"/>
-        </pc:sldMkLst>
-      </pc:sldChg>
-      <pc:sldChg chg="del">
-        <pc:chgData name="Matthieu De Mari" userId="dfb708c9-d8dc-439f-9a3b-c772bf4a311c" providerId="ADAL" clId="{8EE40018-26BD-4A7B-8D17-70AC8417C2D0}" dt="2022-11-16T06:54:07.519" v="22" actId="47"/>
-        <pc:sldMkLst>
-          <pc:docMk/>
-          <pc:sldMk cId="913491245" sldId="318"/>
-        </pc:sldMkLst>
-      </pc:sldChg>
-      <pc:sldChg chg="del">
-        <pc:chgData name="Matthieu De Mari" userId="dfb708c9-d8dc-439f-9a3b-c772bf4a311c" providerId="ADAL" clId="{8EE40018-26BD-4A7B-8D17-70AC8417C2D0}" dt="2022-11-16T06:54:07.519" v="22" actId="47"/>
-        <pc:sldMkLst>
-          <pc:docMk/>
-          <pc:sldMk cId="369927457" sldId="319"/>
-        </pc:sldMkLst>
-      </pc:sldChg>
-      <pc:sldChg chg="del">
-        <pc:chgData name="Matthieu De Mari" userId="dfb708c9-d8dc-439f-9a3b-c772bf4a311c" providerId="ADAL" clId="{8EE40018-26BD-4A7B-8D17-70AC8417C2D0}" dt="2022-11-16T06:54:07.519" v="22" actId="47"/>
-        <pc:sldMkLst>
-          <pc:docMk/>
-          <pc:sldMk cId="868347224" sldId="320"/>
-        </pc:sldMkLst>
-      </pc:sldChg>
-      <pc:sldChg chg="del">
-        <pc:chgData name="Matthieu De Mari" userId="dfb708c9-d8dc-439f-9a3b-c772bf4a311c" providerId="ADAL" clId="{8EE40018-26BD-4A7B-8D17-70AC8417C2D0}" dt="2022-11-16T06:54:07.519" v="22" actId="47"/>
-        <pc:sldMkLst>
-          <pc:docMk/>
-          <pc:sldMk cId="2901421326" sldId="321"/>
-        </pc:sldMkLst>
-      </pc:sldChg>
-      <pc:sldChg chg="del">
-        <pc:chgData name="Matthieu De Mari" userId="dfb708c9-d8dc-439f-9a3b-c772bf4a311c" providerId="ADAL" clId="{8EE40018-26BD-4A7B-8D17-70AC8417C2D0}" dt="2022-11-16T06:54:07.519" v="22" actId="47"/>
-        <pc:sldMkLst>
-          <pc:docMk/>
-          <pc:sldMk cId="386318379" sldId="322"/>
-        </pc:sldMkLst>
-      </pc:sldChg>
-      <pc:sldChg chg="del">
-        <pc:chgData name="Matthieu De Mari" userId="dfb708c9-d8dc-439f-9a3b-c772bf4a311c" providerId="ADAL" clId="{8EE40018-26BD-4A7B-8D17-70AC8417C2D0}" dt="2022-11-16T06:54:07.519" v="22" actId="47"/>
-        <pc:sldMkLst>
-          <pc:docMk/>
-          <pc:sldMk cId="535785749" sldId="323"/>
-        </pc:sldMkLst>
-      </pc:sldChg>
-      <pc:sldChg chg="del">
-        <pc:chgData name="Matthieu De Mari" userId="dfb708c9-d8dc-439f-9a3b-c772bf4a311c" providerId="ADAL" clId="{8EE40018-26BD-4A7B-8D17-70AC8417C2D0}" dt="2022-11-16T06:54:07.519" v="22" actId="47"/>
-        <pc:sldMkLst>
-          <pc:docMk/>
-          <pc:sldMk cId="573807039" sldId="324"/>
-        </pc:sldMkLst>
-      </pc:sldChg>
-      <pc:sldChg chg="del">
-        <pc:chgData name="Matthieu De Mari" userId="dfb708c9-d8dc-439f-9a3b-c772bf4a311c" providerId="ADAL" clId="{8EE40018-26BD-4A7B-8D17-70AC8417C2D0}" dt="2022-11-16T06:54:07.519" v="22" actId="47"/>
-        <pc:sldMkLst>
-          <pc:docMk/>
-          <pc:sldMk cId="3026304390" sldId="325"/>
-        </pc:sldMkLst>
-      </pc:sldChg>
-      <pc:sldChg chg="del">
-        <pc:chgData name="Matthieu De Mari" userId="dfb708c9-d8dc-439f-9a3b-c772bf4a311c" providerId="ADAL" clId="{8EE40018-26BD-4A7B-8D17-70AC8417C2D0}" dt="2022-11-16T06:54:07.519" v="22" actId="47"/>
-        <pc:sldMkLst>
-          <pc:docMk/>
-          <pc:sldMk cId="4144845603" sldId="326"/>
-        </pc:sldMkLst>
-      </pc:sldChg>
-      <pc:sldChg chg="del">
-        <pc:chgData name="Matthieu De Mari" userId="dfb708c9-d8dc-439f-9a3b-c772bf4a311c" providerId="ADAL" clId="{8EE40018-26BD-4A7B-8D17-70AC8417C2D0}" dt="2022-11-16T06:54:07.519" v="22" actId="47"/>
-        <pc:sldMkLst>
-          <pc:docMk/>
-          <pc:sldMk cId="2128704617" sldId="328"/>
-        </pc:sldMkLst>
-      </pc:sldChg>
-      <pc:sldChg chg="del">
-        <pc:chgData name="Matthieu De Mari" userId="dfb708c9-d8dc-439f-9a3b-c772bf4a311c" providerId="ADAL" clId="{8EE40018-26BD-4A7B-8D17-70AC8417C2D0}" dt="2022-11-16T06:54:07.519" v="22" actId="47"/>
-        <pc:sldMkLst>
-          <pc:docMk/>
-          <pc:sldMk cId="1228181526" sldId="329"/>
-        </pc:sldMkLst>
-      </pc:sldChg>
-      <pc:sldChg chg="del">
-        <pc:chgData name="Matthieu De Mari" userId="dfb708c9-d8dc-439f-9a3b-c772bf4a311c" providerId="ADAL" clId="{8EE40018-26BD-4A7B-8D17-70AC8417C2D0}" dt="2022-11-16T06:54:07.519" v="22" actId="47"/>
-        <pc:sldMkLst>
-          <pc:docMk/>
-          <pc:sldMk cId="1086607777" sldId="331"/>
-        </pc:sldMkLst>
-      </pc:sldChg>
-      <pc:sldChg chg="del">
-        <pc:chgData name="Matthieu De Mari" userId="dfb708c9-d8dc-439f-9a3b-c772bf4a311c" providerId="ADAL" clId="{8EE40018-26BD-4A7B-8D17-70AC8417C2D0}" dt="2022-11-16T06:54:08.404" v="23" actId="47"/>
-        <pc:sldMkLst>
-          <pc:docMk/>
-          <pc:sldMk cId="3744088925" sldId="332"/>
-        </pc:sldMkLst>
-      </pc:sldChg>
-      <pc:sldChg chg="del">
-        <pc:chgData name="Matthieu De Mari" userId="dfb708c9-d8dc-439f-9a3b-c772bf4a311c" providerId="ADAL" clId="{8EE40018-26BD-4A7B-8D17-70AC8417C2D0}" dt="2022-11-16T06:54:08.404" v="23" actId="47"/>
-        <pc:sldMkLst>
-          <pc:docMk/>
-          <pc:sldMk cId="1824898086" sldId="334"/>
-        </pc:sldMkLst>
-      </pc:sldChg>
-      <pc:sldChg chg="del">
-        <pc:chgData name="Matthieu De Mari" userId="dfb708c9-d8dc-439f-9a3b-c772bf4a311c" providerId="ADAL" clId="{8EE40018-26BD-4A7B-8D17-70AC8417C2D0}" dt="2022-11-16T06:54:13.895" v="27" actId="47"/>
-        <pc:sldMkLst>
-          <pc:docMk/>
-          <pc:sldMk cId="3704706604" sldId="335"/>
-        </pc:sldMkLst>
-      </pc:sldChg>
-      <pc:sldChg chg="del">
-        <pc:chgData name="Matthieu De Mari" userId="dfb708c9-d8dc-439f-9a3b-c772bf4a311c" providerId="ADAL" clId="{8EE40018-26BD-4A7B-8D17-70AC8417C2D0}" dt="2022-11-16T06:54:11.293" v="25" actId="47"/>
-        <pc:sldMkLst>
-          <pc:docMk/>
-          <pc:sldMk cId="503014896" sldId="336"/>
-        </pc:sldMkLst>
-      </pc:sldChg>
-      <pc:sldChg chg="del">
-        <pc:chgData name="Matthieu De Mari" userId="dfb708c9-d8dc-439f-9a3b-c772bf4a311c" providerId="ADAL" clId="{8EE40018-26BD-4A7B-8D17-70AC8417C2D0}" dt="2022-11-16T06:54:11.293" v="25" actId="47"/>
-        <pc:sldMkLst>
-          <pc:docMk/>
-          <pc:sldMk cId="1757180629" sldId="338"/>
-        </pc:sldMkLst>
-      </pc:sldChg>
-      <pc:sldChg chg="del">
-        <pc:chgData name="Matthieu De Mari" userId="dfb708c9-d8dc-439f-9a3b-c772bf4a311c" providerId="ADAL" clId="{8EE40018-26BD-4A7B-8D17-70AC8417C2D0}" dt="2022-11-16T06:54:11.293" v="25" actId="47"/>
-        <pc:sldMkLst>
-          <pc:docMk/>
-          <pc:sldMk cId="3251712844" sldId="339"/>
-        </pc:sldMkLst>
-      </pc:sldChg>
-      <pc:sldChg chg="del">
-        <pc:chgData name="Matthieu De Mari" userId="dfb708c9-d8dc-439f-9a3b-c772bf4a311c" providerId="ADAL" clId="{8EE40018-26BD-4A7B-8D17-70AC8417C2D0}" dt="2022-11-16T06:54:11.293" v="25" actId="47"/>
-        <pc:sldMkLst>
-          <pc:docMk/>
-          <pc:sldMk cId="3000047863" sldId="341"/>
-        </pc:sldMkLst>
-      </pc:sldChg>
-      <pc:sldChg chg="del">
-        <pc:chgData name="Matthieu De Mari" userId="dfb708c9-d8dc-439f-9a3b-c772bf4a311c" providerId="ADAL" clId="{8EE40018-26BD-4A7B-8D17-70AC8417C2D0}" dt="2022-11-16T06:54:11.293" v="25" actId="47"/>
-        <pc:sldMkLst>
-          <pc:docMk/>
-          <pc:sldMk cId="3607475250" sldId="342"/>
-        </pc:sldMkLst>
-      </pc:sldChg>
-      <pc:sldChg chg="del">
-        <pc:chgData name="Matthieu De Mari" userId="dfb708c9-d8dc-439f-9a3b-c772bf4a311c" providerId="ADAL" clId="{8EE40018-26BD-4A7B-8D17-70AC8417C2D0}" dt="2022-11-16T06:54:11.293" v="25" actId="47"/>
-        <pc:sldMkLst>
-          <pc:docMk/>
-          <pc:sldMk cId="2202386436" sldId="343"/>
-        </pc:sldMkLst>
-      </pc:sldChg>
-      <pc:sldChg chg="del">
-        <pc:chgData name="Matthieu De Mari" userId="dfb708c9-d8dc-439f-9a3b-c772bf4a311c" providerId="ADAL" clId="{8EE40018-26BD-4A7B-8D17-70AC8417C2D0}" dt="2022-11-16T06:54:14.637" v="28" actId="47"/>
-        <pc:sldMkLst>
-          <pc:docMk/>
-          <pc:sldMk cId="4222503966" sldId="345"/>
-        </pc:sldMkLst>
-      </pc:sldChg>
-      <pc:sldChg chg="modSp add del mod">
-        <pc:chgData name="Matthieu De Mari" userId="dfb708c9-d8dc-439f-9a3b-c772bf4a311c" providerId="ADAL" clId="{8EE40018-26BD-4A7B-8D17-70AC8417C2D0}" dt="2022-11-16T06:54:26.067" v="39" actId="20577"/>
-        <pc:sldMkLst>
-          <pc:docMk/>
-          <pc:sldMk cId="1036081419" sldId="346"/>
-        </pc:sldMkLst>
-      </pc:sldChg>
-      <pc:sldChg chg="del">
-        <pc:chgData name="Matthieu De Mari" userId="dfb708c9-d8dc-439f-9a3b-c772bf4a311c" providerId="ADAL" clId="{8EE40018-26BD-4A7B-8D17-70AC8417C2D0}" dt="2022-11-16T06:54:11.293" v="25" actId="47"/>
-        <pc:sldMkLst>
-          <pc:docMk/>
-          <pc:sldMk cId="2902606749" sldId="350"/>
-        </pc:sldMkLst>
-      </pc:sldChg>
-      <pc:sldChg chg="del">
-        <pc:chgData name="Matthieu De Mari" userId="dfb708c9-d8dc-439f-9a3b-c772bf4a311c" providerId="ADAL" clId="{8EE40018-26BD-4A7B-8D17-70AC8417C2D0}" dt="2022-11-16T06:54:11.293" v="25" actId="47"/>
-        <pc:sldMkLst>
-          <pc:docMk/>
-          <pc:sldMk cId="1008855396" sldId="352"/>
-        </pc:sldMkLst>
-      </pc:sldChg>
-      <pc:sldChg chg="del">
-        <pc:chgData name="Matthieu De Mari" userId="dfb708c9-d8dc-439f-9a3b-c772bf4a311c" providerId="ADAL" clId="{8EE40018-26BD-4A7B-8D17-70AC8417C2D0}" dt="2022-11-16T06:54:11.293" v="25" actId="47"/>
-        <pc:sldMkLst>
-          <pc:docMk/>
-          <pc:sldMk cId="1005123530" sldId="353"/>
-        </pc:sldMkLst>
-      </pc:sldChg>
-      <pc:sldChg chg="del">
-        <pc:chgData name="Matthieu De Mari" userId="dfb708c9-d8dc-439f-9a3b-c772bf4a311c" providerId="ADAL" clId="{8EE40018-26BD-4A7B-8D17-70AC8417C2D0}" dt="2022-11-16T06:54:11.293" v="25" actId="47"/>
-        <pc:sldMkLst>
-          <pc:docMk/>
-          <pc:sldMk cId="304430080" sldId="354"/>
-        </pc:sldMkLst>
-      </pc:sldChg>
-      <pc:sldChg chg="del">
-        <pc:chgData name="Matthieu De Mari" userId="dfb708c9-d8dc-439f-9a3b-c772bf4a311c" providerId="ADAL" clId="{8EE40018-26BD-4A7B-8D17-70AC8417C2D0}" dt="2022-11-16T06:54:11.293" v="25" actId="47"/>
-        <pc:sldMkLst>
-          <pc:docMk/>
-          <pc:sldMk cId="2530765258" sldId="355"/>
-        </pc:sldMkLst>
-      </pc:sldChg>
-      <pc:sldChg chg="del">
-        <pc:chgData name="Matthieu De Mari" userId="dfb708c9-d8dc-439f-9a3b-c772bf4a311c" providerId="ADAL" clId="{8EE40018-26BD-4A7B-8D17-70AC8417C2D0}" dt="2022-11-16T06:54:11.293" v="25" actId="47"/>
-        <pc:sldMkLst>
-          <pc:docMk/>
-          <pc:sldMk cId="2900566505" sldId="356"/>
-        </pc:sldMkLst>
-      </pc:sldChg>
-      <pc:sldChg chg="del">
-        <pc:chgData name="Matthieu De Mari" userId="dfb708c9-d8dc-439f-9a3b-c772bf4a311c" providerId="ADAL" clId="{8EE40018-26BD-4A7B-8D17-70AC8417C2D0}" dt="2022-11-16T06:54:11.293" v="25" actId="47"/>
-        <pc:sldMkLst>
-          <pc:docMk/>
-          <pc:sldMk cId="151041797" sldId="357"/>
-        </pc:sldMkLst>
-      </pc:sldChg>
-      <pc:sldChg chg="del">
-        <pc:chgData name="Matthieu De Mari" userId="dfb708c9-d8dc-439f-9a3b-c772bf4a311c" providerId="ADAL" clId="{8EE40018-26BD-4A7B-8D17-70AC8417C2D0}" dt="2022-11-16T06:54:11.293" v="25" actId="47"/>
-        <pc:sldMkLst>
-          <pc:docMk/>
-          <pc:sldMk cId="2341017383" sldId="358"/>
-        </pc:sldMkLst>
-      </pc:sldChg>
-      <pc:sldChg chg="del">
-        <pc:chgData name="Matthieu De Mari" userId="dfb708c9-d8dc-439f-9a3b-c772bf4a311c" providerId="ADAL" clId="{8EE40018-26BD-4A7B-8D17-70AC8417C2D0}" dt="2022-11-16T06:54:12.971" v="26" actId="47"/>
-        <pc:sldMkLst>
-          <pc:docMk/>
-          <pc:sldMk cId="843036564" sldId="360"/>
-        </pc:sldMkLst>
-      </pc:sldChg>
-      <pc:sldChg chg="del">
-        <pc:chgData name="Matthieu De Mari" userId="dfb708c9-d8dc-439f-9a3b-c772bf4a311c" providerId="ADAL" clId="{8EE40018-26BD-4A7B-8D17-70AC8417C2D0}" dt="2022-11-16T06:54:12.971" v="26" actId="47"/>
-        <pc:sldMkLst>
-          <pc:docMk/>
-          <pc:sldMk cId="1543635220" sldId="363"/>
-        </pc:sldMkLst>
-      </pc:sldChg>
-      <pc:sldChg chg="del">
-        <pc:chgData name="Matthieu De Mari" userId="dfb708c9-d8dc-439f-9a3b-c772bf4a311c" providerId="ADAL" clId="{8EE40018-26BD-4A7B-8D17-70AC8417C2D0}" dt="2022-11-16T06:54:12.971" v="26" actId="47"/>
-        <pc:sldMkLst>
-          <pc:docMk/>
-          <pc:sldMk cId="467323081" sldId="364"/>
-        </pc:sldMkLst>
-      </pc:sldChg>
-      <pc:sldChg chg="del">
-        <pc:chgData name="Matthieu De Mari" userId="dfb708c9-d8dc-439f-9a3b-c772bf4a311c" providerId="ADAL" clId="{8EE40018-26BD-4A7B-8D17-70AC8417C2D0}" dt="2022-11-16T06:54:12.971" v="26" actId="47"/>
-        <pc:sldMkLst>
-          <pc:docMk/>
-          <pc:sldMk cId="2557491043" sldId="365"/>
-        </pc:sldMkLst>
-      </pc:sldChg>
-      <pc:sldChg chg="del">
-        <pc:chgData name="Matthieu De Mari" userId="dfb708c9-d8dc-439f-9a3b-c772bf4a311c" providerId="ADAL" clId="{8EE40018-26BD-4A7B-8D17-70AC8417C2D0}" dt="2022-11-16T06:54:12.971" v="26" actId="47"/>
-        <pc:sldMkLst>
-          <pc:docMk/>
-          <pc:sldMk cId="30137941" sldId="366"/>
-        </pc:sldMkLst>
-      </pc:sldChg>
-      <pc:sldChg chg="del">
-        <pc:chgData name="Matthieu De Mari" userId="dfb708c9-d8dc-439f-9a3b-c772bf4a311c" providerId="ADAL" clId="{8EE40018-26BD-4A7B-8D17-70AC8417C2D0}" dt="2022-11-16T06:54:12.971" v="26" actId="47"/>
-        <pc:sldMkLst>
-          <pc:docMk/>
-          <pc:sldMk cId="2759705435" sldId="367"/>
-        </pc:sldMkLst>
-      </pc:sldChg>
-      <pc:sldChg chg="del">
-        <pc:chgData name="Matthieu De Mari" userId="dfb708c9-d8dc-439f-9a3b-c772bf4a311c" providerId="ADAL" clId="{8EE40018-26BD-4A7B-8D17-70AC8417C2D0}" dt="2022-11-16T06:54:12.971" v="26" actId="47"/>
-        <pc:sldMkLst>
-          <pc:docMk/>
-          <pc:sldMk cId="3578341878" sldId="368"/>
-        </pc:sldMkLst>
-      </pc:sldChg>
-      <pc:sldChg chg="del">
-        <pc:chgData name="Matthieu De Mari" userId="dfb708c9-d8dc-439f-9a3b-c772bf4a311c" providerId="ADAL" clId="{8EE40018-26BD-4A7B-8D17-70AC8417C2D0}" dt="2022-11-16T06:54:12.971" v="26" actId="47"/>
-        <pc:sldMkLst>
-          <pc:docMk/>
-          <pc:sldMk cId="2979488587" sldId="369"/>
-        </pc:sldMkLst>
-      </pc:sldChg>
-      <pc:sldChg chg="del">
-        <pc:chgData name="Matthieu De Mari" userId="dfb708c9-d8dc-439f-9a3b-c772bf4a311c" providerId="ADAL" clId="{8EE40018-26BD-4A7B-8D17-70AC8417C2D0}" dt="2022-11-16T06:54:12.971" v="26" actId="47"/>
-        <pc:sldMkLst>
-          <pc:docMk/>
-          <pc:sldMk cId="954723006" sldId="371"/>
-        </pc:sldMkLst>
-      </pc:sldChg>
-      <pc:sldChg chg="del">
-        <pc:chgData name="Matthieu De Mari" userId="dfb708c9-d8dc-439f-9a3b-c772bf4a311c" providerId="ADAL" clId="{8EE40018-26BD-4A7B-8D17-70AC8417C2D0}" dt="2022-11-16T06:54:12.971" v="26" actId="47"/>
-        <pc:sldMkLst>
-          <pc:docMk/>
-          <pc:sldMk cId="1007393074" sldId="372"/>
-        </pc:sldMkLst>
-      </pc:sldChg>
-      <pc:sldChg chg="del">
-        <pc:chgData name="Matthieu De Mari" userId="dfb708c9-d8dc-439f-9a3b-c772bf4a311c" providerId="ADAL" clId="{8EE40018-26BD-4A7B-8D17-70AC8417C2D0}" dt="2022-11-16T06:54:12.971" v="26" actId="47"/>
-        <pc:sldMkLst>
-          <pc:docMk/>
-          <pc:sldMk cId="4039951211" sldId="373"/>
-        </pc:sldMkLst>
-      </pc:sldChg>
-      <pc:sldChg chg="del">
-        <pc:chgData name="Matthieu De Mari" userId="dfb708c9-d8dc-439f-9a3b-c772bf4a311c" providerId="ADAL" clId="{8EE40018-26BD-4A7B-8D17-70AC8417C2D0}" dt="2022-11-16T06:54:12.971" v="26" actId="47"/>
-        <pc:sldMkLst>
-          <pc:docMk/>
-          <pc:sldMk cId="3074715825" sldId="374"/>
-        </pc:sldMkLst>
-      </pc:sldChg>
-      <pc:sldChg chg="del">
-        <pc:chgData name="Matthieu De Mari" userId="dfb708c9-d8dc-439f-9a3b-c772bf4a311c" providerId="ADAL" clId="{8EE40018-26BD-4A7B-8D17-70AC8417C2D0}" dt="2022-11-16T06:54:13.895" v="27" actId="47"/>
-        <pc:sldMkLst>
-          <pc:docMk/>
-          <pc:sldMk cId="1113800729" sldId="376"/>
-        </pc:sldMkLst>
-      </pc:sldChg>
-      <pc:sldChg chg="modSp mod">
-        <pc:chgData name="Matthieu De Mari" userId="dfb708c9-d8dc-439f-9a3b-c772bf4a311c" providerId="ADAL" clId="{8EE40018-26BD-4A7B-8D17-70AC8417C2D0}" dt="2022-11-16T06:53:49.572" v="12" actId="20577"/>
-        <pc:sldMkLst>
-          <pc:docMk/>
-          <pc:sldMk cId="1040156172" sldId="377"/>
-        </pc:sldMkLst>
-      </pc:sldChg>
-      <pc:sldChg chg="del">
-        <pc:chgData name="Matthieu De Mari" userId="dfb708c9-d8dc-439f-9a3b-c772bf4a311c" providerId="ADAL" clId="{8EE40018-26BD-4A7B-8D17-70AC8417C2D0}" dt="2022-11-16T06:54:08.404" v="23" actId="47"/>
-        <pc:sldMkLst>
-          <pc:docMk/>
-          <pc:sldMk cId="2236780210" sldId="378"/>
-        </pc:sldMkLst>
-      </pc:sldChg>
-      <pc:sldChg chg="del">
-        <pc:chgData name="Matthieu De Mari" userId="dfb708c9-d8dc-439f-9a3b-c772bf4a311c" providerId="ADAL" clId="{8EE40018-26BD-4A7B-8D17-70AC8417C2D0}" dt="2022-11-16T06:54:09.190" v="24" actId="47"/>
-        <pc:sldMkLst>
-          <pc:docMk/>
-          <pc:sldMk cId="3686470996" sldId="379"/>
-        </pc:sldMkLst>
-      </pc:sldChg>
-      <pc:sldChg chg="del">
-        <pc:chgData name="Matthieu De Mari" userId="dfb708c9-d8dc-439f-9a3b-c772bf4a311c" providerId="ADAL" clId="{8EE40018-26BD-4A7B-8D17-70AC8417C2D0}" dt="2022-11-16T06:54:13.895" v="27" actId="47"/>
-        <pc:sldMkLst>
-          <pc:docMk/>
-          <pc:sldMk cId="2665897880" sldId="380"/>
-        </pc:sldMkLst>
-      </pc:sldChg>
-      <pc:sldChg chg="del">
-        <pc:chgData name="Matthieu De Mari" userId="dfb708c9-d8dc-439f-9a3b-c772bf4a311c" providerId="ADAL" clId="{8EE40018-26BD-4A7B-8D17-70AC8417C2D0}" dt="2022-11-16T06:54:42.327" v="41" actId="47"/>
-        <pc:sldMkLst>
-          <pc:docMk/>
-          <pc:sldMk cId="1174542860" sldId="381"/>
-        </pc:sldMkLst>
-      </pc:sldChg>
-      <pc:sldChg chg="del">
-        <pc:chgData name="Matthieu De Mari" userId="dfb708c9-d8dc-439f-9a3b-c772bf4a311c" providerId="ADAL" clId="{8EE40018-26BD-4A7B-8D17-70AC8417C2D0}" dt="2022-11-16T06:54:07.519" v="22" actId="47"/>
-        <pc:sldMkLst>
-          <pc:docMk/>
-          <pc:sldMk cId="370210852" sldId="382"/>
-        </pc:sldMkLst>
-      </pc:sldChg>
-      <pc:sldChg chg="del">
-        <pc:chgData name="Matthieu De Mari" userId="dfb708c9-d8dc-439f-9a3b-c772bf4a311c" providerId="ADAL" clId="{8EE40018-26BD-4A7B-8D17-70AC8417C2D0}" dt="2022-11-16T06:54:06.554" v="21" actId="47"/>
-        <pc:sldMkLst>
-          <pc:docMk/>
-          <pc:sldMk cId="3654187078" sldId="383"/>
-        </pc:sldMkLst>
-      </pc:sldChg>
-      <pc:sldChg chg="del">
-        <pc:chgData name="Matthieu De Mari" userId="dfb708c9-d8dc-439f-9a3b-c772bf4a311c" providerId="ADAL" clId="{8EE40018-26BD-4A7B-8D17-70AC8417C2D0}" dt="2022-11-16T06:54:11.293" v="25" actId="47"/>
-        <pc:sldMkLst>
-          <pc:docMk/>
-          <pc:sldMk cId="1145882535" sldId="384"/>
-        </pc:sldMkLst>
-      </pc:sldChg>
-      <pc:sldChg chg="del">
-        <pc:chgData name="Matthieu De Mari" userId="dfb708c9-d8dc-439f-9a3b-c772bf4a311c" providerId="ADAL" clId="{8EE40018-26BD-4A7B-8D17-70AC8417C2D0}" dt="2022-11-16T06:54:12.971" v="26" actId="47"/>
-        <pc:sldMkLst>
-          <pc:docMk/>
-          <pc:sldMk cId="2609241577" sldId="385"/>
-        </pc:sldMkLst>
-      </pc:sldChg>
-      <pc:sldChg chg="del">
-        <pc:chgData name="Matthieu De Mari" userId="dfb708c9-d8dc-439f-9a3b-c772bf4a311c" providerId="ADAL" clId="{8EE40018-26BD-4A7B-8D17-70AC8417C2D0}" dt="2022-11-16T06:54:13.895" v="27" actId="47"/>
-        <pc:sldMkLst>
-          <pc:docMk/>
-          <pc:sldMk cId="2448415676" sldId="387"/>
-        </pc:sldMkLst>
-      </pc:sldChg>
-      <pc:sldChg chg="del">
-        <pc:chgData name="Matthieu De Mari" userId="dfb708c9-d8dc-439f-9a3b-c772bf4a311c" providerId="ADAL" clId="{8EE40018-26BD-4A7B-8D17-70AC8417C2D0}" dt="2022-11-16T06:54:13.895" v="27" actId="47"/>
-        <pc:sldMkLst>
-          <pc:docMk/>
-          <pc:sldMk cId="993695443" sldId="388"/>
-        </pc:sldMkLst>
-      </pc:sldChg>
-      <pc:sldChg chg="del">
-        <pc:chgData name="Matthieu De Mari" userId="dfb708c9-d8dc-439f-9a3b-c772bf4a311c" providerId="ADAL" clId="{8EE40018-26BD-4A7B-8D17-70AC8417C2D0}" dt="2022-11-16T06:54:13.895" v="27" actId="47"/>
-        <pc:sldMkLst>
-          <pc:docMk/>
-          <pc:sldMk cId="3051477034" sldId="389"/>
-        </pc:sldMkLst>
-      </pc:sldChg>
-      <pc:sldChg chg="del">
-        <pc:chgData name="Matthieu De Mari" userId="dfb708c9-d8dc-439f-9a3b-c772bf4a311c" providerId="ADAL" clId="{8EE40018-26BD-4A7B-8D17-70AC8417C2D0}" dt="2022-11-16T06:54:13.895" v="27" actId="47"/>
-        <pc:sldMkLst>
-          <pc:docMk/>
-          <pc:sldMk cId="2663658166" sldId="390"/>
-        </pc:sldMkLst>
-      </pc:sldChg>
-      <pc:sldChg chg="del">
-        <pc:chgData name="Matthieu De Mari" userId="dfb708c9-d8dc-439f-9a3b-c772bf4a311c" providerId="ADAL" clId="{8EE40018-26BD-4A7B-8D17-70AC8417C2D0}" dt="2022-11-16T06:54:39.791" v="40" actId="47"/>
-        <pc:sldMkLst>
-          <pc:docMk/>
-          <pc:sldMk cId="1682911312" sldId="391"/>
-        </pc:sldMkLst>
-      </pc:sldChg>
-    </pc:docChg>
-  </pc:docChgLst>
-  <pc:docChgLst>
-    <pc:chgData name="Matthieu De Mari" userId="dfb708c9-d8dc-439f-9a3b-c772bf4a311c" providerId="ADAL" clId="{1002CE28-12E1-453F-8E06-90F32FAF9697}"/>
-    <pc:docChg chg="mod delSld modSld sldOrd modMainMaster delSection modSection">
-      <pc:chgData name="Matthieu De Mari" userId="dfb708c9-d8dc-439f-9a3b-c772bf4a311c" providerId="ADAL" clId="{1002CE28-12E1-453F-8E06-90F32FAF9697}" dt="2022-10-19T06:32:13.307" v="17" actId="20577"/>
-      <pc:docMkLst>
-        <pc:docMk/>
-      </pc:docMkLst>
-      <pc:sldChg chg="modSp del mod">
-        <pc:chgData name="Matthieu De Mari" userId="dfb708c9-d8dc-439f-9a3b-c772bf4a311c" providerId="ADAL" clId="{1002CE28-12E1-453F-8E06-90F32FAF9697}" dt="2022-10-19T06:32:10.067" v="8" actId="47"/>
-        <pc:sldMkLst>
-          <pc:docMk/>
-          <pc:sldMk cId="4221035150" sldId="256"/>
-        </pc:sldMkLst>
-      </pc:sldChg>
-      <pc:sldChg chg="del">
-        <pc:chgData name="Matthieu De Mari" userId="dfb708c9-d8dc-439f-9a3b-c772bf4a311c" providerId="ADAL" clId="{1002CE28-12E1-453F-8E06-90F32FAF9697}" dt="2022-10-19T06:32:06.571" v="5" actId="47"/>
-        <pc:sldMkLst>
-          <pc:docMk/>
-          <pc:sldMk cId="2169851104" sldId="258"/>
-        </pc:sldMkLst>
-      </pc:sldChg>
-      <pc:sldChg chg="del">
-        <pc:chgData name="Matthieu De Mari" userId="dfb708c9-d8dc-439f-9a3b-c772bf4a311c" providerId="ADAL" clId="{1002CE28-12E1-453F-8E06-90F32FAF9697}" dt="2022-10-19T06:32:06.571" v="5" actId="47"/>
-        <pc:sldMkLst>
-          <pc:docMk/>
-          <pc:sldMk cId="1814682152" sldId="259"/>
-        </pc:sldMkLst>
-      </pc:sldChg>
-      <pc:sldChg chg="del">
-        <pc:chgData name="Matthieu De Mari" userId="dfb708c9-d8dc-439f-9a3b-c772bf4a311c" providerId="ADAL" clId="{1002CE28-12E1-453F-8E06-90F32FAF9697}" dt="2022-10-19T06:32:06.571" v="5" actId="47"/>
-        <pc:sldMkLst>
-          <pc:docMk/>
-          <pc:sldMk cId="753975277" sldId="260"/>
-        </pc:sldMkLst>
-      </pc:sldChg>
-      <pc:sldChg chg="del">
-        <pc:chgData name="Matthieu De Mari" userId="dfb708c9-d8dc-439f-9a3b-c772bf4a311c" providerId="ADAL" clId="{1002CE28-12E1-453F-8E06-90F32FAF9697}" dt="2022-10-19T06:32:06.571" v="5" actId="47"/>
-        <pc:sldMkLst>
-          <pc:docMk/>
-          <pc:sldMk cId="968033501" sldId="268"/>
-        </pc:sldMkLst>
-      </pc:sldChg>
-      <pc:sldChg chg="modSp mod ord">
-        <pc:chgData name="Matthieu De Mari" userId="dfb708c9-d8dc-439f-9a3b-c772bf4a311c" providerId="ADAL" clId="{1002CE28-12E1-453F-8E06-90F32FAF9697}" dt="2022-10-19T06:32:13.307" v="17" actId="20577"/>
-        <pc:sldMkLst>
-          <pc:docMk/>
-          <pc:sldMk cId="1040156172" sldId="377"/>
-        </pc:sldMkLst>
-      </pc:sldChg>
-      <pc:sldMasterChg chg="addSp mod">
-        <pc:chgData name="Matthieu De Mari" userId="dfb708c9-d8dc-439f-9a3b-c772bf4a311c" providerId="ADAL" clId="{1002CE28-12E1-453F-8E06-90F32FAF9697}" dt="2022-10-19T06:30:58.618" v="0" actId="33475"/>
-        <pc:sldMasterMkLst>
-          <pc:docMk/>
-          <pc:sldMasterMk cId="2168708284" sldId="2147483648"/>
-        </pc:sldMasterMkLst>
-      </pc:sldMasterChg>
-    </pc:docChg>
-  </pc:docChgLst>
-  <pc:docChgLst>
-    <pc:chgData name="Matthieu De Mari" userId="dfb708c9-d8dc-439f-9a3b-c772bf4a311c" providerId="ADAL" clId="{AF737917-916F-4646-A6F5-AC5CF27AA2E7}"/>
-    <pc:docChg chg="undo custSel modSld">
-      <pc:chgData name="Matthieu De Mari" userId="dfb708c9-d8dc-439f-9a3b-c772bf4a311c" providerId="ADAL" clId="{AF737917-916F-4646-A6F5-AC5CF27AA2E7}" dt="2025-03-03T06:32:19.257" v="3" actId="9405"/>
-      <pc:docMkLst>
-        <pc:docMk/>
-      </pc:docMkLst>
-      <pc:sldChg chg="addSp delSp mod">
-        <pc:chgData name="Matthieu De Mari" userId="dfb708c9-d8dc-439f-9a3b-c772bf4a311c" providerId="ADAL" clId="{AF737917-916F-4646-A6F5-AC5CF27AA2E7}" dt="2025-03-03T06:32:19.257" v="3" actId="9405"/>
-        <pc:sldMkLst>
-          <pc:docMk/>
-          <pc:sldMk cId="636279122" sldId="785"/>
-        </pc:sldMkLst>
-        <pc:inkChg chg="add del">
-          <ac:chgData name="Matthieu De Mari" userId="dfb708c9-d8dc-439f-9a3b-c772bf4a311c" providerId="ADAL" clId="{AF737917-916F-4646-A6F5-AC5CF27AA2E7}" dt="2025-03-03T06:32:19.257" v="3" actId="9405"/>
-          <ac:inkMkLst>
-            <pc:docMk/>
-            <pc:sldMk cId="636279122" sldId="785"/>
-            <ac:inkMk id="4" creationId="{4CD079D6-6207-CC7C-9D4C-665F98DEE78E}"/>
-          </ac:inkMkLst>
-        </pc:inkChg>
-      </pc:sldChg>
-      <pc:sldChg chg="addSp delSp mod">
-        <pc:chgData name="Matthieu De Mari" userId="dfb708c9-d8dc-439f-9a3b-c772bf4a311c" providerId="ADAL" clId="{AF737917-916F-4646-A6F5-AC5CF27AA2E7}" dt="2025-03-03T06:30:14.619" v="1" actId="9405"/>
-        <pc:sldMkLst>
-          <pc:docMk/>
-          <pc:sldMk cId="4216078664" sldId="822"/>
-        </pc:sldMkLst>
-        <pc:inkChg chg="add del">
-          <ac:chgData name="Matthieu De Mari" userId="dfb708c9-d8dc-439f-9a3b-c772bf4a311c" providerId="ADAL" clId="{AF737917-916F-4646-A6F5-AC5CF27AA2E7}" dt="2025-03-03T06:30:14.619" v="1" actId="9405"/>
-          <ac:inkMkLst>
-            <pc:docMk/>
-            <pc:sldMk cId="4216078664" sldId="822"/>
-            <ac:inkMk id="3" creationId="{2539BB95-A195-F1F1-3EFE-AC9675BE8C3E}"/>
-          </ac:inkMkLst>
-        </pc:inkChg>
-      </pc:sldChg>
-    </pc:docChg>
-  </pc:docChgLst>
-  <pc:docChgLst>
-    <pc:chgData name="Matthieu De Mari" userId="dfb708c9-d8dc-439f-9a3b-c772bf4a311c" providerId="ADAL" clId="{FEF7EEA1-64D9-4B2F-A3EA-AA797BDA10B0}"/>
-    <pc:docChg chg="custSel addSld modSld modSection">
-      <pc:chgData name="Matthieu De Mari" userId="dfb708c9-d8dc-439f-9a3b-c772bf4a311c" providerId="ADAL" clId="{FEF7EEA1-64D9-4B2F-A3EA-AA797BDA10B0}" dt="2023-02-08T04:46:24.485" v="663" actId="20577"/>
-      <pc:docMkLst>
-        <pc:docMk/>
-      </pc:docMkLst>
-      <pc:sldChg chg="modSp mod modClrScheme chgLayout">
-        <pc:chgData name="Matthieu De Mari" userId="dfb708c9-d8dc-439f-9a3b-c772bf4a311c" providerId="ADAL" clId="{FEF7EEA1-64D9-4B2F-A3EA-AA797BDA10B0}" dt="2023-02-08T04:26:29.346" v="5" actId="20577"/>
-        <pc:sldMkLst>
-          <pc:docMk/>
-          <pc:sldMk cId="1458730680" sldId="396"/>
-        </pc:sldMkLst>
-      </pc:sldChg>
-      <pc:sldChg chg="delSp modSp mod modClrScheme chgLayout">
-        <pc:chgData name="Matthieu De Mari" userId="dfb708c9-d8dc-439f-9a3b-c772bf4a311c" providerId="ADAL" clId="{FEF7EEA1-64D9-4B2F-A3EA-AA797BDA10B0}" dt="2023-02-08T04:43:19.572" v="529" actId="478"/>
-        <pc:sldMkLst>
-          <pc:docMk/>
-          <pc:sldMk cId="4039171501" sldId="401"/>
-        </pc:sldMkLst>
-      </pc:sldChg>
-      <pc:sldChg chg="modSp mod">
-        <pc:chgData name="Matthieu De Mari" userId="dfb708c9-d8dc-439f-9a3b-c772bf4a311c" providerId="ADAL" clId="{FEF7EEA1-64D9-4B2F-A3EA-AA797BDA10B0}" dt="2023-02-08T04:40:20.259" v="358" actId="113"/>
-        <pc:sldMkLst>
-          <pc:docMk/>
-          <pc:sldMk cId="3163596145" sldId="402"/>
-        </pc:sldMkLst>
-      </pc:sldChg>
-      <pc:sldChg chg="modSp mod">
-        <pc:chgData name="Matthieu De Mari" userId="dfb708c9-d8dc-439f-9a3b-c772bf4a311c" providerId="ADAL" clId="{FEF7EEA1-64D9-4B2F-A3EA-AA797BDA10B0}" dt="2023-02-08T04:26:41.546" v="6"/>
-        <pc:sldMkLst>
-          <pc:docMk/>
-          <pc:sldMk cId="3381120192" sldId="788"/>
-        </pc:sldMkLst>
-      </pc:sldChg>
-      <pc:sldChg chg="modSp mod">
-        <pc:chgData name="Matthieu De Mari" userId="dfb708c9-d8dc-439f-9a3b-c772bf4a311c" providerId="ADAL" clId="{FEF7EEA1-64D9-4B2F-A3EA-AA797BDA10B0}" dt="2023-02-08T04:32:23.895" v="22" actId="20577"/>
-        <pc:sldMkLst>
-          <pc:docMk/>
-          <pc:sldMk cId="473408429" sldId="789"/>
-        </pc:sldMkLst>
-      </pc:sldChg>
-      <pc:sldChg chg="modSp mod">
-        <pc:chgData name="Matthieu De Mari" userId="dfb708c9-d8dc-439f-9a3b-c772bf4a311c" providerId="ADAL" clId="{FEF7EEA1-64D9-4B2F-A3EA-AA797BDA10B0}" dt="2023-02-08T04:34:35.142" v="135" actId="20577"/>
-        <pc:sldMkLst>
-          <pc:docMk/>
-          <pc:sldMk cId="253262496" sldId="802"/>
-        </pc:sldMkLst>
-      </pc:sldChg>
-      <pc:sldChg chg="delSp modSp mod modClrScheme chgLayout">
-        <pc:chgData name="Matthieu De Mari" userId="dfb708c9-d8dc-439f-9a3b-c772bf4a311c" providerId="ADAL" clId="{FEF7EEA1-64D9-4B2F-A3EA-AA797BDA10B0}" dt="2023-02-08T04:34:57.975" v="139" actId="478"/>
-        <pc:sldMkLst>
-          <pc:docMk/>
-          <pc:sldMk cId="165715628" sldId="804"/>
-        </pc:sldMkLst>
-      </pc:sldChg>
-      <pc:sldChg chg="modSp mod">
-        <pc:chgData name="Matthieu De Mari" userId="dfb708c9-d8dc-439f-9a3b-c772bf4a311c" providerId="ADAL" clId="{FEF7EEA1-64D9-4B2F-A3EA-AA797BDA10B0}" dt="2023-02-08T04:36:35.088" v="279" actId="20577"/>
-        <pc:sldMkLst>
-          <pc:docMk/>
-          <pc:sldMk cId="1145967515" sldId="805"/>
-        </pc:sldMkLst>
-      </pc:sldChg>
-      <pc:sldChg chg="modSp mod">
-        <pc:chgData name="Matthieu De Mari" userId="dfb708c9-d8dc-439f-9a3b-c772bf4a311c" providerId="ADAL" clId="{FEF7EEA1-64D9-4B2F-A3EA-AA797BDA10B0}" dt="2023-02-08T04:37:28.837" v="302" actId="20577"/>
-        <pc:sldMkLst>
-          <pc:docMk/>
-          <pc:sldMk cId="609329699" sldId="807"/>
-        </pc:sldMkLst>
-      </pc:sldChg>
-      <pc:sldChg chg="modSp mod">
-        <pc:chgData name="Matthieu De Mari" userId="dfb708c9-d8dc-439f-9a3b-c772bf4a311c" providerId="ADAL" clId="{FEF7EEA1-64D9-4B2F-A3EA-AA797BDA10B0}" dt="2023-02-08T04:38:42.169" v="344" actId="20577"/>
-        <pc:sldMkLst>
-          <pc:docMk/>
-          <pc:sldMk cId="3415879044" sldId="810"/>
-        </pc:sldMkLst>
-      </pc:sldChg>
-      <pc:sldChg chg="modSp mod">
-        <pc:chgData name="Matthieu De Mari" userId="dfb708c9-d8dc-439f-9a3b-c772bf4a311c" providerId="ADAL" clId="{FEF7EEA1-64D9-4B2F-A3EA-AA797BDA10B0}" dt="2023-02-08T04:39:01.905" v="347" actId="115"/>
-        <pc:sldMkLst>
-          <pc:docMk/>
-          <pc:sldMk cId="2804082923" sldId="811"/>
-        </pc:sldMkLst>
-      </pc:sldChg>
-      <pc:sldChg chg="modSp mod">
-        <pc:chgData name="Matthieu De Mari" userId="dfb708c9-d8dc-439f-9a3b-c772bf4a311c" providerId="ADAL" clId="{FEF7EEA1-64D9-4B2F-A3EA-AA797BDA10B0}" dt="2023-02-08T04:43:06.268" v="525" actId="113"/>
-        <pc:sldMkLst>
-          <pc:docMk/>
-          <pc:sldMk cId="507741553" sldId="815"/>
-        </pc:sldMkLst>
-      </pc:sldChg>
-      <pc:sldChg chg="modSp mod">
-        <pc:chgData name="Matthieu De Mari" userId="dfb708c9-d8dc-439f-9a3b-c772bf4a311c" providerId="ADAL" clId="{FEF7EEA1-64D9-4B2F-A3EA-AA797BDA10B0}" dt="2023-02-08T04:44:08.197" v="574" actId="27636"/>
-        <pc:sldMkLst>
-          <pc:docMk/>
-          <pc:sldMk cId="1946753280" sldId="816"/>
-        </pc:sldMkLst>
-      </pc:sldChg>
-      <pc:sldChg chg="modSp mod">
-        <pc:chgData name="Matthieu De Mari" userId="dfb708c9-d8dc-439f-9a3b-c772bf4a311c" providerId="ADAL" clId="{FEF7EEA1-64D9-4B2F-A3EA-AA797BDA10B0}" dt="2023-02-08T04:44:43.502" v="577" actId="27636"/>
-        <pc:sldMkLst>
-          <pc:docMk/>
-          <pc:sldMk cId="182983479" sldId="818"/>
-        </pc:sldMkLst>
-      </pc:sldChg>
-      <pc:sldChg chg="modSp mod">
-        <pc:chgData name="Matthieu De Mari" userId="dfb708c9-d8dc-439f-9a3b-c772bf4a311c" providerId="ADAL" clId="{FEF7EEA1-64D9-4B2F-A3EA-AA797BDA10B0}" dt="2023-02-08T04:46:24.485" v="663" actId="20577"/>
-        <pc:sldMkLst>
-          <pc:docMk/>
-          <pc:sldMk cId="3100375267" sldId="826"/>
-        </pc:sldMkLst>
-      </pc:sldChg>
-      <pc:sldChg chg="delSp modSp add mod modClrScheme chgLayout">
-        <pc:chgData name="Matthieu De Mari" userId="dfb708c9-d8dc-439f-9a3b-c772bf4a311c" providerId="ADAL" clId="{FEF7EEA1-64D9-4B2F-A3EA-AA797BDA10B0}" dt="2023-02-08T04:35:16.547" v="148" actId="5793"/>
-        <pc:sldMkLst>
-          <pc:docMk/>
-          <pc:sldMk cId="386474252" sldId="827"/>
-        </pc:sldMkLst>
-      </pc:sldChg>
-      <pc:sldChg chg="modSp add mod">
-        <pc:chgData name="Matthieu De Mari" userId="dfb708c9-d8dc-439f-9a3b-c772bf4a311c" providerId="ADAL" clId="{FEF7EEA1-64D9-4B2F-A3EA-AA797BDA10B0}" dt="2023-02-08T04:42:16.409" v="473" actId="20577"/>
-        <pc:sldMkLst>
-          <pc:docMk/>
-          <pc:sldMk cId="2986862345" sldId="828"/>
-        </pc:sldMkLst>
-      </pc:sldChg>
-      <pc:sldChg chg="delSp modSp add mod modClrScheme chgLayout">
-        <pc:chgData name="Matthieu De Mari" userId="dfb708c9-d8dc-439f-9a3b-c772bf4a311c" providerId="ADAL" clId="{FEF7EEA1-64D9-4B2F-A3EA-AA797BDA10B0}" dt="2023-02-08T04:43:28.633" v="539" actId="27636"/>
-        <pc:sldMkLst>
-          <pc:docMk/>
-          <pc:sldMk cId="2441798468" sldId="829"/>
-        </pc:sldMkLst>
-      </pc:sldChg>
-      <pc:sldChg chg="modSp add mod">
-        <pc:chgData name="Matthieu De Mari" userId="dfb708c9-d8dc-439f-9a3b-c772bf4a311c" providerId="ADAL" clId="{FEF7EEA1-64D9-4B2F-A3EA-AA797BDA10B0}" dt="2023-02-08T04:45:33.607" v="646" actId="20577"/>
-        <pc:sldMkLst>
-          <pc:docMk/>
-          <pc:sldMk cId="491711875" sldId="830"/>
-        </pc:sldMkLst>
       </pc:sldChg>
     </pc:docChg>
   </pc:docChgLst>
@@ -3027,7 +377,7 @@
           <a:p>
             <a:fld id="{61478373-EB31-4867-8CF0-FA31364748A5}" type="datetimeFigureOut">
               <a:rPr lang="en-GB" smtClean="0"/>
-              <a:t>03/03/2025</a:t>
+              <a:t>12/01/2026</a:t>
             </a:fld>
             <a:endParaRPr lang="en-GB"/>
           </a:p>
@@ -3444,7 +794,7 @@
           <a:p>
             <a:fld id="{E85DF616-B21E-4EF6-A6A5-95E2FB3EB1A1}" type="datetimeFigureOut">
               <a:rPr lang="en-GB" smtClean="0"/>
-              <a:t>03/03/2025</a:t>
+              <a:t>12/01/2026</a:t>
             </a:fld>
             <a:endParaRPr lang="en-GB"/>
           </a:p>
@@ -3644,7 +994,7 @@
           <a:p>
             <a:fld id="{E85DF616-B21E-4EF6-A6A5-95E2FB3EB1A1}" type="datetimeFigureOut">
               <a:rPr lang="en-GB" smtClean="0"/>
-              <a:t>03/03/2025</a:t>
+              <a:t>12/01/2026</a:t>
             </a:fld>
             <a:endParaRPr lang="en-GB"/>
           </a:p>
@@ -3854,7 +1204,7 @@
           <a:p>
             <a:fld id="{E85DF616-B21E-4EF6-A6A5-95E2FB3EB1A1}" type="datetimeFigureOut">
               <a:rPr lang="en-GB" smtClean="0"/>
-              <a:t>03/03/2025</a:t>
+              <a:t>12/01/2026</a:t>
             </a:fld>
             <a:endParaRPr lang="en-GB"/>
           </a:p>
@@ -4054,7 +1404,7 @@
           <a:p>
             <a:fld id="{E85DF616-B21E-4EF6-A6A5-95E2FB3EB1A1}" type="datetimeFigureOut">
               <a:rPr lang="en-GB" smtClean="0"/>
-              <a:t>03/03/2025</a:t>
+              <a:t>12/01/2026</a:t>
             </a:fld>
             <a:endParaRPr lang="en-GB"/>
           </a:p>
@@ -4330,7 +1680,7 @@
           <a:p>
             <a:fld id="{E85DF616-B21E-4EF6-A6A5-95E2FB3EB1A1}" type="datetimeFigureOut">
               <a:rPr lang="en-GB" smtClean="0"/>
-              <a:t>03/03/2025</a:t>
+              <a:t>12/01/2026</a:t>
             </a:fld>
             <a:endParaRPr lang="en-GB"/>
           </a:p>
@@ -4598,7 +1948,7 @@
           <a:p>
             <a:fld id="{E85DF616-B21E-4EF6-A6A5-95E2FB3EB1A1}" type="datetimeFigureOut">
               <a:rPr lang="en-GB" smtClean="0"/>
-              <a:t>03/03/2025</a:t>
+              <a:t>12/01/2026</a:t>
             </a:fld>
             <a:endParaRPr lang="en-GB"/>
           </a:p>
@@ -5013,7 +2363,7 @@
           <a:p>
             <a:fld id="{E85DF616-B21E-4EF6-A6A5-95E2FB3EB1A1}" type="datetimeFigureOut">
               <a:rPr lang="en-GB" smtClean="0"/>
-              <a:t>03/03/2025</a:t>
+              <a:t>12/01/2026</a:t>
             </a:fld>
             <a:endParaRPr lang="en-GB"/>
           </a:p>
@@ -5155,7 +2505,7 @@
           <a:p>
             <a:fld id="{E85DF616-B21E-4EF6-A6A5-95E2FB3EB1A1}" type="datetimeFigureOut">
               <a:rPr lang="en-GB" smtClean="0"/>
-              <a:t>03/03/2025</a:t>
+              <a:t>12/01/2026</a:t>
             </a:fld>
             <a:endParaRPr lang="en-GB"/>
           </a:p>
@@ -5268,7 +2618,7 @@
           <a:p>
             <a:fld id="{E85DF616-B21E-4EF6-A6A5-95E2FB3EB1A1}" type="datetimeFigureOut">
               <a:rPr lang="en-GB" smtClean="0"/>
-              <a:t>03/03/2025</a:t>
+              <a:t>12/01/2026</a:t>
             </a:fld>
             <a:endParaRPr lang="en-GB"/>
           </a:p>
@@ -5581,7 +2931,7 @@
           <a:p>
             <a:fld id="{E85DF616-B21E-4EF6-A6A5-95E2FB3EB1A1}" type="datetimeFigureOut">
               <a:rPr lang="en-GB" smtClean="0"/>
-              <a:t>03/03/2025</a:t>
+              <a:t>12/01/2026</a:t>
             </a:fld>
             <a:endParaRPr lang="en-GB"/>
           </a:p>
@@ -5870,7 +3220,7 @@
           <a:p>
             <a:fld id="{E85DF616-B21E-4EF6-A6A5-95E2FB3EB1A1}" type="datetimeFigureOut">
               <a:rPr lang="en-GB" smtClean="0"/>
-              <a:t>03/03/2025</a:t>
+              <a:t>12/01/2026</a:t>
             </a:fld>
             <a:endParaRPr lang="en-GB"/>
           </a:p>
@@ -6113,7 +3463,7 @@
           <a:p>
             <a:fld id="{E85DF616-B21E-4EF6-A6A5-95E2FB3EB1A1}" type="datetimeFigureOut">
               <a:rPr lang="en-GB" smtClean="0"/>
-              <a:t>03/03/2025</a:t>
+              <a:t>12/01/2026</a:t>
             </a:fld>
             <a:endParaRPr lang="en-GB"/>
           </a:p>
@@ -7046,8 +4396,8 @@
         </p:nvSpPr>
         <p:spPr>
           <a:xfrm>
-            <a:off x="462116" y="1825624"/>
-            <a:ext cx="4965290" cy="5032375"/>
+            <a:off x="462115" y="1825624"/>
+            <a:ext cx="5133141" cy="5032375"/>
           </a:xfrm>
         </p:spPr>
         <p:txBody>

--- a/W3/3. W3S3 final/W3S3.pptx
+++ b/W3/3. W3S3 final/W3S3.pptx
@@ -266,12 +266,20 @@
 </p:presentation>
 </file>
 
+<file path=ppt/revisionInfo.xml><?xml version="1.0" encoding="utf-8"?>
+<p1510:revInfo xmlns:a="http://schemas.openxmlformats.org/drawingml/2006/main" xmlns:r="http://schemas.openxmlformats.org/officeDocument/2006/relationships" xmlns:p1510="http://schemas.microsoft.com/office/powerpoint/2015/10/main">
+  <p1510:revLst>
+    <p1510:client id="{462F49A5-E8ED-4058-B09D-5D2994BDBA66}" v="42" dt="2026-01-16T05:54:22.450"/>
+  </p1510:revLst>
+</p1510:revInfo>
+</file>
+
 <file path=ppt/changesInfos/changesInfo1.xml><?xml version="1.0" encoding="utf-8"?>
 <pc:chgInfo xmlns:a="http://schemas.openxmlformats.org/drawingml/2006/main" xmlns:r="http://schemas.openxmlformats.org/officeDocument/2006/relationships" xmlns:ac="http://schemas.microsoft.com/office/drawing/2013/main/command" xmlns:pc="http://schemas.microsoft.com/office/powerpoint/2013/main/command">
   <pc:docChgLst>
     <pc:chgData name="Matthieu De Mari" userId="dfb708c9-d8dc-439f-9a3b-c772bf4a311c" providerId="ADAL" clId="{81E9B007-0C2C-493E-9B93-55A62C9C1F12}"/>
-    <pc:docChg chg="modSld">
-      <pc:chgData name="Matthieu De Mari" userId="dfb708c9-d8dc-439f-9a3b-c772bf4a311c" providerId="ADAL" clId="{81E9B007-0C2C-493E-9B93-55A62C9C1F12}" dt="2026-01-12T06:33:40.610" v="0" actId="14100"/>
+    <pc:docChg chg="custSel modSld">
+      <pc:chgData name="Matthieu De Mari" userId="dfb708c9-d8dc-439f-9a3b-c772bf4a311c" providerId="ADAL" clId="{81E9B007-0C2C-493E-9B93-55A62C9C1F12}" dt="2026-01-16T05:55:10.274" v="172" actId="207"/>
       <pc:docMkLst>
         <pc:docMk/>
       </pc:docMkLst>
@@ -287,6 +295,96 @@
             <pc:docMk/>
             <pc:sldMk cId="2330822039" sldId="792"/>
             <ac:spMk id="3" creationId="{BA2A0416-0B18-CDD3-9A37-B441AE8FAEC0}"/>
+          </ac:spMkLst>
+        </pc:spChg>
+      </pc:sldChg>
+      <pc:sldChg chg="modSp mod">
+        <pc:chgData name="Matthieu De Mari" userId="dfb708c9-d8dc-439f-9a3b-c772bf4a311c" providerId="ADAL" clId="{81E9B007-0C2C-493E-9B93-55A62C9C1F12}" dt="2026-01-16T05:50:03.505" v="23" actId="14100"/>
+        <pc:sldMkLst>
+          <pc:docMk/>
+          <pc:sldMk cId="2353942002" sldId="795"/>
+        </pc:sldMkLst>
+        <pc:spChg chg="mod">
+          <ac:chgData name="Matthieu De Mari" userId="dfb708c9-d8dc-439f-9a3b-c772bf4a311c" providerId="ADAL" clId="{81E9B007-0C2C-493E-9B93-55A62C9C1F12}" dt="2026-01-16T05:50:03.505" v="23" actId="14100"/>
+          <ac:spMkLst>
+            <pc:docMk/>
+            <pc:sldMk cId="2353942002" sldId="795"/>
+            <ac:spMk id="3" creationId="{77496A95-7961-91A1-EB76-E57510055A38}"/>
+          </ac:spMkLst>
+        </pc:spChg>
+      </pc:sldChg>
+      <pc:sldChg chg="modSp mod">
+        <pc:chgData name="Matthieu De Mari" userId="dfb708c9-d8dc-439f-9a3b-c772bf4a311c" providerId="ADAL" clId="{81E9B007-0C2C-493E-9B93-55A62C9C1F12}" dt="2026-01-16T05:49:50.306" v="21" actId="20577"/>
+        <pc:sldMkLst>
+          <pc:docMk/>
+          <pc:sldMk cId="1414932605" sldId="796"/>
+        </pc:sldMkLst>
+        <pc:spChg chg="mod">
+          <ac:chgData name="Matthieu De Mari" userId="dfb708c9-d8dc-439f-9a3b-c772bf4a311c" providerId="ADAL" clId="{81E9B007-0C2C-493E-9B93-55A62C9C1F12}" dt="2026-01-16T05:49:50.306" v="21" actId="20577"/>
+          <ac:spMkLst>
+            <pc:docMk/>
+            <pc:sldMk cId="1414932605" sldId="796"/>
+            <ac:spMk id="3" creationId="{77496A95-7961-91A1-EB76-E57510055A38}"/>
+          </ac:spMkLst>
+        </pc:spChg>
+      </pc:sldChg>
+      <pc:sldChg chg="modSp mod">
+        <pc:chgData name="Matthieu De Mari" userId="dfb708c9-d8dc-439f-9a3b-c772bf4a311c" providerId="ADAL" clId="{81E9B007-0C2C-493E-9B93-55A62C9C1F12}" dt="2026-01-16T05:50:49.880" v="78" actId="20577"/>
+        <pc:sldMkLst>
+          <pc:docMk/>
+          <pc:sldMk cId="703353227" sldId="799"/>
+        </pc:sldMkLst>
+        <pc:spChg chg="mod">
+          <ac:chgData name="Matthieu De Mari" userId="dfb708c9-d8dc-439f-9a3b-c772bf4a311c" providerId="ADAL" clId="{81E9B007-0C2C-493E-9B93-55A62C9C1F12}" dt="2026-01-16T05:50:49.880" v="78" actId="20577"/>
+          <ac:spMkLst>
+            <pc:docMk/>
+            <pc:sldMk cId="703353227" sldId="799"/>
+            <ac:spMk id="4" creationId="{3D8906E9-3F26-1680-6CF9-CC0314375949}"/>
+          </ac:spMkLst>
+        </pc:spChg>
+      </pc:sldChg>
+      <pc:sldChg chg="modSp mod">
+        <pc:chgData name="Matthieu De Mari" userId="dfb708c9-d8dc-439f-9a3b-c772bf4a311c" providerId="ADAL" clId="{81E9B007-0C2C-493E-9B93-55A62C9C1F12}" dt="2026-01-16T05:51:31.777" v="124" actId="14100"/>
+        <pc:sldMkLst>
+          <pc:docMk/>
+          <pc:sldMk cId="253262496" sldId="802"/>
+        </pc:sldMkLst>
+        <pc:spChg chg="mod">
+          <ac:chgData name="Matthieu De Mari" userId="dfb708c9-d8dc-439f-9a3b-c772bf4a311c" providerId="ADAL" clId="{81E9B007-0C2C-493E-9B93-55A62C9C1F12}" dt="2026-01-16T05:51:31.777" v="124" actId="14100"/>
+          <ac:spMkLst>
+            <pc:docMk/>
+            <pc:sldMk cId="253262496" sldId="802"/>
+            <ac:spMk id="4" creationId="{3D8906E9-3F26-1680-6CF9-CC0314375949}"/>
+          </ac:spMkLst>
+        </pc:spChg>
+      </pc:sldChg>
+      <pc:sldChg chg="modSp mod">
+        <pc:chgData name="Matthieu De Mari" userId="dfb708c9-d8dc-439f-9a3b-c772bf4a311c" providerId="ADAL" clId="{81E9B007-0C2C-493E-9B93-55A62C9C1F12}" dt="2026-01-16T05:54:22.450" v="171" actId="207"/>
+        <pc:sldMkLst>
+          <pc:docMk/>
+          <pc:sldMk cId="232544569" sldId="803"/>
+        </pc:sldMkLst>
+        <pc:spChg chg="mod">
+          <ac:chgData name="Matthieu De Mari" userId="dfb708c9-d8dc-439f-9a3b-c772bf4a311c" providerId="ADAL" clId="{81E9B007-0C2C-493E-9B93-55A62C9C1F12}" dt="2026-01-16T05:54:22.450" v="171" actId="207"/>
+          <ac:spMkLst>
+            <pc:docMk/>
+            <pc:sldMk cId="232544569" sldId="803"/>
+            <ac:spMk id="3" creationId="{F0814AA9-339A-72D8-E8A9-C066A3ED5800}"/>
+          </ac:spMkLst>
+        </pc:spChg>
+      </pc:sldChg>
+      <pc:sldChg chg="modSp mod">
+        <pc:chgData name="Matthieu De Mari" userId="dfb708c9-d8dc-439f-9a3b-c772bf4a311c" providerId="ADAL" clId="{81E9B007-0C2C-493E-9B93-55A62C9C1F12}" dt="2026-01-16T05:55:10.274" v="172" actId="207"/>
+        <pc:sldMkLst>
+          <pc:docMk/>
+          <pc:sldMk cId="2804082923" sldId="811"/>
+        </pc:sldMkLst>
+        <pc:spChg chg="mod">
+          <ac:chgData name="Matthieu De Mari" userId="dfb708c9-d8dc-439f-9a3b-c772bf4a311c" providerId="ADAL" clId="{81E9B007-0C2C-493E-9B93-55A62C9C1F12}" dt="2026-01-16T05:55:10.274" v="172" actId="207"/>
+          <ac:spMkLst>
+            <pc:docMk/>
+            <pc:sldMk cId="2804082923" sldId="811"/>
+            <ac:spMk id="5" creationId="{0ABFA246-AA73-67B0-2D31-98CDFA32F1EB}"/>
           </ac:spMkLst>
         </pc:spChg>
       </pc:sldChg>
@@ -377,7 +475,7 @@
           <a:p>
             <a:fld id="{61478373-EB31-4867-8CF0-FA31364748A5}" type="datetimeFigureOut">
               <a:rPr lang="en-GB" smtClean="0"/>
-              <a:t>12/01/2026</a:t>
+              <a:t>16/01/2026</a:t>
             </a:fld>
             <a:endParaRPr lang="en-GB"/>
           </a:p>
@@ -794,7 +892,7 @@
           <a:p>
             <a:fld id="{E85DF616-B21E-4EF6-A6A5-95E2FB3EB1A1}" type="datetimeFigureOut">
               <a:rPr lang="en-GB" smtClean="0"/>
-              <a:t>12/01/2026</a:t>
+              <a:t>16/01/2026</a:t>
             </a:fld>
             <a:endParaRPr lang="en-GB"/>
           </a:p>
@@ -994,7 +1092,7 @@
           <a:p>
             <a:fld id="{E85DF616-B21E-4EF6-A6A5-95E2FB3EB1A1}" type="datetimeFigureOut">
               <a:rPr lang="en-GB" smtClean="0"/>
-              <a:t>12/01/2026</a:t>
+              <a:t>16/01/2026</a:t>
             </a:fld>
             <a:endParaRPr lang="en-GB"/>
           </a:p>
@@ -1204,7 +1302,7 @@
           <a:p>
             <a:fld id="{E85DF616-B21E-4EF6-A6A5-95E2FB3EB1A1}" type="datetimeFigureOut">
               <a:rPr lang="en-GB" smtClean="0"/>
-              <a:t>12/01/2026</a:t>
+              <a:t>16/01/2026</a:t>
             </a:fld>
             <a:endParaRPr lang="en-GB"/>
           </a:p>
@@ -1404,7 +1502,7 @@
           <a:p>
             <a:fld id="{E85DF616-B21E-4EF6-A6A5-95E2FB3EB1A1}" type="datetimeFigureOut">
               <a:rPr lang="en-GB" smtClean="0"/>
-              <a:t>12/01/2026</a:t>
+              <a:t>16/01/2026</a:t>
             </a:fld>
             <a:endParaRPr lang="en-GB"/>
           </a:p>
@@ -1680,7 +1778,7 @@
           <a:p>
             <a:fld id="{E85DF616-B21E-4EF6-A6A5-95E2FB3EB1A1}" type="datetimeFigureOut">
               <a:rPr lang="en-GB" smtClean="0"/>
-              <a:t>12/01/2026</a:t>
+              <a:t>16/01/2026</a:t>
             </a:fld>
             <a:endParaRPr lang="en-GB"/>
           </a:p>
@@ -1948,7 +2046,7 @@
           <a:p>
             <a:fld id="{E85DF616-B21E-4EF6-A6A5-95E2FB3EB1A1}" type="datetimeFigureOut">
               <a:rPr lang="en-GB" smtClean="0"/>
-              <a:t>12/01/2026</a:t>
+              <a:t>16/01/2026</a:t>
             </a:fld>
             <a:endParaRPr lang="en-GB"/>
           </a:p>
@@ -2363,7 +2461,7 @@
           <a:p>
             <a:fld id="{E85DF616-B21E-4EF6-A6A5-95E2FB3EB1A1}" type="datetimeFigureOut">
               <a:rPr lang="en-GB" smtClean="0"/>
-              <a:t>12/01/2026</a:t>
+              <a:t>16/01/2026</a:t>
             </a:fld>
             <a:endParaRPr lang="en-GB"/>
           </a:p>
@@ -2505,7 +2603,7 @@
           <a:p>
             <a:fld id="{E85DF616-B21E-4EF6-A6A5-95E2FB3EB1A1}" type="datetimeFigureOut">
               <a:rPr lang="en-GB" smtClean="0"/>
-              <a:t>12/01/2026</a:t>
+              <a:t>16/01/2026</a:t>
             </a:fld>
             <a:endParaRPr lang="en-GB"/>
           </a:p>
@@ -2618,7 +2716,7 @@
           <a:p>
             <a:fld id="{E85DF616-B21E-4EF6-A6A5-95E2FB3EB1A1}" type="datetimeFigureOut">
               <a:rPr lang="en-GB" smtClean="0"/>
-              <a:t>12/01/2026</a:t>
+              <a:t>16/01/2026</a:t>
             </a:fld>
             <a:endParaRPr lang="en-GB"/>
           </a:p>
@@ -2931,7 +3029,7 @@
           <a:p>
             <a:fld id="{E85DF616-B21E-4EF6-A6A5-95E2FB3EB1A1}" type="datetimeFigureOut">
               <a:rPr lang="en-GB" smtClean="0"/>
-              <a:t>12/01/2026</a:t>
+              <a:t>16/01/2026</a:t>
             </a:fld>
             <a:endParaRPr lang="en-GB"/>
           </a:p>
@@ -3220,7 +3318,7 @@
           <a:p>
             <a:fld id="{E85DF616-B21E-4EF6-A6A5-95E2FB3EB1A1}" type="datetimeFigureOut">
               <a:rPr lang="en-GB" smtClean="0"/>
-              <a:t>12/01/2026</a:t>
+              <a:t>16/01/2026</a:t>
             </a:fld>
             <a:endParaRPr lang="en-GB"/>
           </a:p>
@@ -3463,7 +3561,7 @@
           <a:p>
             <a:fld id="{E85DF616-B21E-4EF6-A6A5-95E2FB3EB1A1}" type="datetimeFigureOut">
               <a:rPr lang="en-GB" smtClean="0"/>
-              <a:t>12/01/2026</a:t>
+              <a:t>16/01/2026</a:t>
             </a:fld>
             <a:endParaRPr lang="en-GB"/>
           </a:p>
@@ -5644,7 +5742,7 @@
         <p:spPr>
           <a:xfrm>
             <a:off x="838200" y="1825624"/>
-            <a:ext cx="5181600" cy="5032375"/>
+            <a:ext cx="5428376" cy="5032375"/>
           </a:xfrm>
         </p:spPr>
         <p:txBody>
@@ -5666,7 +5764,7 @@
             </a:r>
             <a:r>
               <a:rPr lang="en-GB" dirty="0"/>
-              <a:t> object as the generator in a </a:t>
+              <a:t> object as the generator in a training </a:t>
             </a:r>
             <a:r>
               <a:rPr lang="en-GB" b="1" dirty="0"/>
@@ -5682,7 +5780,7 @@
             </a:r>
             <a:r>
               <a:rPr lang="en-GB" dirty="0"/>
-              <a:t>, to generate mini-batches of samples.</a:t>
+              <a:t>, to draw mini-batches of samples.</a:t>
             </a:r>
           </a:p>
           <a:p>
@@ -5920,7 +6018,7 @@
         <p:spPr>
           <a:xfrm>
             <a:off x="838200" y="1825624"/>
-            <a:ext cx="5181600" cy="5032375"/>
+            <a:ext cx="5361264" cy="5032375"/>
           </a:xfrm>
         </p:spPr>
         <p:txBody>
@@ -5942,7 +6040,7 @@
             </a:r>
             <a:r>
               <a:rPr lang="en-GB" dirty="0"/>
-              <a:t> object as the generator in a </a:t>
+              <a:t> object as the generator in a training </a:t>
             </a:r>
             <a:r>
               <a:rPr lang="en-GB" b="1" dirty="0"/>
@@ -5958,7 +6056,7 @@
             </a:r>
             <a:r>
               <a:rPr lang="en-GB" dirty="0"/>
-              <a:t>, to generate mini-batches of samples.</a:t>
+              <a:t>, to draw mini-batches of samples.</a:t>
             </a:r>
           </a:p>
           <a:p>
@@ -5979,6 +6077,18 @@
               <a:t> definition should be repeated to generate </a:t>
             </a:r>
             <a:r>
+              <a:rPr lang="en-GB" b="1" dirty="0" err="1"/>
+              <a:t>dataloaders</a:t>
+            </a:r>
+            <a:r>
+              <a:rPr lang="en-GB" b="1" dirty="0"/>
+              <a:t> for</a:t>
+            </a:r>
+            <a:r>
+              <a:rPr lang="en-GB" dirty="0"/>
+              <a:t> </a:t>
+            </a:r>
+            <a:r>
               <a:rPr lang="en-GB" b="1" dirty="0"/>
               <a:t>training</a:t>
             </a:r>
@@ -6005,14 +6115,6 @@
             <a:r>
               <a:rPr lang="en-GB" b="1" dirty="0"/>
               <a:t>sets</a:t>
-            </a:r>
-            <a:r>
-              <a:rPr lang="en-GB" dirty="0"/>
-              <a:t> </a:t>
-            </a:r>
-            <a:r>
-              <a:rPr lang="en-GB" b="1" dirty="0" err="1"/>
-              <a:t>dataloaders</a:t>
             </a:r>
             <a:r>
               <a:rPr lang="en-GB" dirty="0"/>
@@ -6721,7 +6823,7 @@
             </a:r>
             <a:r>
               <a:rPr lang="en-GB" dirty="0"/>
-              <a:t> (which is true) and of </a:t>
+              <a:t> and of </a:t>
             </a:r>
             <a:r>
               <a:rPr lang="en-GB" b="1" dirty="0"/>
@@ -6745,16 +6847,7 @@
             </a:r>
             <a:r>
               <a:rPr lang="en-GB" dirty="0"/>
-              <a:t>.</a:t>
-            </a:r>
-          </a:p>
-          <a:p>
-            <a:pPr marL="0" indent="0">
-              <a:buNone/>
-            </a:pPr>
-            <a:r>
-              <a:rPr lang="en-GB" dirty="0"/>
-              <a:t>For now, however, this will do.</a:t>
+              <a:t>. Still great for educational purposes, so for now this will do.</a:t>
             </a:r>
           </a:p>
         </p:txBody>
@@ -8040,7 +8133,7 @@
         <p:spPr>
           <a:xfrm>
             <a:off x="6172200" y="1825624"/>
-            <a:ext cx="5181600" cy="5032375"/>
+            <a:ext cx="5362662" cy="5032375"/>
           </a:xfrm>
         </p:spPr>
         <p:txBody>
@@ -8063,7 +8156,7 @@
             </a:pPr>
             <a:r>
               <a:rPr lang="en-GB" dirty="0"/>
-              <a:t>These values are the original mean and standard deviation of the dataset before normalization!</a:t>
+              <a:t>These values are the original mean and standard deviation of the dataset pixels values, which can then be used for normalization!</a:t>
             </a:r>
             <a:endParaRPr lang="en-SG" dirty="0"/>
           </a:p>
@@ -10721,8 +10814,8 @@
           </a:p>
         </p:txBody>
       </p:sp>
-      <mc:AlternateContent xmlns:mc="http://schemas.openxmlformats.org/markup-compatibility/2006" xmlns:a14="http://schemas.microsoft.com/office/drawing/2010/main">
-        <mc:Choice Requires="a14">
+      <mc:AlternateContent xmlns:mc="http://schemas.openxmlformats.org/markup-compatibility/2006">
+        <mc:Choice xmlns:a14="http://schemas.microsoft.com/office/drawing/2010/main" Requires="a14">
           <p:sp>
             <p:nvSpPr>
               <p:cNvPr id="3" name="Content Placeholder 2">
@@ -10789,15 +10882,7 @@
                 </a:r>
                 <a:r>
                   <a:rPr lang="en-SG" dirty="0"/>
-                  <a:t> </a:t>
-                </a:r>
-                <a:r>
-                  <a:rPr lang="en-SG" b="1" dirty="0"/>
-                  <a:t>function</a:t>
-                </a:r>
-                <a:r>
-                  <a:rPr lang="en-SG" dirty="0"/>
-                  <a:t> transforms a vector of values</a:t>
+                  <a:t> operation</a:t>
                 </a:r>
               </a:p>
               <a:p>
@@ -10810,29 +10895,60 @@
                       <m:jc m:val="centerGroup"/>
                     </m:oMathParaPr>
                     <m:oMath xmlns:m="http://schemas.openxmlformats.org/officeDocument/2006/math">
-                      <m:r>
-                        <a:rPr lang="en-SG" i="1" dirty="0" smtClean="0">
-                          <a:latin typeface="Cambria Math" panose="02040503050406030204" pitchFamily="18" charset="0"/>
-                        </a:rPr>
-                        <m:t>𝑌</m:t>
-                      </m:r>
-                      <m:r>
-                        <a:rPr lang="en-SG" i="1" dirty="0" smtClean="0">
-                          <a:latin typeface="Cambria Math" panose="02040503050406030204" pitchFamily="18" charset="0"/>
-                        </a:rPr>
-                        <m:t>=(</m:t>
-                      </m:r>
                       <m:sSub>
                         <m:sSubPr>
                           <m:ctrlPr>
-                            <a:rPr lang="en-GB" b="0" i="1" dirty="0" smtClean="0">
+                            <a:rPr lang="en-GB" i="1" dirty="0">
                               <a:latin typeface="Cambria Math" panose="02040503050406030204" pitchFamily="18" charset="0"/>
                             </a:rPr>
                           </m:ctrlPr>
                         </m:sSubPr>
                         <m:e>
                           <m:r>
-                            <a:rPr lang="en-SG" i="1" dirty="0" smtClean="0">
+                            <a:rPr lang="en-SG" i="1" dirty="0">
+                              <a:latin typeface="Cambria Math" panose="02040503050406030204" pitchFamily="18" charset="0"/>
+                            </a:rPr>
+                            <m:t>𝑝</m:t>
+                          </m:r>
+                        </m:e>
+                        <m:sub>
+                          <m:r>
+                            <a:rPr lang="en-SG" i="1" dirty="0">
+                              <a:latin typeface="Cambria Math" panose="02040503050406030204" pitchFamily="18" charset="0"/>
+                            </a:rPr>
+                            <m:t>𝑖</m:t>
+                          </m:r>
+                        </m:sub>
+                      </m:sSub>
+                      <m:r>
+                        <a:rPr lang="en-SG" i="1" dirty="0">
+                          <a:latin typeface="Cambria Math" panose="02040503050406030204" pitchFamily="18" charset="0"/>
+                        </a:rPr>
+                        <m:t>=</m:t>
+                      </m:r>
+                      <m:r>
+                        <a:rPr lang="en-SG" i="1" dirty="0">
+                          <a:latin typeface="Cambria Math" panose="02040503050406030204" pitchFamily="18" charset="0"/>
+                        </a:rPr>
+                        <m:t>𝑠</m:t>
+                      </m:r>
+                      <m:r>
+                        <a:rPr lang="en-SG" i="1" dirty="0">
+                          <a:latin typeface="Cambria Math" panose="02040503050406030204" pitchFamily="18" charset="0"/>
+                        </a:rPr>
+                        <m:t>(</m:t>
+                      </m:r>
+                      <m:sSub>
+                        <m:sSubPr>
+                          <m:ctrlPr>
+                            <a:rPr lang="en-GB" i="1" dirty="0">
+                              <a:latin typeface="Cambria Math" panose="02040503050406030204" pitchFamily="18" charset="0"/>
+                            </a:rPr>
+                          </m:ctrlPr>
+                        </m:sSubPr>
+                        <m:e>
+                          <m:r>
+                            <a:rPr lang="en-SG" i="1" dirty="0">
                               <a:latin typeface="Cambria Math" panose="02040503050406030204" pitchFamily="18" charset="0"/>
                             </a:rPr>
                             <m:t>𝑦</m:t>
@@ -10840,15 +10956,15 @@
                         </m:e>
                         <m:sub>
                           <m:r>
-                            <a:rPr lang="en-SG" i="1" dirty="0" smtClean="0">
+                            <a:rPr lang="en-SG" i="1" dirty="0">
                               <a:latin typeface="Cambria Math" panose="02040503050406030204" pitchFamily="18" charset="0"/>
                             </a:rPr>
-                            <m:t>0</m:t>
+                            <m:t>𝑖</m:t>
                           </m:r>
                         </m:sub>
                       </m:sSub>
                       <m:r>
-                        <a:rPr lang="en-SG" i="1" dirty="0" smtClean="0">
+                        <a:rPr lang="en-SG" i="1" dirty="0">
                           <a:latin typeface="Cambria Math" panose="02040503050406030204" pitchFamily="18" charset="0"/>
                         </a:rPr>
                         <m:t>,</m:t>
@@ -10856,14 +10972,14 @@
                       <m:sSub>
                         <m:sSubPr>
                           <m:ctrlPr>
-                            <a:rPr lang="en-GB" b="0" i="1" dirty="0" smtClean="0">
+                            <a:rPr lang="en-GB" i="1" dirty="0">
                               <a:latin typeface="Cambria Math" panose="02040503050406030204" pitchFamily="18" charset="0"/>
                             </a:rPr>
                           </m:ctrlPr>
                         </m:sSubPr>
                         <m:e>
                           <m:r>
-                            <a:rPr lang="en-SG" i="1" dirty="0" smtClean="0">
+                            <a:rPr lang="en-GB" i="1" dirty="0">
                               <a:latin typeface="Cambria Math" panose="02040503050406030204" pitchFamily="18" charset="0"/>
                             </a:rPr>
                             <m:t>𝑦</m:t>
@@ -10871,80 +10987,24 @@
                         </m:e>
                         <m:sub>
                           <m:r>
-                            <a:rPr lang="en-SG" i="1" dirty="0" smtClean="0">
+                            <a:rPr lang="en-GB" i="1" dirty="0">
                               <a:latin typeface="Cambria Math" panose="02040503050406030204" pitchFamily="18" charset="0"/>
                             </a:rPr>
-                            <m:t>1</m:t>
+                            <m:t>−</m:t>
+                          </m:r>
+                          <m:r>
+                            <a:rPr lang="en-GB" i="1" dirty="0">
+                              <a:latin typeface="Cambria Math" panose="02040503050406030204" pitchFamily="18" charset="0"/>
+                            </a:rPr>
+                            <m:t>𝑖</m:t>
                           </m:r>
                         </m:sub>
                       </m:sSub>
                       <m:r>
-                        <a:rPr lang="en-SG" i="1" dirty="0" smtClean="0">
+                        <a:rPr lang="en-SG" i="1" dirty="0">
                           <a:latin typeface="Cambria Math" panose="02040503050406030204" pitchFamily="18" charset="0"/>
                         </a:rPr>
-                        <m:t>,</m:t>
-                      </m:r>
-                      <m:sSub>
-                        <m:sSubPr>
-                          <m:ctrlPr>
-                            <a:rPr lang="en-GB" b="0" i="1" dirty="0" smtClean="0">
-                              <a:latin typeface="Cambria Math" panose="02040503050406030204" pitchFamily="18" charset="0"/>
-                            </a:rPr>
-                          </m:ctrlPr>
-                        </m:sSubPr>
-                        <m:e>
-                          <m:r>
-                            <a:rPr lang="en-SG" i="1" dirty="0" smtClean="0">
-                              <a:latin typeface="Cambria Math" panose="02040503050406030204" pitchFamily="18" charset="0"/>
-                            </a:rPr>
-                            <m:t>𝑦</m:t>
-                          </m:r>
-                        </m:e>
-                        <m:sub>
-                          <m:r>
-                            <a:rPr lang="en-SG" i="1" dirty="0" smtClean="0">
-                              <a:latin typeface="Cambria Math" panose="02040503050406030204" pitchFamily="18" charset="0"/>
-                            </a:rPr>
-                            <m:t>2</m:t>
-                          </m:r>
-                        </m:sub>
-                      </m:sSub>
-                      <m:r>
-                        <a:rPr lang="en-SG" i="1" dirty="0" smtClean="0">
-                          <a:latin typeface="Cambria Math" panose="02040503050406030204" pitchFamily="18" charset="0"/>
-                        </a:rPr>
-                        <m:t>,…</m:t>
-                      </m:r>
-                      <m:sSub>
-                        <m:sSubPr>
-                          <m:ctrlPr>
-                            <a:rPr lang="en-GB" b="0" i="1" dirty="0" smtClean="0">
-                              <a:latin typeface="Cambria Math" panose="02040503050406030204" pitchFamily="18" charset="0"/>
-                            </a:rPr>
-                          </m:ctrlPr>
-                        </m:sSubPr>
-                        <m:e>
-                          <m:r>
-                            <a:rPr lang="en-SG" i="1" dirty="0" smtClean="0">
-                              <a:latin typeface="Cambria Math" panose="02040503050406030204" pitchFamily="18" charset="0"/>
-                            </a:rPr>
-                            <m:t>𝑦</m:t>
-                          </m:r>
-                        </m:e>
-                        <m:sub>
-                          <m:r>
-                            <a:rPr lang="en-GB" b="0" i="1" dirty="0" smtClean="0">
-                              <a:latin typeface="Cambria Math" panose="02040503050406030204" pitchFamily="18" charset="0"/>
-                            </a:rPr>
-                            <m:t>𝐾</m:t>
-                          </m:r>
-                        </m:sub>
-                      </m:sSub>
-                      <m:r>
-                        <a:rPr lang="en-SG" i="1" dirty="0" smtClean="0">
-                          <a:latin typeface="Cambria Math" panose="02040503050406030204" pitchFamily="18" charset="0"/>
-                        </a:rPr>
-                        <m:t>),</m:t>
+                        <m:t>)</m:t>
                       </m:r>
                     </m:oMath>
                   </m:oMathPara>
@@ -10957,7 +11017,27 @@
                 </a:pPr>
                 <a:r>
                   <a:rPr lang="en-SG" dirty="0"/>
-                  <a:t>into another vector of values</a:t>
+                  <a:t>is defined, </a:t>
+                </a:r>
+                <a14:m>
+                  <m:oMath xmlns:m="http://schemas.openxmlformats.org/officeDocument/2006/math">
+                    <m:r>
+                      <a:rPr lang="en-SG" i="1" dirty="0">
+                        <a:latin typeface="Cambria Math" panose="02040503050406030204" pitchFamily="18" charset="0"/>
+                      </a:rPr>
+                      <m:t>∀</m:t>
+                    </m:r>
+                    <m:r>
+                      <a:rPr lang="en-SG" i="1" dirty="0">
+                        <a:latin typeface="Cambria Math" panose="02040503050406030204" pitchFamily="18" charset="0"/>
+                      </a:rPr>
+                      <m:t>𝑖</m:t>
+                    </m:r>
+                  </m:oMath>
+                </a14:m>
+                <a:r>
+                  <a:rPr lang="en-SG" dirty="0"/>
+                  <a:t>, as:</a:t>
                 </a:r>
               </a:p>
               <a:p>
@@ -10967,25 +11047,50 @@
                 <a14:m>
                   <m:oMathPara xmlns:m="http://schemas.openxmlformats.org/officeDocument/2006/math">
                     <m:oMathParaPr>
-                      <m:jc m:val="centerGroup"/>
+                      <m:jc m:val="center"/>
                     </m:oMathParaPr>
                     <m:oMath xmlns:m="http://schemas.openxmlformats.org/officeDocument/2006/math">
+                      <m:sSub>
+                        <m:sSubPr>
+                          <m:ctrlPr>
+                            <a:rPr lang="en-GB" i="1" dirty="0">
+                              <a:latin typeface="Cambria Math" panose="02040503050406030204" pitchFamily="18" charset="0"/>
+                            </a:rPr>
+                          </m:ctrlPr>
+                        </m:sSubPr>
+                        <m:e>
+                          <m:r>
+                            <a:rPr lang="en-SG" i="1" dirty="0">
+                              <a:latin typeface="Cambria Math" panose="02040503050406030204" pitchFamily="18" charset="0"/>
+                            </a:rPr>
+                            <m:t>𝑝</m:t>
+                          </m:r>
+                        </m:e>
+                        <m:sub>
+                          <m:r>
+                            <a:rPr lang="en-SG" i="1" dirty="0">
+                              <a:latin typeface="Cambria Math" panose="02040503050406030204" pitchFamily="18" charset="0"/>
+                            </a:rPr>
+                            <m:t>𝑖</m:t>
+                          </m:r>
+                        </m:sub>
+                      </m:sSub>
                       <m:r>
-                        <a:rPr lang="en-SG" i="1" dirty="0" smtClean="0">
-                          <a:latin typeface="Cambria Math" panose="02040503050406030204" pitchFamily="18" charset="0"/>
-                        </a:rPr>
-                        <m:t>𝑃</m:t>
-                      </m:r>
-                      <m:r>
-                        <a:rPr lang="en-SG" i="1" dirty="0" smtClean="0">
+                        <a:rPr lang="en-SG" i="1" dirty="0">
                           <a:latin typeface="Cambria Math" panose="02040503050406030204" pitchFamily="18" charset="0"/>
                         </a:rPr>
                         <m:t>=</m:t>
                       </m:r>
+                      <m:r>
+                        <a:rPr lang="en-SG" i="1" dirty="0">
+                          <a:latin typeface="Cambria Math" panose="02040503050406030204" pitchFamily="18" charset="0"/>
+                        </a:rPr>
+                        <m:t>𝑠</m:t>
+                      </m:r>
                       <m:d>
                         <m:dPr>
                           <m:ctrlPr>
-                            <a:rPr lang="en-SG" b="0" i="1" dirty="0" smtClean="0">
+                            <a:rPr lang="en-SG" i="1" dirty="0">
                               <a:latin typeface="Cambria Math" panose="02040503050406030204" pitchFamily="18" charset="0"/>
                             </a:rPr>
                           </m:ctrlPr>
@@ -10994,30 +11099,30 @@
                           <m:sSub>
                             <m:sSubPr>
                               <m:ctrlPr>
-                                <a:rPr lang="en-GB" b="0" i="1" dirty="0" smtClean="0">
+                                <a:rPr lang="en-GB" i="1" dirty="0">
                                   <a:latin typeface="Cambria Math" panose="02040503050406030204" pitchFamily="18" charset="0"/>
                                 </a:rPr>
                               </m:ctrlPr>
                             </m:sSubPr>
                             <m:e>
                               <m:r>
-                                <a:rPr lang="en-SG" i="1" dirty="0" smtClean="0">
+                                <a:rPr lang="en-SG" i="1" dirty="0">
                                   <a:latin typeface="Cambria Math" panose="02040503050406030204" pitchFamily="18" charset="0"/>
                                 </a:rPr>
-                                <m:t>𝑝</m:t>
+                                <m:t>𝑦</m:t>
                               </m:r>
                             </m:e>
                             <m:sub>
                               <m:r>
-                                <a:rPr lang="en-SG" i="1" dirty="0" smtClean="0">
+                                <a:rPr lang="en-SG" i="1" dirty="0">
                                   <a:latin typeface="Cambria Math" panose="02040503050406030204" pitchFamily="18" charset="0"/>
                                 </a:rPr>
-                                <m:t>0</m:t>
+                                <m:t>𝑖</m:t>
                               </m:r>
                             </m:sub>
                           </m:sSub>
                           <m:r>
-                            <a:rPr lang="en-SG" i="1" dirty="0" smtClean="0">
+                            <a:rPr lang="en-SG" i="1" dirty="0">
                               <a:latin typeface="Cambria Math" panose="02040503050406030204" pitchFamily="18" charset="0"/>
                             </a:rPr>
                             <m:t>,</m:t>
@@ -11025,98 +11130,205 @@
                           <m:sSub>
                             <m:sSubPr>
                               <m:ctrlPr>
-                                <a:rPr lang="en-GB" b="0" i="1" dirty="0" smtClean="0">
+                                <a:rPr lang="en-GB" i="1" dirty="0">
                                   <a:latin typeface="Cambria Math" panose="02040503050406030204" pitchFamily="18" charset="0"/>
                                 </a:rPr>
                               </m:ctrlPr>
                             </m:sSubPr>
                             <m:e>
                               <m:r>
-                                <a:rPr lang="en-SG" i="1" dirty="0" smtClean="0">
+                                <a:rPr lang="en-GB" i="1" dirty="0">
                                   <a:latin typeface="Cambria Math" panose="02040503050406030204" pitchFamily="18" charset="0"/>
                                 </a:rPr>
-                                <m:t>𝑝</m:t>
+                                <m:t>𝑦</m:t>
                               </m:r>
                             </m:e>
                             <m:sub>
                               <m:r>
-                                <a:rPr lang="en-SG" i="1" dirty="0" smtClean="0">
+                                <a:rPr lang="en-GB" i="1" dirty="0">
                                   <a:latin typeface="Cambria Math" panose="02040503050406030204" pitchFamily="18" charset="0"/>
                                 </a:rPr>
-                                <m:t>1</m:t>
+                                <m:t>−</m:t>
                               </m:r>
-                            </m:sub>
-                          </m:sSub>
-                          <m:r>
-                            <a:rPr lang="en-SG" i="1" dirty="0" smtClean="0">
-                              <a:latin typeface="Cambria Math" panose="02040503050406030204" pitchFamily="18" charset="0"/>
-                            </a:rPr>
-                            <m:t>,</m:t>
-                          </m:r>
-                          <m:sSub>
-                            <m:sSubPr>
-                              <m:ctrlPr>
-                                <a:rPr lang="en-GB" b="0" i="1" dirty="0" smtClean="0">
+                              <m:r>
+                                <a:rPr lang="en-GB" i="1" dirty="0">
                                   <a:latin typeface="Cambria Math" panose="02040503050406030204" pitchFamily="18" charset="0"/>
                                 </a:rPr>
-                              </m:ctrlPr>
-                            </m:sSubPr>
-                            <m:e>
-                              <m:r>
-                                <a:rPr lang="en-SG" i="1" dirty="0" smtClean="0">
-                                  <a:latin typeface="Cambria Math" panose="02040503050406030204" pitchFamily="18" charset="0"/>
-                                </a:rPr>
-                                <m:t>𝑝</m:t>
-                              </m:r>
-                            </m:e>
-                            <m:sub>
-                              <m:r>
-                                <a:rPr lang="en-SG" i="1" dirty="0" smtClean="0">
-                                  <a:latin typeface="Cambria Math" panose="02040503050406030204" pitchFamily="18" charset="0"/>
-                                </a:rPr>
-                                <m:t>2</m:t>
-                              </m:r>
-                            </m:sub>
-                          </m:sSub>
-                          <m:r>
-                            <a:rPr lang="en-SG" i="1" dirty="0" smtClean="0">
-                              <a:latin typeface="Cambria Math" panose="02040503050406030204" pitchFamily="18" charset="0"/>
-                            </a:rPr>
-                            <m:t>,…</m:t>
-                          </m:r>
-                          <m:sSub>
-                            <m:sSubPr>
-                              <m:ctrlPr>
-                                <a:rPr lang="en-GB" b="0" i="1" dirty="0" smtClean="0">
-                                  <a:latin typeface="Cambria Math" panose="02040503050406030204" pitchFamily="18" charset="0"/>
-                                </a:rPr>
-                              </m:ctrlPr>
-                            </m:sSubPr>
-                            <m:e>
-                              <m:r>
-                                <a:rPr lang="en-SG" i="1" dirty="0" smtClean="0">
-                                  <a:latin typeface="Cambria Math" panose="02040503050406030204" pitchFamily="18" charset="0"/>
-                                </a:rPr>
-                                <m:t>𝑝</m:t>
-                              </m:r>
-                            </m:e>
-                            <m:sub>
-                              <m:r>
-                                <a:rPr lang="en-GB" b="0" i="1" dirty="0" smtClean="0">
-                                  <a:latin typeface="Cambria Math" panose="02040503050406030204" pitchFamily="18" charset="0"/>
-                                </a:rPr>
-                                <m:t>𝐾</m:t>
+                                <m:t>𝑖</m:t>
                               </m:r>
                             </m:sub>
                           </m:sSub>
                         </m:e>
                       </m:d>
                       <m:r>
-                        <a:rPr lang="en-GB" b="0" i="1" dirty="0" smtClean="0">
+                        <a:rPr lang="en-SG" i="1" dirty="0">
                           <a:latin typeface="Cambria Math" panose="02040503050406030204" pitchFamily="18" charset="0"/>
                         </a:rPr>
-                        <m:t>.</m:t>
+                        <m:t>=</m:t>
                       </m:r>
+                      <m:f>
+                        <m:fPr>
+                          <m:ctrlPr>
+                            <a:rPr lang="en-GB" i="1" dirty="0">
+                              <a:latin typeface="Cambria Math" panose="02040503050406030204" pitchFamily="18" charset="0"/>
+                            </a:rPr>
+                          </m:ctrlPr>
+                        </m:fPr>
+                        <m:num>
+                          <m:func>
+                            <m:funcPr>
+                              <m:ctrlPr>
+                                <a:rPr lang="en-GB" i="1" dirty="0">
+                                  <a:latin typeface="Cambria Math" panose="02040503050406030204" pitchFamily="18" charset="0"/>
+                                </a:rPr>
+                              </m:ctrlPr>
+                            </m:funcPr>
+                            <m:fName>
+                              <m:r>
+                                <m:rPr>
+                                  <m:sty m:val="p"/>
+                                </m:rPr>
+                                <a:rPr lang="en-GB" dirty="0">
+                                  <a:latin typeface="Cambria Math" panose="02040503050406030204" pitchFamily="18" charset="0"/>
+                                </a:rPr>
+                                <m:t>exp</m:t>
+                              </m:r>
+                            </m:fName>
+                            <m:e>
+                              <m:d>
+                                <m:dPr>
+                                  <m:ctrlPr>
+                                    <a:rPr lang="en-GB" i="1" dirty="0">
+                                      <a:latin typeface="Cambria Math" panose="02040503050406030204" pitchFamily="18" charset="0"/>
+                                    </a:rPr>
+                                  </m:ctrlPr>
+                                </m:dPr>
+                                <m:e>
+                                  <m:sSub>
+                                    <m:sSubPr>
+                                      <m:ctrlPr>
+                                        <a:rPr lang="en-GB" i="1" dirty="0">
+                                          <a:latin typeface="Cambria Math" panose="02040503050406030204" pitchFamily="18" charset="0"/>
+                                        </a:rPr>
+                                      </m:ctrlPr>
+                                    </m:sSubPr>
+                                    <m:e>
+                                      <m:r>
+                                        <a:rPr lang="en-GB" i="1" dirty="0">
+                                          <a:latin typeface="Cambria Math" panose="02040503050406030204" pitchFamily="18" charset="0"/>
+                                        </a:rPr>
+                                        <m:t>𝑦</m:t>
+                                      </m:r>
+                                    </m:e>
+                                    <m:sub>
+                                      <m:r>
+                                        <a:rPr lang="en-GB" i="1" dirty="0">
+                                          <a:latin typeface="Cambria Math" panose="02040503050406030204" pitchFamily="18" charset="0"/>
+                                        </a:rPr>
+                                        <m:t>𝑖</m:t>
+                                      </m:r>
+                                    </m:sub>
+                                  </m:sSub>
+                                </m:e>
+                              </m:d>
+                            </m:e>
+                          </m:func>
+                        </m:num>
+                        <m:den>
+                          <m:nary>
+                            <m:naryPr>
+                              <m:chr m:val="∑"/>
+                              <m:ctrlPr>
+                                <a:rPr lang="en-GB" i="1" dirty="0">
+                                  <a:latin typeface="Cambria Math" panose="02040503050406030204" pitchFamily="18" charset="0"/>
+                                </a:rPr>
+                              </m:ctrlPr>
+                            </m:naryPr>
+                            <m:sub>
+                              <m:r>
+                                <a:rPr lang="en-GB" i="1" dirty="0">
+                                  <a:latin typeface="Cambria Math" panose="02040503050406030204" pitchFamily="18" charset="0"/>
+                                </a:rPr>
+                                <m:t>𝑘</m:t>
+                              </m:r>
+                              <m:r>
+                                <a:rPr lang="en-GB" i="1" dirty="0">
+                                  <a:latin typeface="Cambria Math" panose="02040503050406030204" pitchFamily="18" charset="0"/>
+                                </a:rPr>
+                                <m:t>=0</m:t>
+                              </m:r>
+                            </m:sub>
+                            <m:sup>
+                              <m:r>
+                                <a:rPr lang="en-GB" i="1" dirty="0">
+                                  <a:latin typeface="Cambria Math" panose="02040503050406030204" pitchFamily="18" charset="0"/>
+                                </a:rPr>
+                                <m:t>𝐾</m:t>
+                              </m:r>
+                            </m:sup>
+                            <m:e>
+                              <m:func>
+                                <m:funcPr>
+                                  <m:ctrlPr>
+                                    <a:rPr lang="en-GB" i="1" dirty="0">
+                                      <a:latin typeface="Cambria Math" panose="02040503050406030204" pitchFamily="18" charset="0"/>
+                                    </a:rPr>
+                                  </m:ctrlPr>
+                                </m:funcPr>
+                                <m:fName>
+                                  <m:r>
+                                    <m:rPr>
+                                      <m:sty m:val="p"/>
+                                    </m:rPr>
+                                    <a:rPr lang="en-GB" dirty="0">
+                                      <a:latin typeface="Cambria Math" panose="02040503050406030204" pitchFamily="18" charset="0"/>
+                                    </a:rPr>
+                                    <m:t>exp</m:t>
+                                  </m:r>
+                                </m:fName>
+                                <m:e>
+                                  <m:d>
+                                    <m:dPr>
+                                      <m:ctrlPr>
+                                        <a:rPr lang="en-GB" i="1" dirty="0">
+                                          <a:latin typeface="Cambria Math" panose="02040503050406030204" pitchFamily="18" charset="0"/>
+                                        </a:rPr>
+                                      </m:ctrlPr>
+                                    </m:dPr>
+                                    <m:e>
+                                      <m:sSub>
+                                        <m:sSubPr>
+                                          <m:ctrlPr>
+                                            <a:rPr lang="en-GB" i="1" dirty="0">
+                                              <a:latin typeface="Cambria Math" panose="02040503050406030204" pitchFamily="18" charset="0"/>
+                                            </a:rPr>
+                                          </m:ctrlPr>
+                                        </m:sSubPr>
+                                        <m:e>
+                                          <m:r>
+                                            <a:rPr lang="en-GB" i="1" dirty="0">
+                                              <a:latin typeface="Cambria Math" panose="02040503050406030204" pitchFamily="18" charset="0"/>
+                                            </a:rPr>
+                                            <m:t>𝑦</m:t>
+                                          </m:r>
+                                        </m:e>
+                                        <m:sub>
+                                          <m:r>
+                                            <a:rPr lang="en-GB" i="1" dirty="0">
+                                              <a:latin typeface="Cambria Math" panose="02040503050406030204" pitchFamily="18" charset="0"/>
+                                            </a:rPr>
+                                            <m:t>𝑘</m:t>
+                                          </m:r>
+                                        </m:sub>
+                                      </m:sSub>
+                                    </m:e>
+                                  </m:d>
+                                </m:e>
+                              </m:func>
+                            </m:e>
+                          </m:nary>
+                        </m:den>
+                      </m:f>
                     </m:oMath>
                   </m:oMathPara>
                 </a14:m>
@@ -11126,12 +11338,22 @@
                 <a:pPr marL="0" indent="0">
                   <a:buNone/>
                 </a:pPr>
-                <a:endParaRPr lang="en-SG" dirty="0"/>
-              </a:p>
-              <a:p>
-                <a:pPr marL="0" indent="0">
-                  <a:buNone/>
-                </a:pPr>
+                <a:r>
+                  <a:rPr lang="en-SG" b="1" dirty="0"/>
+                  <a:t>Cool effect of </a:t>
+                </a:r>
+                <a:r>
+                  <a:rPr lang="en-SG" b="1" dirty="0" err="1">
+                    <a:solidFill>
+                      <a:srgbClr val="00B050"/>
+                    </a:solidFill>
+                  </a:rPr>
+                  <a:t>softmax</a:t>
+                </a:r>
+                <a:r>
+                  <a:rPr lang="en-SG" b="1" dirty="0"/>
+                  <a:t>: </a:t>
+                </a:r>
                 <a:r>
                   <a:rPr lang="en-SG" dirty="0"/>
                   <a:t>The new vector </a:t>
@@ -11252,7 +11474,7 @@
             </p:txBody>
           </p:sp>
         </mc:Choice>
-        <mc:Fallback xmlns="">
+        <mc:Fallback>
           <p:sp>
             <p:nvSpPr>
               <p:cNvPr id="3" name="Content Placeholder 2">
@@ -13627,7 +13849,23 @@
                   <a:srgbClr val="7030A0"/>
                 </a:solidFill>
               </a:rPr>
-              <a:t>In fact, we will not use the </a:t>
+              <a:t>In fact, we will </a:t>
+            </a:r>
+            <a:r>
+              <a:rPr lang="en-GB" b="1" u="sng" dirty="0">
+                <a:solidFill>
+                  <a:srgbClr val="FF0000"/>
+                </a:solidFill>
+              </a:rPr>
+              <a:t>not</a:t>
+            </a:r>
+            <a:r>
+              <a:rPr lang="en-GB" b="1" u="sng" dirty="0">
+                <a:solidFill>
+                  <a:srgbClr val="7030A0"/>
+                </a:solidFill>
+              </a:rPr>
+              <a:t> use the </a:t>
             </a:r>
             <a:r>
               <a:rPr lang="en-GB" b="1" u="sng" dirty="0" err="1">

--- a/W3/3. W3S3 final/W3S3.pptx
+++ b/W3/3. W3S3 final/W3S3.pptx
@@ -266,38 +266,15 @@
 </p:presentation>
 </file>
 
-<file path=ppt/revisionInfo.xml><?xml version="1.0" encoding="utf-8"?>
-<p1510:revInfo xmlns:a="http://schemas.openxmlformats.org/drawingml/2006/main" xmlns:r="http://schemas.openxmlformats.org/officeDocument/2006/relationships" xmlns:p1510="http://schemas.microsoft.com/office/powerpoint/2015/10/main">
-  <p1510:revLst>
-    <p1510:client id="{462F49A5-E8ED-4058-B09D-5D2994BDBA66}" v="42" dt="2026-01-16T05:54:22.450"/>
-  </p1510:revLst>
-</p1510:revInfo>
-</file>
-
 <file path=ppt/changesInfos/changesInfo1.xml><?xml version="1.0" encoding="utf-8"?>
 <pc:chgInfo xmlns:a="http://schemas.openxmlformats.org/drawingml/2006/main" xmlns:r="http://schemas.openxmlformats.org/officeDocument/2006/relationships" xmlns:ac="http://schemas.microsoft.com/office/drawing/2013/main/command" xmlns:pc="http://schemas.microsoft.com/office/powerpoint/2013/main/command">
   <pc:docChgLst>
     <pc:chgData name="Matthieu De Mari" userId="dfb708c9-d8dc-439f-9a3b-c772bf4a311c" providerId="ADAL" clId="{81E9B007-0C2C-493E-9B93-55A62C9C1F12}"/>
-    <pc:docChg chg="custSel modSld">
-      <pc:chgData name="Matthieu De Mari" userId="dfb708c9-d8dc-439f-9a3b-c772bf4a311c" providerId="ADAL" clId="{81E9B007-0C2C-493E-9B93-55A62C9C1F12}" dt="2026-01-16T05:55:10.274" v="172" actId="207"/>
+    <pc:docChg chg="custSel addSld delSld modSld modSection">
+      <pc:chgData name="Matthieu De Mari" userId="dfb708c9-d8dc-439f-9a3b-c772bf4a311c" providerId="ADAL" clId="{81E9B007-0C2C-493E-9B93-55A62C9C1F12}" dt="2026-02-12T11:16:25.979" v="451" actId="47"/>
       <pc:docMkLst>
         <pc:docMk/>
       </pc:docMkLst>
-      <pc:sldChg chg="modSp mod">
-        <pc:chgData name="Matthieu De Mari" userId="dfb708c9-d8dc-439f-9a3b-c772bf4a311c" providerId="ADAL" clId="{81E9B007-0C2C-493E-9B93-55A62C9C1F12}" dt="2026-01-12T06:33:40.610" v="0" actId="14100"/>
-        <pc:sldMkLst>
-          <pc:docMk/>
-          <pc:sldMk cId="2330822039" sldId="792"/>
-        </pc:sldMkLst>
-        <pc:spChg chg="mod">
-          <ac:chgData name="Matthieu De Mari" userId="dfb708c9-d8dc-439f-9a3b-c772bf4a311c" providerId="ADAL" clId="{81E9B007-0C2C-493E-9B93-55A62C9C1F12}" dt="2026-01-12T06:33:40.610" v="0" actId="14100"/>
-          <ac:spMkLst>
-            <pc:docMk/>
-            <pc:sldMk cId="2330822039" sldId="792"/>
-            <ac:spMk id="3" creationId="{BA2A0416-0B18-CDD3-9A37-B441AE8FAEC0}"/>
-          </ac:spMkLst>
-        </pc:spChg>
-      </pc:sldChg>
       <pc:sldChg chg="modSp mod">
         <pc:chgData name="Matthieu De Mari" userId="dfb708c9-d8dc-439f-9a3b-c772bf4a311c" providerId="ADAL" clId="{81E9B007-0C2C-493E-9B93-55A62C9C1F12}" dt="2026-01-16T05:50:03.505" v="23" actId="14100"/>
         <pc:sldMkLst>
@@ -388,6 +365,44 @@
           </ac:spMkLst>
         </pc:spChg>
       </pc:sldChg>
+      <pc:sldChg chg="modSp mod">
+        <pc:chgData name="Matthieu De Mari" userId="dfb708c9-d8dc-439f-9a3b-c772bf4a311c" providerId="ADAL" clId="{81E9B007-0C2C-493E-9B93-55A62C9C1F12}" dt="2026-02-12T06:35:58.056" v="174" actId="20577"/>
+        <pc:sldMkLst>
+          <pc:docMk/>
+          <pc:sldMk cId="3100375267" sldId="826"/>
+        </pc:sldMkLst>
+        <pc:spChg chg="mod">
+          <ac:chgData name="Matthieu De Mari" userId="dfb708c9-d8dc-439f-9a3b-c772bf4a311c" providerId="ADAL" clId="{81E9B007-0C2C-493E-9B93-55A62C9C1F12}" dt="2026-02-12T06:35:58.056" v="174" actId="20577"/>
+          <ac:spMkLst>
+            <pc:docMk/>
+            <pc:sldMk cId="3100375267" sldId="826"/>
+            <ac:spMk id="5" creationId="{7ACD5660-3AA0-1773-354B-1B2326A4442B}"/>
+          </ac:spMkLst>
+        </pc:spChg>
+      </pc:sldChg>
+      <pc:sldChg chg="modSp new del mod">
+        <pc:chgData name="Matthieu De Mari" userId="dfb708c9-d8dc-439f-9a3b-c772bf4a311c" providerId="ADAL" clId="{81E9B007-0C2C-493E-9B93-55A62C9C1F12}" dt="2026-02-12T11:16:25.979" v="451" actId="47"/>
+        <pc:sldMkLst>
+          <pc:docMk/>
+          <pc:sldMk cId="1555175949" sldId="834"/>
+        </pc:sldMkLst>
+        <pc:spChg chg="mod">
+          <ac:chgData name="Matthieu De Mari" userId="dfb708c9-d8dc-439f-9a3b-c772bf4a311c" providerId="ADAL" clId="{81E9B007-0C2C-493E-9B93-55A62C9C1F12}" dt="2026-02-12T07:26:48.765" v="186" actId="20577"/>
+          <ac:spMkLst>
+            <pc:docMk/>
+            <pc:sldMk cId="1555175949" sldId="834"/>
+            <ac:spMk id="2" creationId="{58AF63A4-8538-E02A-9FDA-9A627C85A26D}"/>
+          </ac:spMkLst>
+        </pc:spChg>
+        <pc:spChg chg="mod">
+          <ac:chgData name="Matthieu De Mari" userId="dfb708c9-d8dc-439f-9a3b-c772bf4a311c" providerId="ADAL" clId="{81E9B007-0C2C-493E-9B93-55A62C9C1F12}" dt="2026-02-12T11:16:21.548" v="450" actId="20577"/>
+          <ac:spMkLst>
+            <pc:docMk/>
+            <pc:sldMk cId="1555175949" sldId="834"/>
+            <ac:spMk id="3" creationId="{7F9CD917-B939-6FBE-97DF-60E7534E1541}"/>
+          </ac:spMkLst>
+        </pc:spChg>
+      </pc:sldChg>
     </pc:docChg>
   </pc:docChgLst>
 </pc:chgInfo>
@@ -475,7 +490,7 @@
           <a:p>
             <a:fld id="{61478373-EB31-4867-8CF0-FA31364748A5}" type="datetimeFigureOut">
               <a:rPr lang="en-GB" smtClean="0"/>
-              <a:t>16/01/2026</a:t>
+              <a:t>12/02/2026</a:t>
             </a:fld>
             <a:endParaRPr lang="en-GB"/>
           </a:p>
@@ -892,7 +907,7 @@
           <a:p>
             <a:fld id="{E85DF616-B21E-4EF6-A6A5-95E2FB3EB1A1}" type="datetimeFigureOut">
               <a:rPr lang="en-GB" smtClean="0"/>
-              <a:t>16/01/2026</a:t>
+              <a:t>12/02/2026</a:t>
             </a:fld>
             <a:endParaRPr lang="en-GB"/>
           </a:p>
@@ -1092,7 +1107,7 @@
           <a:p>
             <a:fld id="{E85DF616-B21E-4EF6-A6A5-95E2FB3EB1A1}" type="datetimeFigureOut">
               <a:rPr lang="en-GB" smtClean="0"/>
-              <a:t>16/01/2026</a:t>
+              <a:t>12/02/2026</a:t>
             </a:fld>
             <a:endParaRPr lang="en-GB"/>
           </a:p>
@@ -1302,7 +1317,7 @@
           <a:p>
             <a:fld id="{E85DF616-B21E-4EF6-A6A5-95E2FB3EB1A1}" type="datetimeFigureOut">
               <a:rPr lang="en-GB" smtClean="0"/>
-              <a:t>16/01/2026</a:t>
+              <a:t>12/02/2026</a:t>
             </a:fld>
             <a:endParaRPr lang="en-GB"/>
           </a:p>
@@ -1502,7 +1517,7 @@
           <a:p>
             <a:fld id="{E85DF616-B21E-4EF6-A6A5-95E2FB3EB1A1}" type="datetimeFigureOut">
               <a:rPr lang="en-GB" smtClean="0"/>
-              <a:t>16/01/2026</a:t>
+              <a:t>12/02/2026</a:t>
             </a:fld>
             <a:endParaRPr lang="en-GB"/>
           </a:p>
@@ -1778,7 +1793,7 @@
           <a:p>
             <a:fld id="{E85DF616-B21E-4EF6-A6A5-95E2FB3EB1A1}" type="datetimeFigureOut">
               <a:rPr lang="en-GB" smtClean="0"/>
-              <a:t>16/01/2026</a:t>
+              <a:t>12/02/2026</a:t>
             </a:fld>
             <a:endParaRPr lang="en-GB"/>
           </a:p>
@@ -2046,7 +2061,7 @@
           <a:p>
             <a:fld id="{E85DF616-B21E-4EF6-A6A5-95E2FB3EB1A1}" type="datetimeFigureOut">
               <a:rPr lang="en-GB" smtClean="0"/>
-              <a:t>16/01/2026</a:t>
+              <a:t>12/02/2026</a:t>
             </a:fld>
             <a:endParaRPr lang="en-GB"/>
           </a:p>
@@ -2461,7 +2476,7 @@
           <a:p>
             <a:fld id="{E85DF616-B21E-4EF6-A6A5-95E2FB3EB1A1}" type="datetimeFigureOut">
               <a:rPr lang="en-GB" smtClean="0"/>
-              <a:t>16/01/2026</a:t>
+              <a:t>12/02/2026</a:t>
             </a:fld>
             <a:endParaRPr lang="en-GB"/>
           </a:p>
@@ -2603,7 +2618,7 @@
           <a:p>
             <a:fld id="{E85DF616-B21E-4EF6-A6A5-95E2FB3EB1A1}" type="datetimeFigureOut">
               <a:rPr lang="en-GB" smtClean="0"/>
-              <a:t>16/01/2026</a:t>
+              <a:t>12/02/2026</a:t>
             </a:fld>
             <a:endParaRPr lang="en-GB"/>
           </a:p>
@@ -2716,7 +2731,7 @@
           <a:p>
             <a:fld id="{E85DF616-B21E-4EF6-A6A5-95E2FB3EB1A1}" type="datetimeFigureOut">
               <a:rPr lang="en-GB" smtClean="0"/>
-              <a:t>16/01/2026</a:t>
+              <a:t>12/02/2026</a:t>
             </a:fld>
             <a:endParaRPr lang="en-GB"/>
           </a:p>
@@ -3029,7 +3044,7 @@
           <a:p>
             <a:fld id="{E85DF616-B21E-4EF6-A6A5-95E2FB3EB1A1}" type="datetimeFigureOut">
               <a:rPr lang="en-GB" smtClean="0"/>
-              <a:t>16/01/2026</a:t>
+              <a:t>12/02/2026</a:t>
             </a:fld>
             <a:endParaRPr lang="en-GB"/>
           </a:p>
@@ -3318,7 +3333,7 @@
           <a:p>
             <a:fld id="{E85DF616-B21E-4EF6-A6A5-95E2FB3EB1A1}" type="datetimeFigureOut">
               <a:rPr lang="en-GB" smtClean="0"/>
-              <a:t>16/01/2026</a:t>
+              <a:t>12/02/2026</a:t>
             </a:fld>
             <a:endParaRPr lang="en-GB"/>
           </a:p>
@@ -3561,7 +3576,7 @@
           <a:p>
             <a:fld id="{E85DF616-B21E-4EF6-A6A5-95E2FB3EB1A1}" type="datetimeFigureOut">
               <a:rPr lang="en-GB" smtClean="0"/>
-              <a:t>16/01/2026</a:t>
+              <a:t>12/02/2026</a:t>
             </a:fld>
             <a:endParaRPr lang="en-GB"/>
           </a:p>
@@ -10814,8 +10829,8 @@
           </a:p>
         </p:txBody>
       </p:sp>
-      <mc:AlternateContent xmlns:mc="http://schemas.openxmlformats.org/markup-compatibility/2006">
-        <mc:Choice xmlns:a14="http://schemas.microsoft.com/office/drawing/2010/main" Requires="a14">
+      <mc:AlternateContent xmlns:mc="http://schemas.openxmlformats.org/markup-compatibility/2006" xmlns:a14="http://schemas.microsoft.com/office/drawing/2010/main">
+        <mc:Choice Requires="a14">
           <p:sp>
             <p:nvSpPr>
               <p:cNvPr id="3" name="Content Placeholder 2">
@@ -11474,7 +11489,7 @@
             </p:txBody>
           </p:sp>
         </mc:Choice>
-        <mc:Fallback>
+        <mc:Fallback xmlns="">
           <p:sp>
             <p:nvSpPr>
               <p:cNvPr id="3" name="Content Placeholder 2">
@@ -19761,11 +19776,7 @@
             </a:r>
             <a:r>
               <a:rPr lang="en-GB"/>
-              <a:t>and HW announcement</a:t>
-            </a:r>
-            <a:r>
-              <a:rPr lang="en-GB" dirty="0"/>
-              <a:t>!</a:t>
+              <a:t>and HW1 announcements!</a:t>
             </a:r>
             <a:endParaRPr lang="en-SG" dirty="0"/>
           </a:p>
